--- a/content/lessons/atomic-structure/btec-unit-1-chemistry-atomic-structure.pptx
+++ b/content/lessons/atomic-structure/btec-unit-1-chemistry-atomic-structure.pptx
@@ -3617,8 +3617,8 @@
         </p:nvSpPr>
         <p:spPr>
           <a:xfrm>
-            <a:off x="0" y="2880360"/>
-            <a:ext cx="12191695" cy="73152"/>
+            <a:off x="0" y="0"/>
+            <a:ext cx="146304" cy="6858000"/>
           </a:xfrm>
           <a:prstGeom prst="rect">
             <a:avLst/>
@@ -3660,80 +3660,80 @@
         </p:nvSpPr>
         <p:spPr>
           <a:xfrm>
+            <a:off x="640080" y="384048"/>
+            <a:ext cx="10972800" cy="868680"/>
+          </a:xfrm>
+          <a:prstGeom prst="rect">
+            <a:avLst/>
+          </a:prstGeom>
+          <a:noFill/>
+        </p:spPr>
+        <p:txBody>
+          <a:bodyPr wrap="square" anchor="t"/>
+          <a:lstStyle/>
+          <a:p>
+            <a:pPr algn="l"/>
+            <a:r>
+              <a:rPr sz="3000" b="1" i="0" a:ea="Calibri">
+                <a:solidFill>
+                  <a:srgbClr val="FFFFFF"/>
+                </a:solidFill>
+                <a:latin typeface="Calibri"/>
+              </a:rPr>
+              <a:t>Reading a nuclide symbol</a:t>
+            </a:r>
+          </a:p>
+        </p:txBody>
+      </p:sp>
+      <p:sp>
+        <p:nvSpPr>
+          <p:cNvPr id="5" name="TextBox 4"/>
+          <p:cNvSpPr txBox="1"/>
+          <p:nvPr/>
+        </p:nvSpPr>
+        <p:spPr>
+          <a:xfrm>
+            <a:off x="640080" y="1261872"/>
+            <a:ext cx="10972800" cy="502920"/>
+          </a:xfrm>
+          <a:prstGeom prst="rect">
+            <a:avLst/>
+          </a:prstGeom>
+          <a:noFill/>
+        </p:spPr>
+        <p:txBody>
+          <a:bodyPr wrap="square" anchor="t"/>
+          <a:lstStyle/>
+          <a:p>
+            <a:pPr algn="l"/>
+            <a:r>
+              <a:rPr sz="1700" b="0" i="0" a:ea="Calibri">
+                <a:solidFill>
+                  <a:srgbClr val="CCFBF1"/>
+                </a:solidFill>
+                <a:latin typeface="Calibri"/>
+              </a:rPr>
+              <a:t>Mass number top left, atomic number bottom left</a:t>
+            </a:r>
+          </a:p>
+        </p:txBody>
+      </p:sp>
+      <p:sp>
+        <p:nvSpPr>
+          <p:cNvPr id="6" name="Rounded Rectangle 5"/>
+          <p:cNvSpPr/>
+          <p:nvPr/>
+        </p:nvSpPr>
+        <p:spPr>
+          <a:xfrm>
             <a:off x="640080" y="1965960"/>
-            <a:ext cx="10881360" cy="914400"/>
-          </a:xfrm>
-          <a:prstGeom prst="rect">
-            <a:avLst/>
-          </a:prstGeom>
-          <a:noFill/>
-        </p:spPr>
-        <p:txBody>
-          <a:bodyPr wrap="square" anchor="t"/>
-          <a:lstStyle/>
-          <a:p>
-            <a:pPr algn="l"/>
-            <a:r>
-              <a:rPr sz="3400" b="1" i="0" a:ea="Calibri">
-                <a:solidFill>
-                  <a:srgbClr val="FFFFFF"/>
-                </a:solidFill>
-                <a:latin typeface="Calibri"/>
-              </a:rPr>
-              <a:t>Reading a nuclide symbol</a:t>
-            </a:r>
-          </a:p>
-        </p:txBody>
-      </p:sp>
-      <p:sp>
-        <p:nvSpPr>
-          <p:cNvPr id="5" name="TextBox 4"/>
-          <p:cNvSpPr txBox="1"/>
-          <p:nvPr/>
-        </p:nvSpPr>
-        <p:spPr>
-          <a:xfrm>
-            <a:off x="640080" y="3154680"/>
-            <a:ext cx="10881360" cy="822960"/>
-          </a:xfrm>
-          <a:prstGeom prst="rect">
-            <a:avLst/>
-          </a:prstGeom>
-          <a:noFill/>
-        </p:spPr>
-        <p:txBody>
-          <a:bodyPr wrap="square" anchor="t"/>
-          <a:lstStyle/>
-          <a:p>
-            <a:pPr algn="l"/>
-            <a:r>
-              <a:rPr sz="1800" b="0" i="0" a:ea="Calibri">
-                <a:solidFill>
-                  <a:srgbClr val="CCFBF1"/>
-                </a:solidFill>
-                <a:latin typeface="Calibri"/>
-              </a:rPr>
-              <a:t>Mass number top left, atomic number bottom left</a:t>
-            </a:r>
-          </a:p>
-        </p:txBody>
-      </p:sp>
-      <p:sp>
-        <p:nvSpPr>
-          <p:cNvPr id="6" name="Rectangle 5"/>
-          <p:cNvSpPr/>
-          <p:nvPr/>
-        </p:nvSpPr>
-        <p:spPr>
-          <a:xfrm>
-            <a:off x="0" y="6437376"/>
-            <a:ext cx="12191695" cy="420624"/>
-          </a:xfrm>
-          <a:prstGeom prst="rect">
-            <a:avLst/>
-          </a:prstGeom>
-          <a:solidFill>
-            <a:srgbClr val="004D40"/>
+            <a:ext cx="3520440" cy="3977639"/>
+          </a:xfrm>
+          <a:prstGeom prst="roundRect">
+            <a:avLst/>
+          </a:prstGeom>
+          <a:solidFill>
+            <a:srgbClr val="003D33"/>
           </a:solidFill>
           <a:ln>
             <a:noFill/>
@@ -3761,9 +3761,492 @@
           </a:p>
         </p:txBody>
       </p:sp>
+      <p:sp>
+        <p:nvSpPr>
+          <p:cNvPr id="7" name="Rectangle 6"/>
+          <p:cNvSpPr/>
+          <p:nvPr/>
+        </p:nvSpPr>
+        <p:spPr>
+          <a:xfrm>
+            <a:off x="640080" y="1965960"/>
+            <a:ext cx="3520440" cy="109728"/>
+          </a:xfrm>
+          <a:prstGeom prst="rect">
+            <a:avLst/>
+          </a:prstGeom>
+          <a:solidFill>
+            <a:srgbClr val="009688"/>
+          </a:solidFill>
+          <a:ln>
+            <a:noFill/>
+          </a:ln>
+        </p:spPr>
+        <p:style>
+          <a:lnRef idx="1">
+            <a:schemeClr val="accent1"/>
+          </a:lnRef>
+          <a:fillRef idx="3">
+            <a:schemeClr val="accent1"/>
+          </a:fillRef>
+          <a:effectRef idx="2">
+            <a:schemeClr val="accent1"/>
+          </a:effectRef>
+          <a:fontRef idx="minor">
+            <a:schemeClr val="lt1"/>
+          </a:fontRef>
+        </p:style>
+        <p:txBody>
+          <a:bodyPr rtlCol="0" anchor="ctr"/>
+          <a:lstStyle/>
+          <a:p>
+            <a:pPr algn="ctr"/>
+          </a:p>
+        </p:txBody>
+      </p:sp>
+      <p:sp>
+        <p:nvSpPr>
+          <p:cNvPr id="8" name="TextBox 7"/>
+          <p:cNvSpPr txBox="1"/>
+          <p:nvPr/>
+        </p:nvSpPr>
+        <p:spPr>
+          <a:xfrm>
+            <a:off x="841248" y="2212848"/>
+            <a:ext cx="3108960" cy="457200"/>
+          </a:xfrm>
+          <a:prstGeom prst="rect">
+            <a:avLst/>
+          </a:prstGeom>
+          <a:noFill/>
+        </p:spPr>
+        <p:txBody>
+          <a:bodyPr wrap="square" anchor="t"/>
+          <a:lstStyle/>
+          <a:p>
+            <a:pPr algn="l"/>
+            <a:r>
+              <a:rPr sz="1600" b="1" i="0" a:ea="Calibri">
+                <a:solidFill>
+                  <a:srgbClr val="CCFBF1"/>
+                </a:solidFill>
+                <a:latin typeface="Calibri"/>
+              </a:rPr>
+              <a:t>1   Look for</a:t>
+            </a:r>
+          </a:p>
+        </p:txBody>
+      </p:sp>
+      <p:sp>
+        <p:nvSpPr>
+          <p:cNvPr id="9" name="TextBox 8"/>
+          <p:cNvSpPr txBox="1"/>
+          <p:nvPr/>
+        </p:nvSpPr>
+        <p:spPr>
+          <a:xfrm>
+            <a:off x="841248" y="2788920"/>
+            <a:ext cx="3108960" cy="2880360"/>
+          </a:xfrm>
+          <a:prstGeom prst="rect">
+            <a:avLst/>
+          </a:prstGeom>
+          <a:noFill/>
+        </p:spPr>
+        <p:txBody>
+          <a:bodyPr wrap="square" anchor="t"/>
+          <a:lstStyle/>
+          <a:p>
+            <a:pPr algn="l"/>
+            <a:r>
+              <a:rPr sz="1600" b="0" i="0" a:ea="Calibri">
+                <a:solidFill>
+                  <a:srgbClr val="FFFFFF"/>
+                </a:solidFill>
+                <a:latin typeface="Calibri"/>
+              </a:rPr>
+              <a:t>A as a superscript, Z as a subscript — written </a:t>
+            </a:r>
+            <a:r>
+              <a:rPr sz="1600" b="0" i="0" a:ea="Calibri" baseline="30000">
+                <a:solidFill>
+                  <a:srgbClr val="FFFFFF"/>
+                </a:solidFill>
+                <a:latin typeface="Calibri"/>
+              </a:rPr>
+              <a:t>23</a:t>
+            </a:r>
+            <a:r>
+              <a:rPr sz="1600" b="0" i="0" a:ea="Calibri" baseline="-25000">
+                <a:solidFill>
+                  <a:srgbClr val="FFFFFF"/>
+                </a:solidFill>
+                <a:latin typeface="Calibri"/>
+              </a:rPr>
+              <a:t>11</a:t>
+            </a:r>
+            <a:r>
+              <a:rPr sz="1600" b="0" i="0" a:ea="Calibri">
+                <a:solidFill>
+                  <a:srgbClr val="FFFFFF"/>
+                </a:solidFill>
+                <a:latin typeface="Calibri"/>
+              </a:rPr>
+              <a:t>Na, never 23Na.</a:t>
+            </a:r>
+          </a:p>
+        </p:txBody>
+      </p:sp>
+      <p:sp>
+        <p:nvSpPr>
+          <p:cNvPr id="10" name="Rounded Rectangle 9"/>
+          <p:cNvSpPr/>
+          <p:nvPr/>
+        </p:nvSpPr>
+        <p:spPr>
+          <a:xfrm>
+            <a:off x="4343400" y="1965960"/>
+            <a:ext cx="3520440" cy="3977639"/>
+          </a:xfrm>
+          <a:prstGeom prst="roundRect">
+            <a:avLst/>
+          </a:prstGeom>
+          <a:solidFill>
+            <a:srgbClr val="003D33"/>
+          </a:solidFill>
+          <a:ln>
+            <a:noFill/>
+          </a:ln>
+        </p:spPr>
+        <p:style>
+          <a:lnRef idx="1">
+            <a:schemeClr val="accent1"/>
+          </a:lnRef>
+          <a:fillRef idx="3">
+            <a:schemeClr val="accent1"/>
+          </a:fillRef>
+          <a:effectRef idx="2">
+            <a:schemeClr val="accent1"/>
+          </a:effectRef>
+          <a:fontRef idx="minor">
+            <a:schemeClr val="lt1"/>
+          </a:fontRef>
+        </p:style>
+        <p:txBody>
+          <a:bodyPr rtlCol="0" anchor="ctr"/>
+          <a:lstStyle/>
+          <a:p>
+            <a:pPr algn="ctr"/>
+          </a:p>
+        </p:txBody>
+      </p:sp>
+      <p:sp>
+        <p:nvSpPr>
+          <p:cNvPr id="11" name="Rectangle 10"/>
+          <p:cNvSpPr/>
+          <p:nvPr/>
+        </p:nvSpPr>
+        <p:spPr>
+          <a:xfrm>
+            <a:off x="4343400" y="1965960"/>
+            <a:ext cx="3520440" cy="109728"/>
+          </a:xfrm>
+          <a:prstGeom prst="rect">
+            <a:avLst/>
+          </a:prstGeom>
+          <a:solidFill>
+            <a:srgbClr val="99F6E4"/>
+          </a:solidFill>
+          <a:ln>
+            <a:noFill/>
+          </a:ln>
+        </p:spPr>
+        <p:style>
+          <a:lnRef idx="1">
+            <a:schemeClr val="accent1"/>
+          </a:lnRef>
+          <a:fillRef idx="3">
+            <a:schemeClr val="accent1"/>
+          </a:fillRef>
+          <a:effectRef idx="2">
+            <a:schemeClr val="accent1"/>
+          </a:effectRef>
+          <a:fontRef idx="minor">
+            <a:schemeClr val="lt1"/>
+          </a:fontRef>
+        </p:style>
+        <p:txBody>
+          <a:bodyPr rtlCol="0" anchor="ctr"/>
+          <a:lstStyle/>
+          <a:p>
+            <a:pPr algn="ctr"/>
+          </a:p>
+        </p:txBody>
+      </p:sp>
+      <p:sp>
+        <p:nvSpPr>
+          <p:cNvPr id="12" name="TextBox 11"/>
+          <p:cNvSpPr txBox="1"/>
+          <p:nvPr/>
+        </p:nvSpPr>
+        <p:spPr>
+          <a:xfrm>
+            <a:off x="4544568" y="2212848"/>
+            <a:ext cx="3108960" cy="457200"/>
+          </a:xfrm>
+          <a:prstGeom prst="rect">
+            <a:avLst/>
+          </a:prstGeom>
+          <a:noFill/>
+        </p:spPr>
+        <p:txBody>
+          <a:bodyPr wrap="square" anchor="t"/>
+          <a:lstStyle/>
+          <a:p>
+            <a:pPr algn="l"/>
+            <a:r>
+              <a:rPr sz="1600" b="1" i="0" a:ea="Calibri">
+                <a:solidFill>
+                  <a:srgbClr val="CCFBF1"/>
+                </a:solidFill>
+                <a:latin typeface="Calibri"/>
+              </a:rPr>
+              <a:t>2   Say in full</a:t>
+            </a:r>
+          </a:p>
+        </p:txBody>
+      </p:sp>
+      <p:sp>
+        <p:nvSpPr>
+          <p:cNvPr id="13" name="TextBox 12"/>
+          <p:cNvSpPr txBox="1"/>
+          <p:nvPr/>
+        </p:nvSpPr>
+        <p:spPr>
+          <a:xfrm>
+            <a:off x="4544568" y="2788920"/>
+            <a:ext cx="3108960" cy="2880360"/>
+          </a:xfrm>
+          <a:prstGeom prst="rect">
+            <a:avLst/>
+          </a:prstGeom>
+          <a:noFill/>
+        </p:spPr>
+        <p:txBody>
+          <a:bodyPr wrap="square" anchor="t"/>
+          <a:lstStyle/>
+          <a:p>
+            <a:pPr algn="l"/>
+            <a:r>
+              <a:rPr sz="1600" b="0" i="0" a:ea="Calibri">
+                <a:solidFill>
+                  <a:srgbClr val="FFFFFF"/>
+                </a:solidFill>
+                <a:latin typeface="Calibri"/>
+              </a:rPr>
+              <a:t>Neutrons = A − Z. In a neutral atom, electrons = Z.</a:t>
+            </a:r>
+          </a:p>
+        </p:txBody>
+      </p:sp>
+      <p:sp>
+        <p:nvSpPr>
+          <p:cNvPr id="14" name="Rounded Rectangle 13"/>
+          <p:cNvSpPr/>
+          <p:nvPr/>
+        </p:nvSpPr>
+        <p:spPr>
+          <a:xfrm>
+            <a:off x="8046720" y="1965960"/>
+            <a:ext cx="3520440" cy="3977639"/>
+          </a:xfrm>
+          <a:prstGeom prst="roundRect">
+            <a:avLst/>
+          </a:prstGeom>
+          <a:solidFill>
+            <a:srgbClr val="003D33"/>
+          </a:solidFill>
+          <a:ln>
+            <a:noFill/>
+          </a:ln>
+        </p:spPr>
+        <p:style>
+          <a:lnRef idx="1">
+            <a:schemeClr val="accent1"/>
+          </a:lnRef>
+          <a:fillRef idx="3">
+            <a:schemeClr val="accent1"/>
+          </a:fillRef>
+          <a:effectRef idx="2">
+            <a:schemeClr val="accent1"/>
+          </a:effectRef>
+          <a:fontRef idx="minor">
+            <a:schemeClr val="lt1"/>
+          </a:fontRef>
+        </p:style>
+        <p:txBody>
+          <a:bodyPr rtlCol="0" anchor="ctr"/>
+          <a:lstStyle/>
+          <a:p>
+            <a:pPr algn="ctr"/>
+          </a:p>
+        </p:txBody>
+      </p:sp>
+      <p:sp>
+        <p:nvSpPr>
+          <p:cNvPr id="15" name="Rectangle 14"/>
+          <p:cNvSpPr/>
+          <p:nvPr/>
+        </p:nvSpPr>
+        <p:spPr>
+          <a:xfrm>
+            <a:off x="8046720" y="1965960"/>
+            <a:ext cx="3520440" cy="109728"/>
+          </a:xfrm>
+          <a:prstGeom prst="rect">
+            <a:avLst/>
+          </a:prstGeom>
+          <a:solidFill>
+            <a:srgbClr val="5EEAD4"/>
+          </a:solidFill>
+          <a:ln>
+            <a:noFill/>
+          </a:ln>
+        </p:spPr>
+        <p:style>
+          <a:lnRef idx="1">
+            <a:schemeClr val="accent1"/>
+          </a:lnRef>
+          <a:fillRef idx="3">
+            <a:schemeClr val="accent1"/>
+          </a:fillRef>
+          <a:effectRef idx="2">
+            <a:schemeClr val="accent1"/>
+          </a:effectRef>
+          <a:fontRef idx="minor">
+            <a:schemeClr val="lt1"/>
+          </a:fontRef>
+        </p:style>
+        <p:txBody>
+          <a:bodyPr rtlCol="0" anchor="ctr"/>
+          <a:lstStyle/>
+          <a:p>
+            <a:pPr algn="ctr"/>
+          </a:p>
+        </p:txBody>
+      </p:sp>
+      <p:sp>
+        <p:nvSpPr>
+          <p:cNvPr id="16" name="TextBox 15"/>
+          <p:cNvSpPr txBox="1"/>
+          <p:nvPr/>
+        </p:nvSpPr>
+        <p:spPr>
+          <a:xfrm>
+            <a:off x="8247888" y="2212848"/>
+            <a:ext cx="3108960" cy="457200"/>
+          </a:xfrm>
+          <a:prstGeom prst="rect">
+            <a:avLst/>
+          </a:prstGeom>
+          <a:noFill/>
+        </p:spPr>
+        <p:txBody>
+          <a:bodyPr wrap="square" anchor="t"/>
+          <a:lstStyle/>
+          <a:p>
+            <a:pPr algn="l"/>
+            <a:r>
+              <a:rPr sz="1600" b="1" i="0" a:ea="Calibri">
+                <a:solidFill>
+                  <a:srgbClr val="CCFBF1"/>
+                </a:solidFill>
+                <a:latin typeface="Calibri"/>
+              </a:rPr>
+              <a:t>3   Level 3 move</a:t>
+            </a:r>
+          </a:p>
+        </p:txBody>
+      </p:sp>
+      <p:sp>
+        <p:nvSpPr>
+          <p:cNvPr id="17" name="TextBox 16"/>
+          <p:cNvSpPr txBox="1"/>
+          <p:nvPr/>
+        </p:nvSpPr>
+        <p:spPr>
+          <a:xfrm>
+            <a:off x="8247888" y="2788920"/>
+            <a:ext cx="3108960" cy="2880360"/>
+          </a:xfrm>
+          <a:prstGeom prst="rect">
+            <a:avLst/>
+          </a:prstGeom>
+          <a:noFill/>
+        </p:spPr>
+        <p:txBody>
+          <a:bodyPr wrap="square" anchor="t"/>
+          <a:lstStyle/>
+          <a:p>
+            <a:pPr algn="l"/>
+            <a:r>
+              <a:rPr sz="1600" b="0" i="0" a:ea="Calibri">
+                <a:solidFill>
+                  <a:srgbClr val="FFFFFF"/>
+                </a:solidFill>
+                <a:latin typeface="Calibri"/>
+              </a:rPr>
+              <a:t>For an ion, change electrons only. The nucleus — and the element — stay the same.</a:t>
+            </a:r>
+          </a:p>
+        </p:txBody>
+      </p:sp>
+      <p:sp>
+        <p:nvSpPr>
+          <p:cNvPr id="18" name="Rectangle 17"/>
+          <p:cNvSpPr/>
+          <p:nvPr/>
+        </p:nvSpPr>
+        <p:spPr>
+          <a:xfrm>
+            <a:off x="0" y="6437376"/>
+            <a:ext cx="12191695" cy="420624"/>
+          </a:xfrm>
+          <a:prstGeom prst="rect">
+            <a:avLst/>
+          </a:prstGeom>
+          <a:solidFill>
+            <a:srgbClr val="004D40"/>
+          </a:solidFill>
+          <a:ln>
+            <a:noFill/>
+          </a:ln>
+        </p:spPr>
+        <p:style>
+          <a:lnRef idx="1">
+            <a:schemeClr val="accent1"/>
+          </a:lnRef>
+          <a:fillRef idx="3">
+            <a:schemeClr val="accent1"/>
+          </a:fillRef>
+          <a:effectRef idx="2">
+            <a:schemeClr val="accent1"/>
+          </a:effectRef>
+          <a:fontRef idx="minor">
+            <a:schemeClr val="lt1"/>
+          </a:fontRef>
+        </p:style>
+        <p:txBody>
+          <a:bodyPr rtlCol="0" anchor="ctr"/>
+          <a:lstStyle/>
+          <a:p>
+            <a:pPr algn="ctr"/>
+          </a:p>
+        </p:txBody>
+      </p:sp>
       <p:pic>
         <p:nvPicPr>
-          <p:cNvPr id="7" name="Picture 6" descr="jdscience-footer-logo.png"/>
+          <p:cNvPr id="19" name="Picture 18" descr="jdscience-footer-logo.png"/>
           <p:cNvPicPr>
             <a:picLocks noChangeAspect="1"/>
           </p:cNvPicPr>
@@ -3787,7 +4270,7 @@
       </p:pic>
       <p:sp>
         <p:nvSpPr>
-          <p:cNvPr id="8" name="TextBox 7"/>
+          <p:cNvPr id="20" name="TextBox 19"/>
           <p:cNvSpPr txBox="1"/>
           <p:nvPr/>
         </p:nvSpPr>
@@ -3820,7 +4303,7 @@
       </p:sp>
       <p:sp>
         <p:nvSpPr>
-          <p:cNvPr id="9" name="TextBox 8"/>
+          <p:cNvPr id="21" name="TextBox 20"/>
           <p:cNvSpPr txBox="1"/>
           <p:nvPr/>
         </p:nvSpPr>
@@ -3853,7 +4336,7 @@
       </p:sp>
       <p:sp>
         <p:nvSpPr>
-          <p:cNvPr id="10" name="TextBox 9"/>
+          <p:cNvPr id="22" name="TextBox 21"/>
           <p:cNvSpPr txBox="1"/>
           <p:nvPr/>
         </p:nvSpPr>
@@ -4114,8 +4597,8 @@
         </p:nvSpPr>
         <p:spPr>
           <a:xfrm>
-            <a:off x="6931152" y="1069848"/>
-            <a:ext cx="4617720" cy="685800"/>
+            <a:off x="6931152" y="1051560"/>
+            <a:ext cx="4617720" cy="722376"/>
           </a:xfrm>
           <a:prstGeom prst="rect">
             <a:avLst/>
@@ -4233,8 +4716,8 @@
         </p:nvSpPr>
         <p:spPr>
           <a:xfrm>
-            <a:off x="6931152" y="2029968"/>
-            <a:ext cx="4617720" cy="685800"/>
+            <a:off x="6931152" y="2011680"/>
+            <a:ext cx="4617720" cy="722376"/>
           </a:xfrm>
           <a:prstGeom prst="rect">
             <a:avLst/>
@@ -4352,8 +4835,8 @@
         </p:nvSpPr>
         <p:spPr>
           <a:xfrm>
-            <a:off x="6931152" y="2990088"/>
-            <a:ext cx="4617720" cy="685800"/>
+            <a:off x="6931152" y="2971800"/>
+            <a:ext cx="4617720" cy="722376"/>
           </a:xfrm>
           <a:prstGeom prst="rect">
             <a:avLst/>
@@ -4471,8 +4954,8 @@
         </p:nvSpPr>
         <p:spPr>
           <a:xfrm>
-            <a:off x="6931152" y="3950208"/>
-            <a:ext cx="4617720" cy="685800"/>
+            <a:off x="6931152" y="3931920"/>
+            <a:ext cx="4617720" cy="722376"/>
           </a:xfrm>
           <a:prstGeom prst="rect">
             <a:avLst/>
@@ -4590,8 +5073,8 @@
         </p:nvSpPr>
         <p:spPr>
           <a:xfrm>
-            <a:off x="6931152" y="4910328"/>
-            <a:ext cx="4617720" cy="685800"/>
+            <a:off x="6931152" y="4892040"/>
+            <a:ext cx="4617720" cy="722376"/>
           </a:xfrm>
           <a:prstGeom prst="rect">
             <a:avLst/>
@@ -7977,8 +8460,8 @@
         </p:nvSpPr>
         <p:spPr>
           <a:xfrm>
-            <a:off x="0" y="2880360"/>
-            <a:ext cx="12191695" cy="73152"/>
+            <a:off x="0" y="0"/>
+            <a:ext cx="146304" cy="6858000"/>
           </a:xfrm>
           <a:prstGeom prst="rect">
             <a:avLst/>
@@ -8020,80 +8503,80 @@
         </p:nvSpPr>
         <p:spPr>
           <a:xfrm>
+            <a:off x="640080" y="384048"/>
+            <a:ext cx="10972800" cy="868680"/>
+          </a:xfrm>
+          <a:prstGeom prst="rect">
+            <a:avLst/>
+          </a:prstGeom>
+          <a:noFill/>
+        </p:spPr>
+        <p:txBody>
+          <a:bodyPr wrap="square" anchor="t"/>
+          <a:lstStyle/>
+          <a:p>
+            <a:pPr algn="l"/>
+            <a:r>
+              <a:rPr sz="3000" b="1" i="0" a:ea="Calibri">
+                <a:solidFill>
+                  <a:srgbClr val="FFFFFF"/>
+                </a:solidFill>
+                <a:latin typeface="Calibri"/>
+              </a:rPr>
+              <a:t>Isotopes</a:t>
+            </a:r>
+          </a:p>
+        </p:txBody>
+      </p:sp>
+      <p:sp>
+        <p:nvSpPr>
+          <p:cNvPr id="5" name="TextBox 4"/>
+          <p:cNvSpPr txBox="1"/>
+          <p:nvPr/>
+        </p:nvSpPr>
+        <p:spPr>
+          <a:xfrm>
+            <a:off x="640080" y="1261872"/>
+            <a:ext cx="10972800" cy="502920"/>
+          </a:xfrm>
+          <a:prstGeom prst="rect">
+            <a:avLst/>
+          </a:prstGeom>
+          <a:noFill/>
+        </p:spPr>
+        <p:txBody>
+          <a:bodyPr wrap="square" anchor="t"/>
+          <a:lstStyle/>
+          <a:p>
+            <a:pPr algn="l"/>
+            <a:r>
+              <a:rPr sz="1700" b="0" i="0" a:ea="Calibri">
+                <a:solidFill>
+                  <a:srgbClr val="CCFBF1"/>
+                </a:solidFill>
+                <a:latin typeface="Calibri"/>
+              </a:rPr>
+              <a:t>Same Z, different neutron number</a:t>
+            </a:r>
+          </a:p>
+        </p:txBody>
+      </p:sp>
+      <p:sp>
+        <p:nvSpPr>
+          <p:cNvPr id="6" name="Rounded Rectangle 5"/>
+          <p:cNvSpPr/>
+          <p:nvPr/>
+        </p:nvSpPr>
+        <p:spPr>
+          <a:xfrm>
             <a:off x="640080" y="1965960"/>
-            <a:ext cx="10881360" cy="914400"/>
-          </a:xfrm>
-          <a:prstGeom prst="rect">
-            <a:avLst/>
-          </a:prstGeom>
-          <a:noFill/>
-        </p:spPr>
-        <p:txBody>
-          <a:bodyPr wrap="square" anchor="t"/>
-          <a:lstStyle/>
-          <a:p>
-            <a:pPr algn="l"/>
-            <a:r>
-              <a:rPr sz="3400" b="1" i="0" a:ea="Calibri">
-                <a:solidFill>
-                  <a:srgbClr val="FFFFFF"/>
-                </a:solidFill>
-                <a:latin typeface="Calibri"/>
-              </a:rPr>
-              <a:t>Isotopes</a:t>
-            </a:r>
-          </a:p>
-        </p:txBody>
-      </p:sp>
-      <p:sp>
-        <p:nvSpPr>
-          <p:cNvPr id="5" name="TextBox 4"/>
-          <p:cNvSpPr txBox="1"/>
-          <p:nvPr/>
-        </p:nvSpPr>
-        <p:spPr>
-          <a:xfrm>
-            <a:off x="640080" y="3154680"/>
-            <a:ext cx="10881360" cy="822960"/>
-          </a:xfrm>
-          <a:prstGeom prst="rect">
-            <a:avLst/>
-          </a:prstGeom>
-          <a:noFill/>
-        </p:spPr>
-        <p:txBody>
-          <a:bodyPr wrap="square" anchor="t"/>
-          <a:lstStyle/>
-          <a:p>
-            <a:pPr algn="l"/>
-            <a:r>
-              <a:rPr sz="1800" b="0" i="0" a:ea="Calibri">
-                <a:solidFill>
-                  <a:srgbClr val="CCFBF1"/>
-                </a:solidFill>
-                <a:latin typeface="Calibri"/>
-              </a:rPr>
-              <a:t>Same Z, different neutron number</a:t>
-            </a:r>
-          </a:p>
-        </p:txBody>
-      </p:sp>
-      <p:sp>
-        <p:nvSpPr>
-          <p:cNvPr id="6" name="Rectangle 5"/>
-          <p:cNvSpPr/>
-          <p:nvPr/>
-        </p:nvSpPr>
-        <p:spPr>
-          <a:xfrm>
-            <a:off x="0" y="6437376"/>
-            <a:ext cx="12191695" cy="420624"/>
-          </a:xfrm>
-          <a:prstGeom prst="rect">
-            <a:avLst/>
-          </a:prstGeom>
-          <a:solidFill>
-            <a:srgbClr val="004D40"/>
+            <a:ext cx="3520440" cy="3977639"/>
+          </a:xfrm>
+          <a:prstGeom prst="roundRect">
+            <a:avLst/>
+          </a:prstGeom>
+          <a:solidFill>
+            <a:srgbClr val="003D33"/>
           </a:solidFill>
           <a:ln>
             <a:noFill/>
@@ -8121,9 +8604,465 @@
           </a:p>
         </p:txBody>
       </p:sp>
+      <p:sp>
+        <p:nvSpPr>
+          <p:cNvPr id="7" name="Rectangle 6"/>
+          <p:cNvSpPr/>
+          <p:nvPr/>
+        </p:nvSpPr>
+        <p:spPr>
+          <a:xfrm>
+            <a:off x="640080" y="1965960"/>
+            <a:ext cx="3520440" cy="109728"/>
+          </a:xfrm>
+          <a:prstGeom prst="rect">
+            <a:avLst/>
+          </a:prstGeom>
+          <a:solidFill>
+            <a:srgbClr val="009688"/>
+          </a:solidFill>
+          <a:ln>
+            <a:noFill/>
+          </a:ln>
+        </p:spPr>
+        <p:style>
+          <a:lnRef idx="1">
+            <a:schemeClr val="accent1"/>
+          </a:lnRef>
+          <a:fillRef idx="3">
+            <a:schemeClr val="accent1"/>
+          </a:fillRef>
+          <a:effectRef idx="2">
+            <a:schemeClr val="accent1"/>
+          </a:effectRef>
+          <a:fontRef idx="minor">
+            <a:schemeClr val="lt1"/>
+          </a:fontRef>
+        </p:style>
+        <p:txBody>
+          <a:bodyPr rtlCol="0" anchor="ctr"/>
+          <a:lstStyle/>
+          <a:p>
+            <a:pPr algn="ctr"/>
+          </a:p>
+        </p:txBody>
+      </p:sp>
+      <p:sp>
+        <p:nvSpPr>
+          <p:cNvPr id="8" name="TextBox 7"/>
+          <p:cNvSpPr txBox="1"/>
+          <p:nvPr/>
+        </p:nvSpPr>
+        <p:spPr>
+          <a:xfrm>
+            <a:off x="841248" y="2212848"/>
+            <a:ext cx="3108960" cy="457200"/>
+          </a:xfrm>
+          <a:prstGeom prst="rect">
+            <a:avLst/>
+          </a:prstGeom>
+          <a:noFill/>
+        </p:spPr>
+        <p:txBody>
+          <a:bodyPr wrap="square" anchor="t"/>
+          <a:lstStyle/>
+          <a:p>
+            <a:pPr algn="l"/>
+            <a:r>
+              <a:rPr sz="1600" b="1" i="0" a:ea="Calibri">
+                <a:solidFill>
+                  <a:srgbClr val="CCFBF1"/>
+                </a:solidFill>
+                <a:latin typeface="Calibri"/>
+              </a:rPr>
+              <a:t>1   Look for</a:t>
+            </a:r>
+          </a:p>
+        </p:txBody>
+      </p:sp>
+      <p:sp>
+        <p:nvSpPr>
+          <p:cNvPr id="9" name="TextBox 8"/>
+          <p:cNvSpPr txBox="1"/>
+          <p:nvPr/>
+        </p:nvSpPr>
+        <p:spPr>
+          <a:xfrm>
+            <a:off x="841248" y="2788920"/>
+            <a:ext cx="3108960" cy="2880360"/>
+          </a:xfrm>
+          <a:prstGeom prst="rect">
+            <a:avLst/>
+          </a:prstGeom>
+          <a:noFill/>
+        </p:spPr>
+        <p:txBody>
+          <a:bodyPr wrap="square" anchor="t"/>
+          <a:lstStyle/>
+          <a:p>
+            <a:pPr algn="l"/>
+            <a:r>
+              <a:rPr sz="1600" b="0" i="0" a:ea="Calibri">
+                <a:solidFill>
+                  <a:srgbClr val="FFFFFF"/>
+                </a:solidFill>
+                <a:latin typeface="Calibri"/>
+              </a:rPr>
+              <a:t>Two nuclei with the same proton number and different neutron numbers.</a:t>
+            </a:r>
+          </a:p>
+        </p:txBody>
+      </p:sp>
+      <p:sp>
+        <p:nvSpPr>
+          <p:cNvPr id="10" name="Rounded Rectangle 9"/>
+          <p:cNvSpPr/>
+          <p:nvPr/>
+        </p:nvSpPr>
+        <p:spPr>
+          <a:xfrm>
+            <a:off x="4343400" y="1965960"/>
+            <a:ext cx="3520440" cy="3977639"/>
+          </a:xfrm>
+          <a:prstGeom prst="roundRect">
+            <a:avLst/>
+          </a:prstGeom>
+          <a:solidFill>
+            <a:srgbClr val="003D33"/>
+          </a:solidFill>
+          <a:ln>
+            <a:noFill/>
+          </a:ln>
+        </p:spPr>
+        <p:style>
+          <a:lnRef idx="1">
+            <a:schemeClr val="accent1"/>
+          </a:lnRef>
+          <a:fillRef idx="3">
+            <a:schemeClr val="accent1"/>
+          </a:fillRef>
+          <a:effectRef idx="2">
+            <a:schemeClr val="accent1"/>
+          </a:effectRef>
+          <a:fontRef idx="minor">
+            <a:schemeClr val="lt1"/>
+          </a:fontRef>
+        </p:style>
+        <p:txBody>
+          <a:bodyPr rtlCol="0" anchor="ctr"/>
+          <a:lstStyle/>
+          <a:p>
+            <a:pPr algn="ctr"/>
+          </a:p>
+        </p:txBody>
+      </p:sp>
+      <p:sp>
+        <p:nvSpPr>
+          <p:cNvPr id="11" name="Rectangle 10"/>
+          <p:cNvSpPr/>
+          <p:nvPr/>
+        </p:nvSpPr>
+        <p:spPr>
+          <a:xfrm>
+            <a:off x="4343400" y="1965960"/>
+            <a:ext cx="3520440" cy="109728"/>
+          </a:xfrm>
+          <a:prstGeom prst="rect">
+            <a:avLst/>
+          </a:prstGeom>
+          <a:solidFill>
+            <a:srgbClr val="99F6E4"/>
+          </a:solidFill>
+          <a:ln>
+            <a:noFill/>
+          </a:ln>
+        </p:spPr>
+        <p:style>
+          <a:lnRef idx="1">
+            <a:schemeClr val="accent1"/>
+          </a:lnRef>
+          <a:fillRef idx="3">
+            <a:schemeClr val="accent1"/>
+          </a:fillRef>
+          <a:effectRef idx="2">
+            <a:schemeClr val="accent1"/>
+          </a:effectRef>
+          <a:fontRef idx="minor">
+            <a:schemeClr val="lt1"/>
+          </a:fontRef>
+        </p:style>
+        <p:txBody>
+          <a:bodyPr rtlCol="0" anchor="ctr"/>
+          <a:lstStyle/>
+          <a:p>
+            <a:pPr algn="ctr"/>
+          </a:p>
+        </p:txBody>
+      </p:sp>
+      <p:sp>
+        <p:nvSpPr>
+          <p:cNvPr id="12" name="TextBox 11"/>
+          <p:cNvSpPr txBox="1"/>
+          <p:nvPr/>
+        </p:nvSpPr>
+        <p:spPr>
+          <a:xfrm>
+            <a:off x="4544568" y="2212848"/>
+            <a:ext cx="3108960" cy="457200"/>
+          </a:xfrm>
+          <a:prstGeom prst="rect">
+            <a:avLst/>
+          </a:prstGeom>
+          <a:noFill/>
+        </p:spPr>
+        <p:txBody>
+          <a:bodyPr wrap="square" anchor="t"/>
+          <a:lstStyle/>
+          <a:p>
+            <a:pPr algn="l"/>
+            <a:r>
+              <a:rPr sz="1600" b="1" i="0" a:ea="Calibri">
+                <a:solidFill>
+                  <a:srgbClr val="CCFBF1"/>
+                </a:solidFill>
+                <a:latin typeface="Calibri"/>
+              </a:rPr>
+              <a:t>2   Say in full</a:t>
+            </a:r>
+          </a:p>
+        </p:txBody>
+      </p:sp>
+      <p:sp>
+        <p:nvSpPr>
+          <p:cNvPr id="13" name="TextBox 12"/>
+          <p:cNvSpPr txBox="1"/>
+          <p:nvPr/>
+        </p:nvSpPr>
+        <p:spPr>
+          <a:xfrm>
+            <a:off x="4544568" y="2788920"/>
+            <a:ext cx="3108960" cy="2880360"/>
+          </a:xfrm>
+          <a:prstGeom prst="rect">
+            <a:avLst/>
+          </a:prstGeom>
+          <a:noFill/>
+        </p:spPr>
+        <p:txBody>
+          <a:bodyPr wrap="square" anchor="t"/>
+          <a:lstStyle/>
+          <a:p>
+            <a:pPr algn="l"/>
+            <a:r>
+              <a:rPr sz="1600" b="0" i="0" a:ea="Calibri">
+                <a:solidFill>
+                  <a:srgbClr val="FFFFFF"/>
+                </a:solidFill>
+                <a:latin typeface="Calibri"/>
+              </a:rPr>
+              <a:t>Isotopes are atoms of the same element with different mass numbers.</a:t>
+            </a:r>
+          </a:p>
+        </p:txBody>
+      </p:sp>
+      <p:sp>
+        <p:nvSpPr>
+          <p:cNvPr id="14" name="Rounded Rectangle 13"/>
+          <p:cNvSpPr/>
+          <p:nvPr/>
+        </p:nvSpPr>
+        <p:spPr>
+          <a:xfrm>
+            <a:off x="8046720" y="1965960"/>
+            <a:ext cx="3520440" cy="3977639"/>
+          </a:xfrm>
+          <a:prstGeom prst="roundRect">
+            <a:avLst/>
+          </a:prstGeom>
+          <a:solidFill>
+            <a:srgbClr val="003D33"/>
+          </a:solidFill>
+          <a:ln>
+            <a:noFill/>
+          </a:ln>
+        </p:spPr>
+        <p:style>
+          <a:lnRef idx="1">
+            <a:schemeClr val="accent1"/>
+          </a:lnRef>
+          <a:fillRef idx="3">
+            <a:schemeClr val="accent1"/>
+          </a:fillRef>
+          <a:effectRef idx="2">
+            <a:schemeClr val="accent1"/>
+          </a:effectRef>
+          <a:fontRef idx="minor">
+            <a:schemeClr val="lt1"/>
+          </a:fontRef>
+        </p:style>
+        <p:txBody>
+          <a:bodyPr rtlCol="0" anchor="ctr"/>
+          <a:lstStyle/>
+          <a:p>
+            <a:pPr algn="ctr"/>
+          </a:p>
+        </p:txBody>
+      </p:sp>
+      <p:sp>
+        <p:nvSpPr>
+          <p:cNvPr id="15" name="Rectangle 14"/>
+          <p:cNvSpPr/>
+          <p:nvPr/>
+        </p:nvSpPr>
+        <p:spPr>
+          <a:xfrm>
+            <a:off x="8046720" y="1965960"/>
+            <a:ext cx="3520440" cy="109728"/>
+          </a:xfrm>
+          <a:prstGeom prst="rect">
+            <a:avLst/>
+          </a:prstGeom>
+          <a:solidFill>
+            <a:srgbClr val="5EEAD4"/>
+          </a:solidFill>
+          <a:ln>
+            <a:noFill/>
+          </a:ln>
+        </p:spPr>
+        <p:style>
+          <a:lnRef idx="1">
+            <a:schemeClr val="accent1"/>
+          </a:lnRef>
+          <a:fillRef idx="3">
+            <a:schemeClr val="accent1"/>
+          </a:fillRef>
+          <a:effectRef idx="2">
+            <a:schemeClr val="accent1"/>
+          </a:effectRef>
+          <a:fontRef idx="minor">
+            <a:schemeClr val="lt1"/>
+          </a:fontRef>
+        </p:style>
+        <p:txBody>
+          <a:bodyPr rtlCol="0" anchor="ctr"/>
+          <a:lstStyle/>
+          <a:p>
+            <a:pPr algn="ctr"/>
+          </a:p>
+        </p:txBody>
+      </p:sp>
+      <p:sp>
+        <p:nvSpPr>
+          <p:cNvPr id="16" name="TextBox 15"/>
+          <p:cNvSpPr txBox="1"/>
+          <p:nvPr/>
+        </p:nvSpPr>
+        <p:spPr>
+          <a:xfrm>
+            <a:off x="8247888" y="2212848"/>
+            <a:ext cx="3108960" cy="457200"/>
+          </a:xfrm>
+          <a:prstGeom prst="rect">
+            <a:avLst/>
+          </a:prstGeom>
+          <a:noFill/>
+        </p:spPr>
+        <p:txBody>
+          <a:bodyPr wrap="square" anchor="t"/>
+          <a:lstStyle/>
+          <a:p>
+            <a:pPr algn="l"/>
+            <a:r>
+              <a:rPr sz="1600" b="1" i="0" a:ea="Calibri">
+                <a:solidFill>
+                  <a:srgbClr val="CCFBF1"/>
+                </a:solidFill>
+                <a:latin typeface="Calibri"/>
+              </a:rPr>
+              <a:t>3   Level 3 move</a:t>
+            </a:r>
+          </a:p>
+        </p:txBody>
+      </p:sp>
+      <p:sp>
+        <p:nvSpPr>
+          <p:cNvPr id="17" name="TextBox 16"/>
+          <p:cNvSpPr txBox="1"/>
+          <p:nvPr/>
+        </p:nvSpPr>
+        <p:spPr>
+          <a:xfrm>
+            <a:off x="8247888" y="2788920"/>
+            <a:ext cx="3108960" cy="2880360"/>
+          </a:xfrm>
+          <a:prstGeom prst="rect">
+            <a:avLst/>
+          </a:prstGeom>
+          <a:noFill/>
+        </p:spPr>
+        <p:txBody>
+          <a:bodyPr wrap="square" anchor="t"/>
+          <a:lstStyle/>
+          <a:p>
+            <a:pPr algn="l"/>
+            <a:r>
+              <a:rPr sz="1600" b="0" i="0" a:ea="Calibri">
+                <a:solidFill>
+                  <a:srgbClr val="FFFFFF"/>
+                </a:solidFill>
+                <a:latin typeface="Calibri"/>
+              </a:rPr>
+              <a:t>Chemical properties match because the electron arrangement is the same.</a:t>
+            </a:r>
+          </a:p>
+        </p:txBody>
+      </p:sp>
+      <p:sp>
+        <p:nvSpPr>
+          <p:cNvPr id="18" name="Rectangle 17"/>
+          <p:cNvSpPr/>
+          <p:nvPr/>
+        </p:nvSpPr>
+        <p:spPr>
+          <a:xfrm>
+            <a:off x="0" y="6437376"/>
+            <a:ext cx="12191695" cy="420624"/>
+          </a:xfrm>
+          <a:prstGeom prst="rect">
+            <a:avLst/>
+          </a:prstGeom>
+          <a:solidFill>
+            <a:srgbClr val="004D40"/>
+          </a:solidFill>
+          <a:ln>
+            <a:noFill/>
+          </a:ln>
+        </p:spPr>
+        <p:style>
+          <a:lnRef idx="1">
+            <a:schemeClr val="accent1"/>
+          </a:lnRef>
+          <a:fillRef idx="3">
+            <a:schemeClr val="accent1"/>
+          </a:fillRef>
+          <a:effectRef idx="2">
+            <a:schemeClr val="accent1"/>
+          </a:effectRef>
+          <a:fontRef idx="minor">
+            <a:schemeClr val="lt1"/>
+          </a:fontRef>
+        </p:style>
+        <p:txBody>
+          <a:bodyPr rtlCol="0" anchor="ctr"/>
+          <a:lstStyle/>
+          <a:p>
+            <a:pPr algn="ctr"/>
+          </a:p>
+        </p:txBody>
+      </p:sp>
       <p:pic>
         <p:nvPicPr>
-          <p:cNvPr id="7" name="Picture 6" descr="jdscience-footer-logo.png"/>
+          <p:cNvPr id="19" name="Picture 18" descr="jdscience-footer-logo.png"/>
           <p:cNvPicPr>
             <a:picLocks noChangeAspect="1"/>
           </p:cNvPicPr>
@@ -8147,7 +9086,7 @@
       </p:pic>
       <p:sp>
         <p:nvSpPr>
-          <p:cNvPr id="8" name="TextBox 7"/>
+          <p:cNvPr id="20" name="TextBox 19"/>
           <p:cNvSpPr txBox="1"/>
           <p:nvPr/>
         </p:nvSpPr>
@@ -8180,7 +9119,7 @@
       </p:sp>
       <p:sp>
         <p:nvSpPr>
-          <p:cNvPr id="9" name="TextBox 8"/>
+          <p:cNvPr id="21" name="TextBox 20"/>
           <p:cNvSpPr txBox="1"/>
           <p:nvPr/>
         </p:nvSpPr>
@@ -8213,7 +9152,7 @@
       </p:sp>
       <p:sp>
         <p:nvSpPr>
-          <p:cNvPr id="10" name="TextBox 9"/>
+          <p:cNvPr id="22" name="TextBox 21"/>
           <p:cNvSpPr txBox="1"/>
           <p:nvPr/>
         </p:nvSpPr>
@@ -9324,8 +10263,8 @@
         </p:nvSpPr>
         <p:spPr>
           <a:xfrm>
-            <a:off x="6931152" y="1069848"/>
-            <a:ext cx="4617720" cy="685800"/>
+            <a:off x="6931152" y="1051560"/>
+            <a:ext cx="4617720" cy="722376"/>
           </a:xfrm>
           <a:prstGeom prst="rect">
             <a:avLst/>
@@ -9443,8 +10382,8 @@
         </p:nvSpPr>
         <p:spPr>
           <a:xfrm>
-            <a:off x="6931152" y="2029968"/>
-            <a:ext cx="4617720" cy="685800"/>
+            <a:off x="6931152" y="2011680"/>
+            <a:ext cx="4617720" cy="722376"/>
           </a:xfrm>
           <a:prstGeom prst="rect">
             <a:avLst/>
@@ -9589,8 +10528,8 @@
         </p:nvSpPr>
         <p:spPr>
           <a:xfrm>
-            <a:off x="6931152" y="2990088"/>
-            <a:ext cx="4617720" cy="685800"/>
+            <a:off x="6931152" y="2971800"/>
+            <a:ext cx="4617720" cy="722376"/>
           </a:xfrm>
           <a:prstGeom prst="rect">
             <a:avLst/>
@@ -9717,8 +10656,8 @@
         </p:nvSpPr>
         <p:spPr>
           <a:xfrm>
-            <a:off x="6931152" y="3950208"/>
-            <a:ext cx="4617720" cy="685800"/>
+            <a:off x="6931152" y="3931920"/>
+            <a:ext cx="4617720" cy="722376"/>
           </a:xfrm>
           <a:prstGeom prst="rect">
             <a:avLst/>
@@ -9836,8 +10775,8 @@
         </p:nvSpPr>
         <p:spPr>
           <a:xfrm>
-            <a:off x="6931152" y="4910328"/>
-            <a:ext cx="4617720" cy="685800"/>
+            <a:off x="6931152" y="4892040"/>
+            <a:ext cx="4617720" cy="722376"/>
           </a:xfrm>
           <a:prstGeom prst="rect">
             <a:avLst/>
@@ -10096,8 +11035,8 @@
         </p:nvSpPr>
         <p:spPr>
           <a:xfrm>
-            <a:off x="0" y="2880360"/>
-            <a:ext cx="12191695" cy="73152"/>
+            <a:off x="0" y="0"/>
+            <a:ext cx="146304" cy="6858000"/>
           </a:xfrm>
           <a:prstGeom prst="rect">
             <a:avLst/>
@@ -10139,80 +11078,80 @@
         </p:nvSpPr>
         <p:spPr>
           <a:xfrm>
+            <a:off x="640080" y="384048"/>
+            <a:ext cx="10972800" cy="868680"/>
+          </a:xfrm>
+          <a:prstGeom prst="rect">
+            <a:avLst/>
+          </a:prstGeom>
+          <a:noFill/>
+        </p:spPr>
+        <p:txBody>
+          <a:bodyPr wrap="square" anchor="t"/>
+          <a:lstStyle/>
+          <a:p>
+            <a:pPr algn="l"/>
+            <a:r>
+              <a:rPr sz="3000" b="1" i="0" a:ea="Calibri">
+                <a:solidFill>
+                  <a:srgbClr val="FFFFFF"/>
+                </a:solidFill>
+                <a:latin typeface="Calibri"/>
+              </a:rPr>
+              <a:t>Relative atomic mass</a:t>
+            </a:r>
+          </a:p>
+        </p:txBody>
+      </p:sp>
+      <p:sp>
+        <p:nvSpPr>
+          <p:cNvPr id="5" name="TextBox 4"/>
+          <p:cNvSpPr txBox="1"/>
+          <p:nvPr/>
+        </p:nvSpPr>
+        <p:spPr>
+          <a:xfrm>
+            <a:off x="640080" y="1261872"/>
+            <a:ext cx="10972800" cy="502920"/>
+          </a:xfrm>
+          <a:prstGeom prst="rect">
+            <a:avLst/>
+          </a:prstGeom>
+          <a:noFill/>
+        </p:spPr>
+        <p:txBody>
+          <a:bodyPr wrap="square" anchor="t"/>
+          <a:lstStyle/>
+          <a:p>
+            <a:pPr algn="l"/>
+            <a:r>
+              <a:rPr sz="1700" b="0" i="0" a:ea="Calibri">
+                <a:solidFill>
+                  <a:srgbClr val="CCFBF1"/>
+                </a:solidFill>
+                <a:latin typeface="Calibri"/>
+              </a:rPr>
+              <a:t>A weighted mean, not a mass number</a:t>
+            </a:r>
+          </a:p>
+        </p:txBody>
+      </p:sp>
+      <p:sp>
+        <p:nvSpPr>
+          <p:cNvPr id="6" name="Rounded Rectangle 5"/>
+          <p:cNvSpPr/>
+          <p:nvPr/>
+        </p:nvSpPr>
+        <p:spPr>
+          <a:xfrm>
             <a:off x="640080" y="1965960"/>
-            <a:ext cx="10881360" cy="914400"/>
-          </a:xfrm>
-          <a:prstGeom prst="rect">
-            <a:avLst/>
-          </a:prstGeom>
-          <a:noFill/>
-        </p:spPr>
-        <p:txBody>
-          <a:bodyPr wrap="square" anchor="t"/>
-          <a:lstStyle/>
-          <a:p>
-            <a:pPr algn="l"/>
-            <a:r>
-              <a:rPr sz="3400" b="1" i="0" a:ea="Calibri">
-                <a:solidFill>
-                  <a:srgbClr val="FFFFFF"/>
-                </a:solidFill>
-                <a:latin typeface="Calibri"/>
-              </a:rPr>
-              <a:t>Relative atomic mass</a:t>
-            </a:r>
-          </a:p>
-        </p:txBody>
-      </p:sp>
-      <p:sp>
-        <p:nvSpPr>
-          <p:cNvPr id="5" name="TextBox 4"/>
-          <p:cNvSpPr txBox="1"/>
-          <p:nvPr/>
-        </p:nvSpPr>
-        <p:spPr>
-          <a:xfrm>
-            <a:off x="640080" y="3154680"/>
-            <a:ext cx="10881360" cy="822960"/>
-          </a:xfrm>
-          <a:prstGeom prst="rect">
-            <a:avLst/>
-          </a:prstGeom>
-          <a:noFill/>
-        </p:spPr>
-        <p:txBody>
-          <a:bodyPr wrap="square" anchor="t"/>
-          <a:lstStyle/>
-          <a:p>
-            <a:pPr algn="l"/>
-            <a:r>
-              <a:rPr sz="1800" b="0" i="0" a:ea="Calibri">
-                <a:solidFill>
-                  <a:srgbClr val="CCFBF1"/>
-                </a:solidFill>
-                <a:latin typeface="Calibri"/>
-              </a:rPr>
-              <a:t>A weighted mean, not a mass number</a:t>
-            </a:r>
-          </a:p>
-        </p:txBody>
-      </p:sp>
-      <p:sp>
-        <p:nvSpPr>
-          <p:cNvPr id="6" name="Rectangle 5"/>
-          <p:cNvSpPr/>
-          <p:nvPr/>
-        </p:nvSpPr>
-        <p:spPr>
-          <a:xfrm>
-            <a:off x="0" y="6437376"/>
-            <a:ext cx="12191695" cy="420624"/>
-          </a:xfrm>
-          <a:prstGeom prst="rect">
-            <a:avLst/>
-          </a:prstGeom>
-          <a:solidFill>
-            <a:srgbClr val="004D40"/>
+            <a:ext cx="3520440" cy="3977639"/>
+          </a:xfrm>
+          <a:prstGeom prst="roundRect">
+            <a:avLst/>
+          </a:prstGeom>
+          <a:solidFill>
+            <a:srgbClr val="003D33"/>
           </a:solidFill>
           <a:ln>
             <a:noFill/>
@@ -10240,9 +11179,519 @@
           </a:p>
         </p:txBody>
       </p:sp>
+      <p:sp>
+        <p:nvSpPr>
+          <p:cNvPr id="7" name="Rectangle 6"/>
+          <p:cNvSpPr/>
+          <p:nvPr/>
+        </p:nvSpPr>
+        <p:spPr>
+          <a:xfrm>
+            <a:off x="640080" y="1965960"/>
+            <a:ext cx="3520440" cy="109728"/>
+          </a:xfrm>
+          <a:prstGeom prst="rect">
+            <a:avLst/>
+          </a:prstGeom>
+          <a:solidFill>
+            <a:srgbClr val="009688"/>
+          </a:solidFill>
+          <a:ln>
+            <a:noFill/>
+          </a:ln>
+        </p:spPr>
+        <p:style>
+          <a:lnRef idx="1">
+            <a:schemeClr val="accent1"/>
+          </a:lnRef>
+          <a:fillRef idx="3">
+            <a:schemeClr val="accent1"/>
+          </a:fillRef>
+          <a:effectRef idx="2">
+            <a:schemeClr val="accent1"/>
+          </a:effectRef>
+          <a:fontRef idx="minor">
+            <a:schemeClr val="lt1"/>
+          </a:fontRef>
+        </p:style>
+        <p:txBody>
+          <a:bodyPr rtlCol="0" anchor="ctr"/>
+          <a:lstStyle/>
+          <a:p>
+            <a:pPr algn="ctr"/>
+          </a:p>
+        </p:txBody>
+      </p:sp>
+      <p:sp>
+        <p:nvSpPr>
+          <p:cNvPr id="8" name="TextBox 7"/>
+          <p:cNvSpPr txBox="1"/>
+          <p:nvPr/>
+        </p:nvSpPr>
+        <p:spPr>
+          <a:xfrm>
+            <a:off x="841248" y="2212848"/>
+            <a:ext cx="3108960" cy="457200"/>
+          </a:xfrm>
+          <a:prstGeom prst="rect">
+            <a:avLst/>
+          </a:prstGeom>
+          <a:noFill/>
+        </p:spPr>
+        <p:txBody>
+          <a:bodyPr wrap="square" anchor="t"/>
+          <a:lstStyle/>
+          <a:p>
+            <a:pPr algn="l"/>
+            <a:r>
+              <a:rPr sz="1600" b="1" i="0" a:ea="Calibri">
+                <a:solidFill>
+                  <a:srgbClr val="CCFBF1"/>
+                </a:solidFill>
+                <a:latin typeface="Calibri"/>
+              </a:rPr>
+              <a:t>1   Look for</a:t>
+            </a:r>
+          </a:p>
+        </p:txBody>
+      </p:sp>
+      <p:sp>
+        <p:nvSpPr>
+          <p:cNvPr id="9" name="TextBox 8"/>
+          <p:cNvSpPr txBox="1"/>
+          <p:nvPr/>
+        </p:nvSpPr>
+        <p:spPr>
+          <a:xfrm>
+            <a:off x="841248" y="2788920"/>
+            <a:ext cx="3108960" cy="2880360"/>
+          </a:xfrm>
+          <a:prstGeom prst="rect">
+            <a:avLst/>
+          </a:prstGeom>
+          <a:noFill/>
+        </p:spPr>
+        <p:txBody>
+          <a:bodyPr wrap="square" anchor="t"/>
+          <a:lstStyle/>
+          <a:p>
+            <a:pPr algn="l"/>
+            <a:r>
+              <a:rPr sz="1600" b="0" i="0" a:ea="Calibri">
+                <a:solidFill>
+                  <a:srgbClr val="FFFFFF"/>
+                </a:solidFill>
+                <a:latin typeface="Calibri"/>
+              </a:rPr>
+              <a:t>A</a:t>
+            </a:r>
+            <a:r>
+              <a:rPr sz="1600" b="0" i="0" a:ea="Calibri" baseline="-25000">
+                <a:solidFill>
+                  <a:srgbClr val="FFFFFF"/>
+                </a:solidFill>
+                <a:latin typeface="Calibri"/>
+              </a:rPr>
+              <a:t>r</a:t>
+            </a:r>
+            <a:r>
+              <a:rPr sz="1600" b="0" i="0" a:ea="Calibri">
+                <a:solidFill>
+                  <a:srgbClr val="FFFFFF"/>
+                </a:solidFill>
+                <a:latin typeface="Calibri"/>
+              </a:rPr>
+              <a:t> = (Σ percent × mass number) / 100   — no unit.</a:t>
+            </a:r>
+          </a:p>
+        </p:txBody>
+      </p:sp>
+      <p:sp>
+        <p:nvSpPr>
+          <p:cNvPr id="10" name="Rounded Rectangle 9"/>
+          <p:cNvSpPr/>
+          <p:nvPr/>
+        </p:nvSpPr>
+        <p:spPr>
+          <a:xfrm>
+            <a:off x="4343400" y="1965960"/>
+            <a:ext cx="3520440" cy="3977639"/>
+          </a:xfrm>
+          <a:prstGeom prst="roundRect">
+            <a:avLst/>
+          </a:prstGeom>
+          <a:solidFill>
+            <a:srgbClr val="003D33"/>
+          </a:solidFill>
+          <a:ln>
+            <a:noFill/>
+          </a:ln>
+        </p:spPr>
+        <p:style>
+          <a:lnRef idx="1">
+            <a:schemeClr val="accent1"/>
+          </a:lnRef>
+          <a:fillRef idx="3">
+            <a:schemeClr val="accent1"/>
+          </a:fillRef>
+          <a:effectRef idx="2">
+            <a:schemeClr val="accent1"/>
+          </a:effectRef>
+          <a:fontRef idx="minor">
+            <a:schemeClr val="lt1"/>
+          </a:fontRef>
+        </p:style>
+        <p:txBody>
+          <a:bodyPr rtlCol="0" anchor="ctr"/>
+          <a:lstStyle/>
+          <a:p>
+            <a:pPr algn="ctr"/>
+          </a:p>
+        </p:txBody>
+      </p:sp>
+      <p:sp>
+        <p:nvSpPr>
+          <p:cNvPr id="11" name="Rectangle 10"/>
+          <p:cNvSpPr/>
+          <p:nvPr/>
+        </p:nvSpPr>
+        <p:spPr>
+          <a:xfrm>
+            <a:off x="4343400" y="1965960"/>
+            <a:ext cx="3520440" cy="109728"/>
+          </a:xfrm>
+          <a:prstGeom prst="rect">
+            <a:avLst/>
+          </a:prstGeom>
+          <a:solidFill>
+            <a:srgbClr val="99F6E4"/>
+          </a:solidFill>
+          <a:ln>
+            <a:noFill/>
+          </a:ln>
+        </p:spPr>
+        <p:style>
+          <a:lnRef idx="1">
+            <a:schemeClr val="accent1"/>
+          </a:lnRef>
+          <a:fillRef idx="3">
+            <a:schemeClr val="accent1"/>
+          </a:fillRef>
+          <a:effectRef idx="2">
+            <a:schemeClr val="accent1"/>
+          </a:effectRef>
+          <a:fontRef idx="minor">
+            <a:schemeClr val="lt1"/>
+          </a:fontRef>
+        </p:style>
+        <p:txBody>
+          <a:bodyPr rtlCol="0" anchor="ctr"/>
+          <a:lstStyle/>
+          <a:p>
+            <a:pPr algn="ctr"/>
+          </a:p>
+        </p:txBody>
+      </p:sp>
+      <p:sp>
+        <p:nvSpPr>
+          <p:cNvPr id="12" name="TextBox 11"/>
+          <p:cNvSpPr txBox="1"/>
+          <p:nvPr/>
+        </p:nvSpPr>
+        <p:spPr>
+          <a:xfrm>
+            <a:off x="4544568" y="2212848"/>
+            <a:ext cx="3108960" cy="457200"/>
+          </a:xfrm>
+          <a:prstGeom prst="rect">
+            <a:avLst/>
+          </a:prstGeom>
+          <a:noFill/>
+        </p:spPr>
+        <p:txBody>
+          <a:bodyPr wrap="square" anchor="t"/>
+          <a:lstStyle/>
+          <a:p>
+            <a:pPr algn="l"/>
+            <a:r>
+              <a:rPr sz="1600" b="1" i="0" a:ea="Calibri">
+                <a:solidFill>
+                  <a:srgbClr val="CCFBF1"/>
+                </a:solidFill>
+                <a:latin typeface="Calibri"/>
+              </a:rPr>
+              <a:t>2   Say in full</a:t>
+            </a:r>
+          </a:p>
+        </p:txBody>
+      </p:sp>
+      <p:sp>
+        <p:nvSpPr>
+          <p:cNvPr id="13" name="TextBox 12"/>
+          <p:cNvSpPr txBox="1"/>
+          <p:nvPr/>
+        </p:nvSpPr>
+        <p:spPr>
+          <a:xfrm>
+            <a:off x="4544568" y="2788920"/>
+            <a:ext cx="3108960" cy="2880360"/>
+          </a:xfrm>
+          <a:prstGeom prst="rect">
+            <a:avLst/>
+          </a:prstGeom>
+          <a:noFill/>
+        </p:spPr>
+        <p:txBody>
+          <a:bodyPr wrap="square" anchor="t"/>
+          <a:lstStyle/>
+          <a:p>
+            <a:pPr algn="l"/>
+            <a:r>
+              <a:rPr sz="1600" b="0" i="0" a:ea="Calibri">
+                <a:solidFill>
+                  <a:srgbClr val="FFFFFF"/>
+                </a:solidFill>
+                <a:latin typeface="Calibri"/>
+              </a:rPr>
+              <a:t>Most elements are mixtures of isotopes, so A</a:t>
+            </a:r>
+            <a:r>
+              <a:rPr sz="1600" b="0" i="0" a:ea="Calibri" baseline="-25000">
+                <a:solidFill>
+                  <a:srgbClr val="FFFFFF"/>
+                </a:solidFill>
+                <a:latin typeface="Calibri"/>
+              </a:rPr>
+              <a:t>r</a:t>
+            </a:r>
+            <a:r>
+              <a:rPr sz="1600" b="0" i="0" a:ea="Calibri">
+                <a:solidFill>
+                  <a:srgbClr val="FFFFFF"/>
+                </a:solidFill>
+                <a:latin typeface="Calibri"/>
+              </a:rPr>
+              <a:t> is rarely a whole number.</a:t>
+            </a:r>
+          </a:p>
+        </p:txBody>
+      </p:sp>
+      <p:sp>
+        <p:nvSpPr>
+          <p:cNvPr id="14" name="Rounded Rectangle 13"/>
+          <p:cNvSpPr/>
+          <p:nvPr/>
+        </p:nvSpPr>
+        <p:spPr>
+          <a:xfrm>
+            <a:off x="8046720" y="1965960"/>
+            <a:ext cx="3520440" cy="3977639"/>
+          </a:xfrm>
+          <a:prstGeom prst="roundRect">
+            <a:avLst/>
+          </a:prstGeom>
+          <a:solidFill>
+            <a:srgbClr val="003D33"/>
+          </a:solidFill>
+          <a:ln>
+            <a:noFill/>
+          </a:ln>
+        </p:spPr>
+        <p:style>
+          <a:lnRef idx="1">
+            <a:schemeClr val="accent1"/>
+          </a:lnRef>
+          <a:fillRef idx="3">
+            <a:schemeClr val="accent1"/>
+          </a:fillRef>
+          <a:effectRef idx="2">
+            <a:schemeClr val="accent1"/>
+          </a:effectRef>
+          <a:fontRef idx="minor">
+            <a:schemeClr val="lt1"/>
+          </a:fontRef>
+        </p:style>
+        <p:txBody>
+          <a:bodyPr rtlCol="0" anchor="ctr"/>
+          <a:lstStyle/>
+          <a:p>
+            <a:pPr algn="ctr"/>
+          </a:p>
+        </p:txBody>
+      </p:sp>
+      <p:sp>
+        <p:nvSpPr>
+          <p:cNvPr id="15" name="Rectangle 14"/>
+          <p:cNvSpPr/>
+          <p:nvPr/>
+        </p:nvSpPr>
+        <p:spPr>
+          <a:xfrm>
+            <a:off x="8046720" y="1965960"/>
+            <a:ext cx="3520440" cy="109728"/>
+          </a:xfrm>
+          <a:prstGeom prst="rect">
+            <a:avLst/>
+          </a:prstGeom>
+          <a:solidFill>
+            <a:srgbClr val="5EEAD4"/>
+          </a:solidFill>
+          <a:ln>
+            <a:noFill/>
+          </a:ln>
+        </p:spPr>
+        <p:style>
+          <a:lnRef idx="1">
+            <a:schemeClr val="accent1"/>
+          </a:lnRef>
+          <a:fillRef idx="3">
+            <a:schemeClr val="accent1"/>
+          </a:fillRef>
+          <a:effectRef idx="2">
+            <a:schemeClr val="accent1"/>
+          </a:effectRef>
+          <a:fontRef idx="minor">
+            <a:schemeClr val="lt1"/>
+          </a:fontRef>
+        </p:style>
+        <p:txBody>
+          <a:bodyPr rtlCol="0" anchor="ctr"/>
+          <a:lstStyle/>
+          <a:p>
+            <a:pPr algn="ctr"/>
+          </a:p>
+        </p:txBody>
+      </p:sp>
+      <p:sp>
+        <p:nvSpPr>
+          <p:cNvPr id="16" name="TextBox 15"/>
+          <p:cNvSpPr txBox="1"/>
+          <p:nvPr/>
+        </p:nvSpPr>
+        <p:spPr>
+          <a:xfrm>
+            <a:off x="8247888" y="2212848"/>
+            <a:ext cx="3108960" cy="457200"/>
+          </a:xfrm>
+          <a:prstGeom prst="rect">
+            <a:avLst/>
+          </a:prstGeom>
+          <a:noFill/>
+        </p:spPr>
+        <p:txBody>
+          <a:bodyPr wrap="square" anchor="t"/>
+          <a:lstStyle/>
+          <a:p>
+            <a:pPr algn="l"/>
+            <a:r>
+              <a:rPr sz="1600" b="1" i="0" a:ea="Calibri">
+                <a:solidFill>
+                  <a:srgbClr val="CCFBF1"/>
+                </a:solidFill>
+                <a:latin typeface="Calibri"/>
+              </a:rPr>
+              <a:t>3   Level 3 move</a:t>
+            </a:r>
+          </a:p>
+        </p:txBody>
+      </p:sp>
+      <p:sp>
+        <p:nvSpPr>
+          <p:cNvPr id="17" name="TextBox 16"/>
+          <p:cNvSpPr txBox="1"/>
+          <p:nvPr/>
+        </p:nvSpPr>
+        <p:spPr>
+          <a:xfrm>
+            <a:off x="8247888" y="2788920"/>
+            <a:ext cx="3108960" cy="2880360"/>
+          </a:xfrm>
+          <a:prstGeom prst="rect">
+            <a:avLst/>
+          </a:prstGeom>
+          <a:noFill/>
+        </p:spPr>
+        <p:txBody>
+          <a:bodyPr wrap="square" anchor="t"/>
+          <a:lstStyle/>
+          <a:p>
+            <a:pPr algn="l"/>
+            <a:r>
+              <a:rPr sz="1600" b="0" i="0" a:ea="Calibri">
+                <a:solidFill>
+                  <a:srgbClr val="FFFFFF"/>
+                </a:solidFill>
+                <a:latin typeface="Calibri"/>
+              </a:rPr>
+              <a:t>Use the abundances in the question. Compare the result with 1/12 of a </a:t>
+            </a:r>
+            <a:r>
+              <a:rPr sz="1600" b="0" i="0" a:ea="Calibri" baseline="30000">
+                <a:solidFill>
+                  <a:srgbClr val="FFFFFF"/>
+                </a:solidFill>
+                <a:latin typeface="Calibri"/>
+              </a:rPr>
+              <a:t>12</a:t>
+            </a:r>
+            <a:r>
+              <a:rPr sz="1600" b="0" i="0" a:ea="Calibri">
+                <a:solidFill>
+                  <a:srgbClr val="FFFFFF"/>
+                </a:solidFill>
+                <a:latin typeface="Calibri"/>
+              </a:rPr>
+              <a:t>C atom.</a:t>
+            </a:r>
+          </a:p>
+        </p:txBody>
+      </p:sp>
+      <p:sp>
+        <p:nvSpPr>
+          <p:cNvPr id="18" name="Rectangle 17"/>
+          <p:cNvSpPr/>
+          <p:nvPr/>
+        </p:nvSpPr>
+        <p:spPr>
+          <a:xfrm>
+            <a:off x="0" y="6437376"/>
+            <a:ext cx="12191695" cy="420624"/>
+          </a:xfrm>
+          <a:prstGeom prst="rect">
+            <a:avLst/>
+          </a:prstGeom>
+          <a:solidFill>
+            <a:srgbClr val="004D40"/>
+          </a:solidFill>
+          <a:ln>
+            <a:noFill/>
+          </a:ln>
+        </p:spPr>
+        <p:style>
+          <a:lnRef idx="1">
+            <a:schemeClr val="accent1"/>
+          </a:lnRef>
+          <a:fillRef idx="3">
+            <a:schemeClr val="accent1"/>
+          </a:fillRef>
+          <a:effectRef idx="2">
+            <a:schemeClr val="accent1"/>
+          </a:effectRef>
+          <a:fontRef idx="minor">
+            <a:schemeClr val="lt1"/>
+          </a:fontRef>
+        </p:style>
+        <p:txBody>
+          <a:bodyPr rtlCol="0" anchor="ctr"/>
+          <a:lstStyle/>
+          <a:p>
+            <a:pPr algn="ctr"/>
+          </a:p>
+        </p:txBody>
+      </p:sp>
       <p:pic>
         <p:nvPicPr>
-          <p:cNvPr id="7" name="Picture 6" descr="jdscience-footer-logo.png"/>
+          <p:cNvPr id="19" name="Picture 18" descr="jdscience-footer-logo.png"/>
           <p:cNvPicPr>
             <a:picLocks noChangeAspect="1"/>
           </p:cNvPicPr>
@@ -10266,7 +11715,7 @@
       </p:pic>
       <p:sp>
         <p:nvSpPr>
-          <p:cNvPr id="8" name="TextBox 7"/>
+          <p:cNvPr id="20" name="TextBox 19"/>
           <p:cNvSpPr txBox="1"/>
           <p:nvPr/>
         </p:nvSpPr>
@@ -10299,7 +11748,7 @@
       </p:sp>
       <p:sp>
         <p:nvSpPr>
-          <p:cNvPr id="9" name="TextBox 8"/>
+          <p:cNvPr id="21" name="TextBox 20"/>
           <p:cNvSpPr txBox="1"/>
           <p:nvPr/>
         </p:nvSpPr>
@@ -10332,7 +11781,7 @@
       </p:sp>
       <p:sp>
         <p:nvSpPr>
-          <p:cNvPr id="10" name="TextBox 9"/>
+          <p:cNvPr id="22" name="TextBox 21"/>
           <p:cNvSpPr txBox="1"/>
           <p:nvPr/>
         </p:nvSpPr>
@@ -10508,7 +11957,7 @@
         <p:spPr>
           <a:xfrm>
             <a:off x="6675120" y="960120"/>
-            <a:ext cx="5029200" cy="1051560"/>
+            <a:ext cx="5029200" cy="1108710"/>
           </a:xfrm>
           <a:prstGeom prst="roundRect">
             <a:avLst/>
@@ -10551,7 +12000,7 @@
         <p:spPr>
           <a:xfrm>
             <a:off x="6675120" y="960120"/>
-            <a:ext cx="91440" cy="1051560"/>
+            <a:ext cx="91440" cy="1108710"/>
           </a:xfrm>
           <a:prstGeom prst="rect">
             <a:avLst/>
@@ -10593,8 +12042,8 @@
         </p:nvSpPr>
         <p:spPr>
           <a:xfrm>
-            <a:off x="6931152" y="1069848"/>
-            <a:ext cx="4617720" cy="868680"/>
+            <a:off x="6931152" y="1051560"/>
+            <a:ext cx="4617720" cy="962406"/>
           </a:xfrm>
           <a:prstGeom prst="rect">
             <a:avLst/>
@@ -10626,8 +12075,8 @@
         </p:nvSpPr>
         <p:spPr>
           <a:xfrm>
-            <a:off x="6675120" y="2103120"/>
-            <a:ext cx="5029200" cy="1051560"/>
+            <a:off x="6675120" y="2160270"/>
+            <a:ext cx="5029200" cy="1108710"/>
           </a:xfrm>
           <a:prstGeom prst="roundRect">
             <a:avLst/>
@@ -10669,8 +12118,8 @@
         </p:nvSpPr>
         <p:spPr>
           <a:xfrm>
-            <a:off x="6675120" y="2103120"/>
-            <a:ext cx="91440" cy="1051560"/>
+            <a:off x="6675120" y="2160270"/>
+            <a:ext cx="91440" cy="1108710"/>
           </a:xfrm>
           <a:prstGeom prst="rect">
             <a:avLst/>
@@ -10712,8 +12161,8 @@
         </p:nvSpPr>
         <p:spPr>
           <a:xfrm>
-            <a:off x="6931152" y="2212848"/>
-            <a:ext cx="4617720" cy="868680"/>
+            <a:off x="6931152" y="2251710"/>
+            <a:ext cx="4617720" cy="962406"/>
           </a:xfrm>
           <a:prstGeom prst="rect">
             <a:avLst/>
@@ -10781,8 +12230,8 @@
         </p:nvSpPr>
         <p:spPr>
           <a:xfrm>
-            <a:off x="6675120" y="3246120"/>
-            <a:ext cx="5029200" cy="1051560"/>
+            <a:off x="6675120" y="3360420"/>
+            <a:ext cx="5029200" cy="1108710"/>
           </a:xfrm>
           <a:prstGeom prst="roundRect">
             <a:avLst/>
@@ -10824,8 +12273,8 @@
         </p:nvSpPr>
         <p:spPr>
           <a:xfrm>
-            <a:off x="6675120" y="3246120"/>
-            <a:ext cx="91440" cy="1051560"/>
+            <a:off x="6675120" y="3360420"/>
+            <a:ext cx="91440" cy="1108710"/>
           </a:xfrm>
           <a:prstGeom prst="rect">
             <a:avLst/>
@@ -10867,8 +12316,8 @@
         </p:nvSpPr>
         <p:spPr>
           <a:xfrm>
-            <a:off x="6931152" y="3355848"/>
-            <a:ext cx="4617720" cy="868680"/>
+            <a:off x="6931152" y="3451860"/>
+            <a:ext cx="4617720" cy="962406"/>
           </a:xfrm>
           <a:prstGeom prst="rect">
             <a:avLst/>
@@ -10918,8 +12367,8 @@
         </p:nvSpPr>
         <p:spPr>
           <a:xfrm>
-            <a:off x="6675120" y="4389120"/>
-            <a:ext cx="5029200" cy="1051560"/>
+            <a:off x="6675120" y="4560570"/>
+            <a:ext cx="5029200" cy="1108710"/>
           </a:xfrm>
           <a:prstGeom prst="roundRect">
             <a:avLst/>
@@ -10961,8 +12410,8 @@
         </p:nvSpPr>
         <p:spPr>
           <a:xfrm>
-            <a:off x="6675120" y="4389120"/>
-            <a:ext cx="91440" cy="1051560"/>
+            <a:off x="6675120" y="4560570"/>
+            <a:ext cx="91440" cy="1108710"/>
           </a:xfrm>
           <a:prstGeom prst="rect">
             <a:avLst/>
@@ -11004,8 +12453,8 @@
         </p:nvSpPr>
         <p:spPr>
           <a:xfrm>
-            <a:off x="6931152" y="4498848"/>
-            <a:ext cx="4617720" cy="868680"/>
+            <a:off x="6931152" y="4652010"/>
+            <a:ext cx="4617720" cy="962406"/>
           </a:xfrm>
           <a:prstGeom prst="rect">
             <a:avLst/>
@@ -12393,7 +13842,7 @@
         <p:spPr>
           <a:xfrm>
             <a:off x="6675120" y="960120"/>
-            <a:ext cx="5029200" cy="1051560"/>
+            <a:ext cx="5029200" cy="1108710"/>
           </a:xfrm>
           <a:prstGeom prst="roundRect">
             <a:avLst/>
@@ -12436,7 +13885,7 @@
         <p:spPr>
           <a:xfrm>
             <a:off x="6675120" y="960120"/>
-            <a:ext cx="91440" cy="1051560"/>
+            <a:ext cx="91440" cy="1108710"/>
           </a:xfrm>
           <a:prstGeom prst="rect">
             <a:avLst/>
@@ -12478,8 +13927,8 @@
         </p:nvSpPr>
         <p:spPr>
           <a:xfrm>
-            <a:off x="6931152" y="1069848"/>
-            <a:ext cx="4617720" cy="868680"/>
+            <a:off x="6931152" y="1051560"/>
+            <a:ext cx="4617720" cy="962406"/>
           </a:xfrm>
           <a:prstGeom prst="rect">
             <a:avLst/>
@@ -12511,8 +13960,8 @@
         </p:nvSpPr>
         <p:spPr>
           <a:xfrm>
-            <a:off x="6675120" y="2103120"/>
-            <a:ext cx="5029200" cy="1051560"/>
+            <a:off x="6675120" y="2160270"/>
+            <a:ext cx="5029200" cy="1108710"/>
           </a:xfrm>
           <a:prstGeom prst="roundRect">
             <a:avLst/>
@@ -12554,8 +14003,8 @@
         </p:nvSpPr>
         <p:spPr>
           <a:xfrm>
-            <a:off x="6675120" y="2103120"/>
-            <a:ext cx="91440" cy="1051560"/>
+            <a:off x="6675120" y="2160270"/>
+            <a:ext cx="91440" cy="1108710"/>
           </a:xfrm>
           <a:prstGeom prst="rect">
             <a:avLst/>
@@ -12597,8 +14046,8 @@
         </p:nvSpPr>
         <p:spPr>
           <a:xfrm>
-            <a:off x="6931152" y="2212848"/>
-            <a:ext cx="4617720" cy="868680"/>
+            <a:off x="6931152" y="2251710"/>
+            <a:ext cx="4617720" cy="962406"/>
           </a:xfrm>
           <a:prstGeom prst="rect">
             <a:avLst/>
@@ -12630,8 +14079,8 @@
         </p:nvSpPr>
         <p:spPr>
           <a:xfrm>
-            <a:off x="6675120" y="3246120"/>
-            <a:ext cx="5029200" cy="1051560"/>
+            <a:off x="6675120" y="3360420"/>
+            <a:ext cx="5029200" cy="1108710"/>
           </a:xfrm>
           <a:prstGeom prst="roundRect">
             <a:avLst/>
@@ -12673,8 +14122,8 @@
         </p:nvSpPr>
         <p:spPr>
           <a:xfrm>
-            <a:off x="6675120" y="3246120"/>
-            <a:ext cx="91440" cy="1051560"/>
+            <a:off x="6675120" y="3360420"/>
+            <a:ext cx="91440" cy="1108710"/>
           </a:xfrm>
           <a:prstGeom prst="rect">
             <a:avLst/>
@@ -12716,8 +14165,8 @@
         </p:nvSpPr>
         <p:spPr>
           <a:xfrm>
-            <a:off x="6931152" y="3355848"/>
-            <a:ext cx="4617720" cy="868680"/>
+            <a:off x="6931152" y="3451860"/>
+            <a:ext cx="4617720" cy="962406"/>
           </a:xfrm>
           <a:prstGeom prst="rect">
             <a:avLst/>
@@ -12767,8 +14216,8 @@
         </p:nvSpPr>
         <p:spPr>
           <a:xfrm>
-            <a:off x="6675120" y="4389120"/>
-            <a:ext cx="5029200" cy="1051560"/>
+            <a:off x="6675120" y="4560570"/>
+            <a:ext cx="5029200" cy="1108710"/>
           </a:xfrm>
           <a:prstGeom prst="roundRect">
             <a:avLst/>
@@ -12810,8 +14259,8 @@
         </p:nvSpPr>
         <p:spPr>
           <a:xfrm>
-            <a:off x="6675120" y="4389120"/>
-            <a:ext cx="91440" cy="1051560"/>
+            <a:off x="6675120" y="4560570"/>
+            <a:ext cx="91440" cy="1108710"/>
           </a:xfrm>
           <a:prstGeom prst="rect">
             <a:avLst/>
@@ -12853,8 +14302,8 @@
         </p:nvSpPr>
         <p:spPr>
           <a:xfrm>
-            <a:off x="6931152" y="4498848"/>
-            <a:ext cx="4617720" cy="868680"/>
+            <a:off x="6931152" y="4652010"/>
+            <a:ext cx="4617720" cy="962406"/>
           </a:xfrm>
           <a:prstGeom prst="rect">
             <a:avLst/>
@@ -15796,7 +17245,7 @@
         <p:spPr>
           <a:xfrm>
             <a:off x="658368" y="2011680"/>
-            <a:ext cx="3249168" cy="3383280"/>
+            <a:ext cx="3249168" cy="1417320"/>
           </a:xfrm>
           <a:prstGeom prst="rect">
             <a:avLst/>
@@ -15876,20 +17325,53 @@
       </p:sp>
       <p:sp>
         <p:nvSpPr>
-          <p:cNvPr id="11" name="Rounded Rectangle 10"/>
+          <p:cNvPr id="11" name="TextBox 10"/>
+          <p:cNvSpPr txBox="1"/>
+          <p:nvPr/>
+        </p:nvSpPr>
+        <p:spPr>
+          <a:xfrm>
+            <a:off x="658368" y="3520440"/>
+            <a:ext cx="3249168" cy="256032"/>
+          </a:xfrm>
+          <a:prstGeom prst="rect">
+            <a:avLst/>
+          </a:prstGeom>
+          <a:noFill/>
+        </p:spPr>
+        <p:txBody>
+          <a:bodyPr wrap="square" anchor="t"/>
+          <a:lstStyle/>
+          <a:p>
+            <a:pPr algn="l"/>
+            <a:r>
+              <a:rPr sz="1100" b="1" i="0" a:ea="Calibri">
+                <a:solidFill>
+                  <a:srgbClr val="475569"/>
+                </a:solidFill>
+                <a:latin typeface="Calibri"/>
+              </a:rPr>
+              <a:t>Write a full-sentence answer</a:t>
+            </a:r>
+          </a:p>
+        </p:txBody>
+      </p:sp>
+      <p:sp>
+        <p:nvSpPr>
+          <p:cNvPr id="12" name="Rectangle 11"/>
           <p:cNvSpPr/>
           <p:nvPr/>
         </p:nvSpPr>
         <p:spPr>
           <a:xfrm>
-            <a:off x="4255008" y="1188720"/>
-            <a:ext cx="3651504" cy="4434840"/>
-          </a:xfrm>
-          <a:prstGeom prst="roundRect">
-            <a:avLst/>
-          </a:prstGeom>
-          <a:solidFill>
-            <a:srgbClr val="FFFFFF"/>
+            <a:off x="658368" y="3858768"/>
+            <a:ext cx="3249168" cy="15875"/>
+          </a:xfrm>
+          <a:prstGeom prst="rect">
+            <a:avLst/>
+          </a:prstGeom>
+          <a:solidFill>
+            <a:srgbClr val="E2E8F0"/>
           </a:solidFill>
           <a:ln>
             <a:noFill/>
@@ -15919,20 +17401,20 @@
       </p:sp>
       <p:sp>
         <p:nvSpPr>
-          <p:cNvPr id="12" name="Rounded Rectangle 11"/>
+          <p:cNvPr id="13" name="Rectangle 12"/>
           <p:cNvSpPr/>
           <p:nvPr/>
         </p:nvSpPr>
         <p:spPr>
           <a:xfrm>
-            <a:off x="4437888" y="1371600"/>
-            <a:ext cx="457200" cy="457200"/>
-          </a:xfrm>
-          <a:prstGeom prst="roundRect">
-            <a:avLst/>
-          </a:prstGeom>
-          <a:solidFill>
-            <a:srgbClr val="9F1239"/>
+            <a:off x="658368" y="4151376"/>
+            <a:ext cx="3249168" cy="15875"/>
+          </a:xfrm>
+          <a:prstGeom prst="rect">
+            <a:avLst/>
+          </a:prstGeom>
+          <a:solidFill>
+            <a:srgbClr val="E2E8F0"/>
           </a:solidFill>
           <a:ln>
             <a:noFill/>
@@ -15962,173 +17444,20 @@
       </p:sp>
       <p:sp>
         <p:nvSpPr>
-          <p:cNvPr id="13" name="TextBox 12"/>
-          <p:cNvSpPr txBox="1"/>
-          <p:nvPr/>
-        </p:nvSpPr>
-        <p:spPr>
-          <a:xfrm>
-            <a:off x="4437888" y="1426464"/>
-            <a:ext cx="457200" cy="365760"/>
-          </a:xfrm>
-          <a:prstGeom prst="rect">
-            <a:avLst/>
-          </a:prstGeom>
-          <a:noFill/>
-        </p:spPr>
-        <p:txBody>
-          <a:bodyPr wrap="square" anchor="t"/>
-          <a:lstStyle/>
-          <a:p>
-            <a:pPr algn="ctr"/>
-            <a:r>
-              <a:rPr sz="1600" b="1" i="0" a:ea="Calibri">
-                <a:solidFill>
-                  <a:srgbClr val="FFFFFF"/>
-                </a:solidFill>
-                <a:latin typeface="Calibri"/>
-              </a:rPr>
-              <a:t>2</a:t>
-            </a:r>
-          </a:p>
-        </p:txBody>
-      </p:sp>
-      <p:sp>
-        <p:nvSpPr>
-          <p:cNvPr id="14" name="TextBox 13"/>
-          <p:cNvSpPr txBox="1"/>
-          <p:nvPr/>
-        </p:nvSpPr>
-        <p:spPr>
-          <a:xfrm>
-            <a:off x="4986528" y="1426464"/>
-            <a:ext cx="2645664" cy="365760"/>
-          </a:xfrm>
-          <a:prstGeom prst="rect">
-            <a:avLst/>
-          </a:prstGeom>
-          <a:noFill/>
-        </p:spPr>
-        <p:txBody>
-          <a:bodyPr wrap="square" anchor="t"/>
-          <a:lstStyle/>
-          <a:p>
-            <a:pPr algn="l"/>
-            <a:r>
-              <a:rPr sz="1300" b="1" i="0" a:ea="Calibri">
-                <a:solidFill>
-                  <a:srgbClr val="9F1239"/>
-                </a:solidFill>
-                <a:latin typeface="Calibri"/>
-              </a:rPr>
-              <a:t>2 marks</a:t>
-            </a:r>
-          </a:p>
-        </p:txBody>
-      </p:sp>
-      <p:sp>
-        <p:nvSpPr>
-          <p:cNvPr id="15" name="TextBox 14"/>
-          <p:cNvSpPr txBox="1"/>
-          <p:nvPr/>
-        </p:nvSpPr>
-        <p:spPr>
-          <a:xfrm>
-            <a:off x="4456176" y="2011680"/>
-            <a:ext cx="3249168" cy="3383280"/>
-          </a:xfrm>
-          <a:prstGeom prst="rect">
-            <a:avLst/>
-          </a:prstGeom>
-          <a:noFill/>
-        </p:spPr>
-        <p:txBody>
-          <a:bodyPr wrap="square" anchor="t"/>
-          <a:lstStyle/>
-          <a:p>
-            <a:pPr algn="l"/>
-            <a:r>
-              <a:rPr sz="1600" b="0" i="0" a:ea="Calibri">
-                <a:solidFill>
-                  <a:srgbClr val="0F172A"/>
-                </a:solidFill>
-                <a:latin typeface="Calibri"/>
-              </a:rPr>
-              <a:t>Copper is 69.0% </a:t>
-            </a:r>
-            <a:r>
-              <a:rPr sz="1600" b="0" i="0" a:ea="Calibri" baseline="30000">
-                <a:solidFill>
-                  <a:srgbClr val="0F172A"/>
-                </a:solidFill>
-                <a:latin typeface="Calibri"/>
-              </a:rPr>
-              <a:t>63</a:t>
-            </a:r>
-            <a:r>
-              <a:rPr sz="1600" b="0" i="0" a:ea="Calibri">
-                <a:solidFill>
-                  <a:srgbClr val="0F172A"/>
-                </a:solidFill>
-                <a:latin typeface="Calibri"/>
-              </a:rPr>
-              <a:t>Cu and 31.0% </a:t>
-            </a:r>
-            <a:r>
-              <a:rPr sz="1600" b="0" i="0" a:ea="Calibri" baseline="30000">
-                <a:solidFill>
-                  <a:srgbClr val="0F172A"/>
-                </a:solidFill>
-                <a:latin typeface="Calibri"/>
-              </a:rPr>
-              <a:t>65</a:t>
-            </a:r>
-            <a:r>
-              <a:rPr sz="1600" b="0" i="0" a:ea="Calibri">
-                <a:solidFill>
-                  <a:srgbClr val="0F172A"/>
-                </a:solidFill>
-                <a:latin typeface="Calibri"/>
-              </a:rPr>
-              <a:t>Cu. Calculate A</a:t>
-            </a:r>
-            <a:r>
-              <a:rPr sz="1600" b="0" i="0" a:ea="Calibri" baseline="-25000">
-                <a:solidFill>
-                  <a:srgbClr val="0F172A"/>
-                </a:solidFill>
-                <a:latin typeface="Calibri"/>
-              </a:rPr>
-              <a:t>r</a:t>
-            </a:r>
-            <a:r>
-              <a:rPr sz="1600" b="0" i="0" a:ea="Calibri">
-                <a:solidFill>
-                  <a:srgbClr val="0F172A"/>
-                </a:solidFill>
-                <a:latin typeface="Calibri"/>
-              </a:rPr>
-              <a:t> to 1 d.p.</a:t>
-            </a:r>
-          </a:p>
-        </p:txBody>
-      </p:sp>
-      <p:sp>
-        <p:nvSpPr>
-          <p:cNvPr id="16" name="Rounded Rectangle 15"/>
+          <p:cNvPr id="14" name="Rectangle 13"/>
           <p:cNvSpPr/>
           <p:nvPr/>
         </p:nvSpPr>
         <p:spPr>
           <a:xfrm>
-            <a:off x="8052816" y="1188720"/>
-            <a:ext cx="3651504" cy="4434840"/>
-          </a:xfrm>
-          <a:prstGeom prst="roundRect">
-            <a:avLst/>
-          </a:prstGeom>
-          <a:solidFill>
-            <a:srgbClr val="FFFFFF"/>
+            <a:off x="658368" y="4443984"/>
+            <a:ext cx="3249168" cy="15875"/>
+          </a:xfrm>
+          <a:prstGeom prst="rect">
+            <a:avLst/>
+          </a:prstGeom>
+          <a:solidFill>
+            <a:srgbClr val="E2E8F0"/>
           </a:solidFill>
           <a:ln>
             <a:noFill/>
@@ -16158,20 +17487,20 @@
       </p:sp>
       <p:sp>
         <p:nvSpPr>
-          <p:cNvPr id="17" name="Rounded Rectangle 16"/>
+          <p:cNvPr id="15" name="Rectangle 14"/>
           <p:cNvSpPr/>
           <p:nvPr/>
         </p:nvSpPr>
         <p:spPr>
           <a:xfrm>
-            <a:off x="8235696" y="1371600"/>
-            <a:ext cx="457200" cy="457200"/>
-          </a:xfrm>
-          <a:prstGeom prst="roundRect">
-            <a:avLst/>
-          </a:prstGeom>
-          <a:solidFill>
-            <a:srgbClr val="9F1239"/>
+            <a:off x="658368" y="4736592"/>
+            <a:ext cx="3249168" cy="15875"/>
+          </a:xfrm>
+          <a:prstGeom prst="rect">
+            <a:avLst/>
+          </a:prstGeom>
+          <a:solidFill>
+            <a:srgbClr val="E2E8F0"/>
           </a:solidFill>
           <a:ln>
             <a:noFill/>
@@ -16201,170 +17530,20 @@
       </p:sp>
       <p:sp>
         <p:nvSpPr>
-          <p:cNvPr id="18" name="TextBox 17"/>
-          <p:cNvSpPr txBox="1"/>
-          <p:nvPr/>
-        </p:nvSpPr>
-        <p:spPr>
-          <a:xfrm>
-            <a:off x="8235696" y="1426464"/>
-            <a:ext cx="457200" cy="365760"/>
-          </a:xfrm>
-          <a:prstGeom prst="rect">
-            <a:avLst/>
-          </a:prstGeom>
-          <a:noFill/>
-        </p:spPr>
-        <p:txBody>
-          <a:bodyPr wrap="square" anchor="t"/>
-          <a:lstStyle/>
-          <a:p>
-            <a:pPr algn="ctr"/>
-            <a:r>
-              <a:rPr sz="1600" b="1" i="0" a:ea="Calibri">
-                <a:solidFill>
-                  <a:srgbClr val="FFFFFF"/>
-                </a:solidFill>
-                <a:latin typeface="Calibri"/>
-              </a:rPr>
-              <a:t>3</a:t>
-            </a:r>
-          </a:p>
-        </p:txBody>
-      </p:sp>
-      <p:sp>
-        <p:nvSpPr>
-          <p:cNvPr id="19" name="TextBox 18"/>
-          <p:cNvSpPr txBox="1"/>
-          <p:nvPr/>
-        </p:nvSpPr>
-        <p:spPr>
-          <a:xfrm>
-            <a:off x="8784336" y="1426464"/>
-            <a:ext cx="2645664" cy="365760"/>
-          </a:xfrm>
-          <a:prstGeom prst="rect">
-            <a:avLst/>
-          </a:prstGeom>
-          <a:noFill/>
-        </p:spPr>
-        <p:txBody>
-          <a:bodyPr wrap="square" anchor="t"/>
-          <a:lstStyle/>
-          <a:p>
-            <a:pPr algn="l"/>
-            <a:r>
-              <a:rPr sz="1300" b="1" i="0" a:ea="Calibri">
-                <a:solidFill>
-                  <a:srgbClr val="9F1239"/>
-                </a:solidFill>
-                <a:latin typeface="Calibri"/>
-              </a:rPr>
-              <a:t>2 marks</a:t>
-            </a:r>
-          </a:p>
-        </p:txBody>
-      </p:sp>
-      <p:sp>
-        <p:nvSpPr>
-          <p:cNvPr id="20" name="TextBox 19"/>
-          <p:cNvSpPr txBox="1"/>
-          <p:nvPr/>
-        </p:nvSpPr>
-        <p:spPr>
-          <a:xfrm>
-            <a:off x="8253984" y="2011680"/>
-            <a:ext cx="3249168" cy="3383280"/>
-          </a:xfrm>
-          <a:prstGeom prst="rect">
-            <a:avLst/>
-          </a:prstGeom>
-          <a:noFill/>
-        </p:spPr>
-        <p:txBody>
-          <a:bodyPr wrap="square" anchor="t"/>
-          <a:lstStyle/>
-          <a:p>
-            <a:pPr algn="l"/>
-            <a:r>
-              <a:rPr sz="1600" b="0" i="0" a:ea="Calibri">
-                <a:solidFill>
-                  <a:srgbClr val="0F172A"/>
-                </a:solidFill>
-                <a:latin typeface="Calibri"/>
-              </a:rPr>
-              <a:t>Why is A</a:t>
-            </a:r>
-            <a:r>
-              <a:rPr sz="1600" b="0" i="0" a:ea="Calibri" baseline="-25000">
-                <a:solidFill>
-                  <a:srgbClr val="0F172A"/>
-                </a:solidFill>
-                <a:latin typeface="Calibri"/>
-              </a:rPr>
-              <a:t>r</a:t>
-            </a:r>
-            <a:r>
-              <a:rPr sz="1600" b="0" i="0" a:ea="Calibri">
-                <a:solidFill>
-                  <a:srgbClr val="0F172A"/>
-                </a:solidFill>
-                <a:latin typeface="Calibri"/>
-              </a:rPr>
-              <a:t> for chlorine not a whole number?</a:t>
-            </a:r>
-          </a:p>
-        </p:txBody>
-      </p:sp>
-      <p:sp>
-        <p:nvSpPr>
-          <p:cNvPr id="21" name="TextBox 20"/>
-          <p:cNvSpPr txBox="1"/>
-          <p:nvPr/>
-        </p:nvSpPr>
-        <p:spPr>
-          <a:xfrm>
-            <a:off x="457200" y="5742432"/>
-            <a:ext cx="11247120" cy="274320"/>
-          </a:xfrm>
-          <a:prstGeom prst="rect">
-            <a:avLst/>
-          </a:prstGeom>
-          <a:noFill/>
-        </p:spPr>
-        <p:txBody>
-          <a:bodyPr wrap="square" anchor="t"/>
-          <a:lstStyle/>
-          <a:p>
-            <a:pPr algn="l"/>
-            <a:r>
-              <a:rPr sz="1300" b="1" i="0" a:ea="Calibri">
-                <a:solidFill>
-                  <a:srgbClr val="9F1239"/>
-                </a:solidFill>
-                <a:latin typeface="Calibri"/>
-              </a:rPr>
-              <a:t>Think first — answers are on the next slide.</a:t>
-            </a:r>
-          </a:p>
-        </p:txBody>
-      </p:sp>
-      <p:sp>
-        <p:nvSpPr>
-          <p:cNvPr id="22" name="Rectangle 21"/>
+          <p:cNvPr id="16" name="Rounded Rectangle 15"/>
           <p:cNvSpPr/>
           <p:nvPr/>
         </p:nvSpPr>
         <p:spPr>
           <a:xfrm>
-            <a:off x="0" y="6437376"/>
-            <a:ext cx="12191695" cy="420624"/>
-          </a:xfrm>
-          <a:prstGeom prst="rect">
-            <a:avLst/>
-          </a:prstGeom>
-          <a:solidFill>
-            <a:srgbClr val="004D40"/>
+            <a:off x="4255008" y="1188720"/>
+            <a:ext cx="3651504" cy="4434840"/>
+          </a:xfrm>
+          <a:prstGeom prst="roundRect">
+            <a:avLst/>
+          </a:prstGeom>
+          <a:solidFill>
+            <a:srgbClr val="FFFFFF"/>
           </a:solidFill>
           <a:ln>
             <a:noFill/>
@@ -16392,9 +17571,894 @@
           </a:p>
         </p:txBody>
       </p:sp>
+      <p:sp>
+        <p:nvSpPr>
+          <p:cNvPr id="17" name="Rounded Rectangle 16"/>
+          <p:cNvSpPr/>
+          <p:nvPr/>
+        </p:nvSpPr>
+        <p:spPr>
+          <a:xfrm>
+            <a:off x="4437888" y="1371600"/>
+            <a:ext cx="457200" cy="457200"/>
+          </a:xfrm>
+          <a:prstGeom prst="roundRect">
+            <a:avLst/>
+          </a:prstGeom>
+          <a:solidFill>
+            <a:srgbClr val="9F1239"/>
+          </a:solidFill>
+          <a:ln>
+            <a:noFill/>
+          </a:ln>
+        </p:spPr>
+        <p:style>
+          <a:lnRef idx="1">
+            <a:schemeClr val="accent1"/>
+          </a:lnRef>
+          <a:fillRef idx="3">
+            <a:schemeClr val="accent1"/>
+          </a:fillRef>
+          <a:effectRef idx="2">
+            <a:schemeClr val="accent1"/>
+          </a:effectRef>
+          <a:fontRef idx="minor">
+            <a:schemeClr val="lt1"/>
+          </a:fontRef>
+        </p:style>
+        <p:txBody>
+          <a:bodyPr rtlCol="0" anchor="ctr"/>
+          <a:lstStyle/>
+          <a:p>
+            <a:pPr algn="ctr"/>
+          </a:p>
+        </p:txBody>
+      </p:sp>
+      <p:sp>
+        <p:nvSpPr>
+          <p:cNvPr id="18" name="TextBox 17"/>
+          <p:cNvSpPr txBox="1"/>
+          <p:nvPr/>
+        </p:nvSpPr>
+        <p:spPr>
+          <a:xfrm>
+            <a:off x="4437888" y="1426464"/>
+            <a:ext cx="457200" cy="365760"/>
+          </a:xfrm>
+          <a:prstGeom prst="rect">
+            <a:avLst/>
+          </a:prstGeom>
+          <a:noFill/>
+        </p:spPr>
+        <p:txBody>
+          <a:bodyPr wrap="square" anchor="t"/>
+          <a:lstStyle/>
+          <a:p>
+            <a:pPr algn="ctr"/>
+            <a:r>
+              <a:rPr sz="1600" b="1" i="0" a:ea="Calibri">
+                <a:solidFill>
+                  <a:srgbClr val="FFFFFF"/>
+                </a:solidFill>
+                <a:latin typeface="Calibri"/>
+              </a:rPr>
+              <a:t>2</a:t>
+            </a:r>
+          </a:p>
+        </p:txBody>
+      </p:sp>
+      <p:sp>
+        <p:nvSpPr>
+          <p:cNvPr id="19" name="TextBox 18"/>
+          <p:cNvSpPr txBox="1"/>
+          <p:nvPr/>
+        </p:nvSpPr>
+        <p:spPr>
+          <a:xfrm>
+            <a:off x="4986528" y="1426464"/>
+            <a:ext cx="2645664" cy="365760"/>
+          </a:xfrm>
+          <a:prstGeom prst="rect">
+            <a:avLst/>
+          </a:prstGeom>
+          <a:noFill/>
+        </p:spPr>
+        <p:txBody>
+          <a:bodyPr wrap="square" anchor="t"/>
+          <a:lstStyle/>
+          <a:p>
+            <a:pPr algn="l"/>
+            <a:r>
+              <a:rPr sz="1300" b="1" i="0" a:ea="Calibri">
+                <a:solidFill>
+                  <a:srgbClr val="9F1239"/>
+                </a:solidFill>
+                <a:latin typeface="Calibri"/>
+              </a:rPr>
+              <a:t>2 marks</a:t>
+            </a:r>
+          </a:p>
+        </p:txBody>
+      </p:sp>
+      <p:sp>
+        <p:nvSpPr>
+          <p:cNvPr id="20" name="TextBox 19"/>
+          <p:cNvSpPr txBox="1"/>
+          <p:nvPr/>
+        </p:nvSpPr>
+        <p:spPr>
+          <a:xfrm>
+            <a:off x="4456176" y="2011680"/>
+            <a:ext cx="3249168" cy="1417320"/>
+          </a:xfrm>
+          <a:prstGeom prst="rect">
+            <a:avLst/>
+          </a:prstGeom>
+          <a:noFill/>
+        </p:spPr>
+        <p:txBody>
+          <a:bodyPr wrap="square" anchor="t"/>
+          <a:lstStyle/>
+          <a:p>
+            <a:pPr algn="l"/>
+            <a:r>
+              <a:rPr sz="1600" b="0" i="0" a:ea="Calibri">
+                <a:solidFill>
+                  <a:srgbClr val="0F172A"/>
+                </a:solidFill>
+                <a:latin typeface="Calibri"/>
+              </a:rPr>
+              <a:t>Copper is 69.0% </a:t>
+            </a:r>
+            <a:r>
+              <a:rPr sz="1600" b="0" i="0" a:ea="Calibri" baseline="30000">
+                <a:solidFill>
+                  <a:srgbClr val="0F172A"/>
+                </a:solidFill>
+                <a:latin typeface="Calibri"/>
+              </a:rPr>
+              <a:t>63</a:t>
+            </a:r>
+            <a:r>
+              <a:rPr sz="1600" b="0" i="0" a:ea="Calibri">
+                <a:solidFill>
+                  <a:srgbClr val="0F172A"/>
+                </a:solidFill>
+                <a:latin typeface="Calibri"/>
+              </a:rPr>
+              <a:t>Cu and 31.0% </a:t>
+            </a:r>
+            <a:r>
+              <a:rPr sz="1600" b="0" i="0" a:ea="Calibri" baseline="30000">
+                <a:solidFill>
+                  <a:srgbClr val="0F172A"/>
+                </a:solidFill>
+                <a:latin typeface="Calibri"/>
+              </a:rPr>
+              <a:t>65</a:t>
+            </a:r>
+            <a:r>
+              <a:rPr sz="1600" b="0" i="0" a:ea="Calibri">
+                <a:solidFill>
+                  <a:srgbClr val="0F172A"/>
+                </a:solidFill>
+                <a:latin typeface="Calibri"/>
+              </a:rPr>
+              <a:t>Cu. Calculate A</a:t>
+            </a:r>
+            <a:r>
+              <a:rPr sz="1600" b="0" i="0" a:ea="Calibri" baseline="-25000">
+                <a:solidFill>
+                  <a:srgbClr val="0F172A"/>
+                </a:solidFill>
+                <a:latin typeface="Calibri"/>
+              </a:rPr>
+              <a:t>r</a:t>
+            </a:r>
+            <a:r>
+              <a:rPr sz="1600" b="0" i="0" a:ea="Calibri">
+                <a:solidFill>
+                  <a:srgbClr val="0F172A"/>
+                </a:solidFill>
+                <a:latin typeface="Calibri"/>
+              </a:rPr>
+              <a:t> to 1 d.p.</a:t>
+            </a:r>
+          </a:p>
+        </p:txBody>
+      </p:sp>
+      <p:sp>
+        <p:nvSpPr>
+          <p:cNvPr id="21" name="TextBox 20"/>
+          <p:cNvSpPr txBox="1"/>
+          <p:nvPr/>
+        </p:nvSpPr>
+        <p:spPr>
+          <a:xfrm>
+            <a:off x="4456176" y="3520440"/>
+            <a:ext cx="3249168" cy="256032"/>
+          </a:xfrm>
+          <a:prstGeom prst="rect">
+            <a:avLst/>
+          </a:prstGeom>
+          <a:noFill/>
+        </p:spPr>
+        <p:txBody>
+          <a:bodyPr wrap="square" anchor="t"/>
+          <a:lstStyle/>
+          <a:p>
+            <a:pPr algn="l"/>
+            <a:r>
+              <a:rPr sz="1100" b="1" i="0" a:ea="Calibri">
+                <a:solidFill>
+                  <a:srgbClr val="475569"/>
+                </a:solidFill>
+                <a:latin typeface="Calibri"/>
+              </a:rPr>
+              <a:t>Write a full-sentence answer</a:t>
+            </a:r>
+          </a:p>
+        </p:txBody>
+      </p:sp>
+      <p:sp>
+        <p:nvSpPr>
+          <p:cNvPr id="22" name="Rectangle 21"/>
+          <p:cNvSpPr/>
+          <p:nvPr/>
+        </p:nvSpPr>
+        <p:spPr>
+          <a:xfrm>
+            <a:off x="4456176" y="3858768"/>
+            <a:ext cx="3249168" cy="15875"/>
+          </a:xfrm>
+          <a:prstGeom prst="rect">
+            <a:avLst/>
+          </a:prstGeom>
+          <a:solidFill>
+            <a:srgbClr val="E2E8F0"/>
+          </a:solidFill>
+          <a:ln>
+            <a:noFill/>
+          </a:ln>
+        </p:spPr>
+        <p:style>
+          <a:lnRef idx="1">
+            <a:schemeClr val="accent1"/>
+          </a:lnRef>
+          <a:fillRef idx="3">
+            <a:schemeClr val="accent1"/>
+          </a:fillRef>
+          <a:effectRef idx="2">
+            <a:schemeClr val="accent1"/>
+          </a:effectRef>
+          <a:fontRef idx="minor">
+            <a:schemeClr val="lt1"/>
+          </a:fontRef>
+        </p:style>
+        <p:txBody>
+          <a:bodyPr rtlCol="0" anchor="ctr"/>
+          <a:lstStyle/>
+          <a:p>
+            <a:pPr algn="ctr"/>
+          </a:p>
+        </p:txBody>
+      </p:sp>
+      <p:sp>
+        <p:nvSpPr>
+          <p:cNvPr id="23" name="Rectangle 22"/>
+          <p:cNvSpPr/>
+          <p:nvPr/>
+        </p:nvSpPr>
+        <p:spPr>
+          <a:xfrm>
+            <a:off x="4456176" y="4151376"/>
+            <a:ext cx="3249168" cy="15875"/>
+          </a:xfrm>
+          <a:prstGeom prst="rect">
+            <a:avLst/>
+          </a:prstGeom>
+          <a:solidFill>
+            <a:srgbClr val="E2E8F0"/>
+          </a:solidFill>
+          <a:ln>
+            <a:noFill/>
+          </a:ln>
+        </p:spPr>
+        <p:style>
+          <a:lnRef idx="1">
+            <a:schemeClr val="accent1"/>
+          </a:lnRef>
+          <a:fillRef idx="3">
+            <a:schemeClr val="accent1"/>
+          </a:fillRef>
+          <a:effectRef idx="2">
+            <a:schemeClr val="accent1"/>
+          </a:effectRef>
+          <a:fontRef idx="minor">
+            <a:schemeClr val="lt1"/>
+          </a:fontRef>
+        </p:style>
+        <p:txBody>
+          <a:bodyPr rtlCol="0" anchor="ctr"/>
+          <a:lstStyle/>
+          <a:p>
+            <a:pPr algn="ctr"/>
+          </a:p>
+        </p:txBody>
+      </p:sp>
+      <p:sp>
+        <p:nvSpPr>
+          <p:cNvPr id="24" name="Rectangle 23"/>
+          <p:cNvSpPr/>
+          <p:nvPr/>
+        </p:nvSpPr>
+        <p:spPr>
+          <a:xfrm>
+            <a:off x="4456176" y="4443984"/>
+            <a:ext cx="3249168" cy="15875"/>
+          </a:xfrm>
+          <a:prstGeom prst="rect">
+            <a:avLst/>
+          </a:prstGeom>
+          <a:solidFill>
+            <a:srgbClr val="E2E8F0"/>
+          </a:solidFill>
+          <a:ln>
+            <a:noFill/>
+          </a:ln>
+        </p:spPr>
+        <p:style>
+          <a:lnRef idx="1">
+            <a:schemeClr val="accent1"/>
+          </a:lnRef>
+          <a:fillRef idx="3">
+            <a:schemeClr val="accent1"/>
+          </a:fillRef>
+          <a:effectRef idx="2">
+            <a:schemeClr val="accent1"/>
+          </a:effectRef>
+          <a:fontRef idx="minor">
+            <a:schemeClr val="lt1"/>
+          </a:fontRef>
+        </p:style>
+        <p:txBody>
+          <a:bodyPr rtlCol="0" anchor="ctr"/>
+          <a:lstStyle/>
+          <a:p>
+            <a:pPr algn="ctr"/>
+          </a:p>
+        </p:txBody>
+      </p:sp>
+      <p:sp>
+        <p:nvSpPr>
+          <p:cNvPr id="25" name="Rectangle 24"/>
+          <p:cNvSpPr/>
+          <p:nvPr/>
+        </p:nvSpPr>
+        <p:spPr>
+          <a:xfrm>
+            <a:off x="4456176" y="4736592"/>
+            <a:ext cx="3249168" cy="15875"/>
+          </a:xfrm>
+          <a:prstGeom prst="rect">
+            <a:avLst/>
+          </a:prstGeom>
+          <a:solidFill>
+            <a:srgbClr val="E2E8F0"/>
+          </a:solidFill>
+          <a:ln>
+            <a:noFill/>
+          </a:ln>
+        </p:spPr>
+        <p:style>
+          <a:lnRef idx="1">
+            <a:schemeClr val="accent1"/>
+          </a:lnRef>
+          <a:fillRef idx="3">
+            <a:schemeClr val="accent1"/>
+          </a:fillRef>
+          <a:effectRef idx="2">
+            <a:schemeClr val="accent1"/>
+          </a:effectRef>
+          <a:fontRef idx="minor">
+            <a:schemeClr val="lt1"/>
+          </a:fontRef>
+        </p:style>
+        <p:txBody>
+          <a:bodyPr rtlCol="0" anchor="ctr"/>
+          <a:lstStyle/>
+          <a:p>
+            <a:pPr algn="ctr"/>
+          </a:p>
+        </p:txBody>
+      </p:sp>
+      <p:sp>
+        <p:nvSpPr>
+          <p:cNvPr id="26" name="Rounded Rectangle 25"/>
+          <p:cNvSpPr/>
+          <p:nvPr/>
+        </p:nvSpPr>
+        <p:spPr>
+          <a:xfrm>
+            <a:off x="8052816" y="1188720"/>
+            <a:ext cx="3651504" cy="4434840"/>
+          </a:xfrm>
+          <a:prstGeom prst="roundRect">
+            <a:avLst/>
+          </a:prstGeom>
+          <a:solidFill>
+            <a:srgbClr val="FFFFFF"/>
+          </a:solidFill>
+          <a:ln>
+            <a:noFill/>
+          </a:ln>
+        </p:spPr>
+        <p:style>
+          <a:lnRef idx="1">
+            <a:schemeClr val="accent1"/>
+          </a:lnRef>
+          <a:fillRef idx="3">
+            <a:schemeClr val="accent1"/>
+          </a:fillRef>
+          <a:effectRef idx="2">
+            <a:schemeClr val="accent1"/>
+          </a:effectRef>
+          <a:fontRef idx="minor">
+            <a:schemeClr val="lt1"/>
+          </a:fontRef>
+        </p:style>
+        <p:txBody>
+          <a:bodyPr rtlCol="0" anchor="ctr"/>
+          <a:lstStyle/>
+          <a:p>
+            <a:pPr algn="ctr"/>
+          </a:p>
+        </p:txBody>
+      </p:sp>
+      <p:sp>
+        <p:nvSpPr>
+          <p:cNvPr id="27" name="Rounded Rectangle 26"/>
+          <p:cNvSpPr/>
+          <p:nvPr/>
+        </p:nvSpPr>
+        <p:spPr>
+          <a:xfrm>
+            <a:off x="8235696" y="1371600"/>
+            <a:ext cx="457200" cy="457200"/>
+          </a:xfrm>
+          <a:prstGeom prst="roundRect">
+            <a:avLst/>
+          </a:prstGeom>
+          <a:solidFill>
+            <a:srgbClr val="9F1239"/>
+          </a:solidFill>
+          <a:ln>
+            <a:noFill/>
+          </a:ln>
+        </p:spPr>
+        <p:style>
+          <a:lnRef idx="1">
+            <a:schemeClr val="accent1"/>
+          </a:lnRef>
+          <a:fillRef idx="3">
+            <a:schemeClr val="accent1"/>
+          </a:fillRef>
+          <a:effectRef idx="2">
+            <a:schemeClr val="accent1"/>
+          </a:effectRef>
+          <a:fontRef idx="minor">
+            <a:schemeClr val="lt1"/>
+          </a:fontRef>
+        </p:style>
+        <p:txBody>
+          <a:bodyPr rtlCol="0" anchor="ctr"/>
+          <a:lstStyle/>
+          <a:p>
+            <a:pPr algn="ctr"/>
+          </a:p>
+        </p:txBody>
+      </p:sp>
+      <p:sp>
+        <p:nvSpPr>
+          <p:cNvPr id="28" name="TextBox 27"/>
+          <p:cNvSpPr txBox="1"/>
+          <p:nvPr/>
+        </p:nvSpPr>
+        <p:spPr>
+          <a:xfrm>
+            <a:off x="8235696" y="1426464"/>
+            <a:ext cx="457200" cy="365760"/>
+          </a:xfrm>
+          <a:prstGeom prst="rect">
+            <a:avLst/>
+          </a:prstGeom>
+          <a:noFill/>
+        </p:spPr>
+        <p:txBody>
+          <a:bodyPr wrap="square" anchor="t"/>
+          <a:lstStyle/>
+          <a:p>
+            <a:pPr algn="ctr"/>
+            <a:r>
+              <a:rPr sz="1600" b="1" i="0" a:ea="Calibri">
+                <a:solidFill>
+                  <a:srgbClr val="FFFFFF"/>
+                </a:solidFill>
+                <a:latin typeface="Calibri"/>
+              </a:rPr>
+              <a:t>3</a:t>
+            </a:r>
+          </a:p>
+        </p:txBody>
+      </p:sp>
+      <p:sp>
+        <p:nvSpPr>
+          <p:cNvPr id="29" name="TextBox 28"/>
+          <p:cNvSpPr txBox="1"/>
+          <p:nvPr/>
+        </p:nvSpPr>
+        <p:spPr>
+          <a:xfrm>
+            <a:off x="8784336" y="1426464"/>
+            <a:ext cx="2645664" cy="365760"/>
+          </a:xfrm>
+          <a:prstGeom prst="rect">
+            <a:avLst/>
+          </a:prstGeom>
+          <a:noFill/>
+        </p:spPr>
+        <p:txBody>
+          <a:bodyPr wrap="square" anchor="t"/>
+          <a:lstStyle/>
+          <a:p>
+            <a:pPr algn="l"/>
+            <a:r>
+              <a:rPr sz="1300" b="1" i="0" a:ea="Calibri">
+                <a:solidFill>
+                  <a:srgbClr val="9F1239"/>
+                </a:solidFill>
+                <a:latin typeface="Calibri"/>
+              </a:rPr>
+              <a:t>2 marks</a:t>
+            </a:r>
+          </a:p>
+        </p:txBody>
+      </p:sp>
+      <p:sp>
+        <p:nvSpPr>
+          <p:cNvPr id="30" name="TextBox 29"/>
+          <p:cNvSpPr txBox="1"/>
+          <p:nvPr/>
+        </p:nvSpPr>
+        <p:spPr>
+          <a:xfrm>
+            <a:off x="8253984" y="2011680"/>
+            <a:ext cx="3249168" cy="1417320"/>
+          </a:xfrm>
+          <a:prstGeom prst="rect">
+            <a:avLst/>
+          </a:prstGeom>
+          <a:noFill/>
+        </p:spPr>
+        <p:txBody>
+          <a:bodyPr wrap="square" anchor="t"/>
+          <a:lstStyle/>
+          <a:p>
+            <a:pPr algn="l"/>
+            <a:r>
+              <a:rPr sz="1600" b="0" i="0" a:ea="Calibri">
+                <a:solidFill>
+                  <a:srgbClr val="0F172A"/>
+                </a:solidFill>
+                <a:latin typeface="Calibri"/>
+              </a:rPr>
+              <a:t>Why is A</a:t>
+            </a:r>
+            <a:r>
+              <a:rPr sz="1600" b="0" i="0" a:ea="Calibri" baseline="-25000">
+                <a:solidFill>
+                  <a:srgbClr val="0F172A"/>
+                </a:solidFill>
+                <a:latin typeface="Calibri"/>
+              </a:rPr>
+              <a:t>r</a:t>
+            </a:r>
+            <a:r>
+              <a:rPr sz="1600" b="0" i="0" a:ea="Calibri">
+                <a:solidFill>
+                  <a:srgbClr val="0F172A"/>
+                </a:solidFill>
+                <a:latin typeface="Calibri"/>
+              </a:rPr>
+              <a:t> for chlorine not a whole number?</a:t>
+            </a:r>
+          </a:p>
+        </p:txBody>
+      </p:sp>
+      <p:sp>
+        <p:nvSpPr>
+          <p:cNvPr id="31" name="TextBox 30"/>
+          <p:cNvSpPr txBox="1"/>
+          <p:nvPr/>
+        </p:nvSpPr>
+        <p:spPr>
+          <a:xfrm>
+            <a:off x="8253984" y="3520440"/>
+            <a:ext cx="3249168" cy="256032"/>
+          </a:xfrm>
+          <a:prstGeom prst="rect">
+            <a:avLst/>
+          </a:prstGeom>
+          <a:noFill/>
+        </p:spPr>
+        <p:txBody>
+          <a:bodyPr wrap="square" anchor="t"/>
+          <a:lstStyle/>
+          <a:p>
+            <a:pPr algn="l"/>
+            <a:r>
+              <a:rPr sz="1100" b="1" i="0" a:ea="Calibri">
+                <a:solidFill>
+                  <a:srgbClr val="475569"/>
+                </a:solidFill>
+                <a:latin typeface="Calibri"/>
+              </a:rPr>
+              <a:t>Write a full-sentence answer</a:t>
+            </a:r>
+          </a:p>
+        </p:txBody>
+      </p:sp>
+      <p:sp>
+        <p:nvSpPr>
+          <p:cNvPr id="32" name="Rectangle 31"/>
+          <p:cNvSpPr/>
+          <p:nvPr/>
+        </p:nvSpPr>
+        <p:spPr>
+          <a:xfrm>
+            <a:off x="8253984" y="3858768"/>
+            <a:ext cx="3249168" cy="15875"/>
+          </a:xfrm>
+          <a:prstGeom prst="rect">
+            <a:avLst/>
+          </a:prstGeom>
+          <a:solidFill>
+            <a:srgbClr val="E2E8F0"/>
+          </a:solidFill>
+          <a:ln>
+            <a:noFill/>
+          </a:ln>
+        </p:spPr>
+        <p:style>
+          <a:lnRef idx="1">
+            <a:schemeClr val="accent1"/>
+          </a:lnRef>
+          <a:fillRef idx="3">
+            <a:schemeClr val="accent1"/>
+          </a:fillRef>
+          <a:effectRef idx="2">
+            <a:schemeClr val="accent1"/>
+          </a:effectRef>
+          <a:fontRef idx="minor">
+            <a:schemeClr val="lt1"/>
+          </a:fontRef>
+        </p:style>
+        <p:txBody>
+          <a:bodyPr rtlCol="0" anchor="ctr"/>
+          <a:lstStyle/>
+          <a:p>
+            <a:pPr algn="ctr"/>
+          </a:p>
+        </p:txBody>
+      </p:sp>
+      <p:sp>
+        <p:nvSpPr>
+          <p:cNvPr id="33" name="Rectangle 32"/>
+          <p:cNvSpPr/>
+          <p:nvPr/>
+        </p:nvSpPr>
+        <p:spPr>
+          <a:xfrm>
+            <a:off x="8253984" y="4151376"/>
+            <a:ext cx="3249168" cy="15875"/>
+          </a:xfrm>
+          <a:prstGeom prst="rect">
+            <a:avLst/>
+          </a:prstGeom>
+          <a:solidFill>
+            <a:srgbClr val="E2E8F0"/>
+          </a:solidFill>
+          <a:ln>
+            <a:noFill/>
+          </a:ln>
+        </p:spPr>
+        <p:style>
+          <a:lnRef idx="1">
+            <a:schemeClr val="accent1"/>
+          </a:lnRef>
+          <a:fillRef idx="3">
+            <a:schemeClr val="accent1"/>
+          </a:fillRef>
+          <a:effectRef idx="2">
+            <a:schemeClr val="accent1"/>
+          </a:effectRef>
+          <a:fontRef idx="minor">
+            <a:schemeClr val="lt1"/>
+          </a:fontRef>
+        </p:style>
+        <p:txBody>
+          <a:bodyPr rtlCol="0" anchor="ctr"/>
+          <a:lstStyle/>
+          <a:p>
+            <a:pPr algn="ctr"/>
+          </a:p>
+        </p:txBody>
+      </p:sp>
+      <p:sp>
+        <p:nvSpPr>
+          <p:cNvPr id="34" name="Rectangle 33"/>
+          <p:cNvSpPr/>
+          <p:nvPr/>
+        </p:nvSpPr>
+        <p:spPr>
+          <a:xfrm>
+            <a:off x="8253984" y="4443984"/>
+            <a:ext cx="3249168" cy="15875"/>
+          </a:xfrm>
+          <a:prstGeom prst="rect">
+            <a:avLst/>
+          </a:prstGeom>
+          <a:solidFill>
+            <a:srgbClr val="E2E8F0"/>
+          </a:solidFill>
+          <a:ln>
+            <a:noFill/>
+          </a:ln>
+        </p:spPr>
+        <p:style>
+          <a:lnRef idx="1">
+            <a:schemeClr val="accent1"/>
+          </a:lnRef>
+          <a:fillRef idx="3">
+            <a:schemeClr val="accent1"/>
+          </a:fillRef>
+          <a:effectRef idx="2">
+            <a:schemeClr val="accent1"/>
+          </a:effectRef>
+          <a:fontRef idx="minor">
+            <a:schemeClr val="lt1"/>
+          </a:fontRef>
+        </p:style>
+        <p:txBody>
+          <a:bodyPr rtlCol="0" anchor="ctr"/>
+          <a:lstStyle/>
+          <a:p>
+            <a:pPr algn="ctr"/>
+          </a:p>
+        </p:txBody>
+      </p:sp>
+      <p:sp>
+        <p:nvSpPr>
+          <p:cNvPr id="35" name="Rectangle 34"/>
+          <p:cNvSpPr/>
+          <p:nvPr/>
+        </p:nvSpPr>
+        <p:spPr>
+          <a:xfrm>
+            <a:off x="8253984" y="4736592"/>
+            <a:ext cx="3249168" cy="15875"/>
+          </a:xfrm>
+          <a:prstGeom prst="rect">
+            <a:avLst/>
+          </a:prstGeom>
+          <a:solidFill>
+            <a:srgbClr val="E2E8F0"/>
+          </a:solidFill>
+          <a:ln>
+            <a:noFill/>
+          </a:ln>
+        </p:spPr>
+        <p:style>
+          <a:lnRef idx="1">
+            <a:schemeClr val="accent1"/>
+          </a:lnRef>
+          <a:fillRef idx="3">
+            <a:schemeClr val="accent1"/>
+          </a:fillRef>
+          <a:effectRef idx="2">
+            <a:schemeClr val="accent1"/>
+          </a:effectRef>
+          <a:fontRef idx="minor">
+            <a:schemeClr val="lt1"/>
+          </a:fontRef>
+        </p:style>
+        <p:txBody>
+          <a:bodyPr rtlCol="0" anchor="ctr"/>
+          <a:lstStyle/>
+          <a:p>
+            <a:pPr algn="ctr"/>
+          </a:p>
+        </p:txBody>
+      </p:sp>
+      <p:sp>
+        <p:nvSpPr>
+          <p:cNvPr id="36" name="TextBox 35"/>
+          <p:cNvSpPr txBox="1"/>
+          <p:nvPr/>
+        </p:nvSpPr>
+        <p:spPr>
+          <a:xfrm>
+            <a:off x="457200" y="5742432"/>
+            <a:ext cx="11247120" cy="274320"/>
+          </a:xfrm>
+          <a:prstGeom prst="rect">
+            <a:avLst/>
+          </a:prstGeom>
+          <a:noFill/>
+        </p:spPr>
+        <p:txBody>
+          <a:bodyPr wrap="square" anchor="t"/>
+          <a:lstStyle/>
+          <a:p>
+            <a:pPr algn="l"/>
+            <a:r>
+              <a:rPr sz="1300" b="1" i="0" a:ea="Calibri">
+                <a:solidFill>
+                  <a:srgbClr val="9F1239"/>
+                </a:solidFill>
+                <a:latin typeface="Calibri"/>
+              </a:rPr>
+              <a:t>Think first — answers are on the next slide.</a:t>
+            </a:r>
+          </a:p>
+        </p:txBody>
+      </p:sp>
+      <p:sp>
+        <p:nvSpPr>
+          <p:cNvPr id="37" name="Rectangle 36"/>
+          <p:cNvSpPr/>
+          <p:nvPr/>
+        </p:nvSpPr>
+        <p:spPr>
+          <a:xfrm>
+            <a:off x="0" y="6437376"/>
+            <a:ext cx="12191695" cy="420624"/>
+          </a:xfrm>
+          <a:prstGeom prst="rect">
+            <a:avLst/>
+          </a:prstGeom>
+          <a:solidFill>
+            <a:srgbClr val="004D40"/>
+          </a:solidFill>
+          <a:ln>
+            <a:noFill/>
+          </a:ln>
+        </p:spPr>
+        <p:style>
+          <a:lnRef idx="1">
+            <a:schemeClr val="accent1"/>
+          </a:lnRef>
+          <a:fillRef idx="3">
+            <a:schemeClr val="accent1"/>
+          </a:fillRef>
+          <a:effectRef idx="2">
+            <a:schemeClr val="accent1"/>
+          </a:effectRef>
+          <a:fontRef idx="minor">
+            <a:schemeClr val="lt1"/>
+          </a:fontRef>
+        </p:style>
+        <p:txBody>
+          <a:bodyPr rtlCol="0" anchor="ctr"/>
+          <a:lstStyle/>
+          <a:p>
+            <a:pPr algn="ctr"/>
+          </a:p>
+        </p:txBody>
+      </p:sp>
       <p:pic>
         <p:nvPicPr>
-          <p:cNvPr id="23" name="Picture 22" descr="jdscience-footer-logo.png"/>
+          <p:cNvPr id="38" name="Picture 37" descr="jdscience-footer-logo.png"/>
           <p:cNvPicPr>
             <a:picLocks noChangeAspect="1"/>
           </p:cNvPicPr>
@@ -16418,7 +18482,7 @@
       </p:pic>
       <p:sp>
         <p:nvSpPr>
-          <p:cNvPr id="24" name="TextBox 23"/>
+          <p:cNvPr id="39" name="TextBox 38"/>
           <p:cNvSpPr txBox="1"/>
           <p:nvPr/>
         </p:nvSpPr>
@@ -16451,7 +18515,7 @@
       </p:sp>
       <p:sp>
         <p:nvSpPr>
-          <p:cNvPr id="25" name="TextBox 24"/>
+          <p:cNvPr id="40" name="TextBox 39"/>
           <p:cNvSpPr txBox="1"/>
           <p:nvPr/>
         </p:nvSpPr>
@@ -16484,7 +18548,7 @@
       </p:sp>
       <p:sp>
         <p:nvSpPr>
-          <p:cNvPr id="26" name="TextBox 25"/>
+          <p:cNvPr id="41" name="TextBox 40"/>
           <p:cNvSpPr txBox="1"/>
           <p:nvPr/>
         </p:nvSpPr>
@@ -17466,8 +19530,8 @@
         </p:nvSpPr>
         <p:spPr>
           <a:xfrm>
-            <a:off x="0" y="2880360"/>
-            <a:ext cx="12191695" cy="73152"/>
+            <a:off x="0" y="0"/>
+            <a:ext cx="146304" cy="6858000"/>
           </a:xfrm>
           <a:prstGeom prst="rect">
             <a:avLst/>
@@ -17509,80 +19573,80 @@
         </p:nvSpPr>
         <p:spPr>
           <a:xfrm>
+            <a:off x="640080" y="384048"/>
+            <a:ext cx="10972800" cy="868680"/>
+          </a:xfrm>
+          <a:prstGeom prst="rect">
+            <a:avLst/>
+          </a:prstGeom>
+          <a:noFill/>
+        </p:spPr>
+        <p:txBody>
+          <a:bodyPr wrap="square" anchor="t"/>
+          <a:lstStyle/>
+          <a:p>
+            <a:pPr algn="l"/>
+            <a:r>
+              <a:rPr sz="3000" b="1" i="0" a:ea="Calibri">
+                <a:solidFill>
+                  <a:srgbClr val="FFFFFF"/>
+                </a:solidFill>
+                <a:latin typeface="Calibri"/>
+              </a:rPr>
+              <a:t>Ions from atoms</a:t>
+            </a:r>
+          </a:p>
+        </p:txBody>
+      </p:sp>
+      <p:sp>
+        <p:nvSpPr>
+          <p:cNvPr id="5" name="TextBox 4"/>
+          <p:cNvSpPr txBox="1"/>
+          <p:nvPr/>
+        </p:nvSpPr>
+        <p:spPr>
+          <a:xfrm>
+            <a:off x="640080" y="1261872"/>
+            <a:ext cx="10972800" cy="502920"/>
+          </a:xfrm>
+          <a:prstGeom prst="rect">
+            <a:avLst/>
+          </a:prstGeom>
+          <a:noFill/>
+        </p:spPr>
+        <p:txBody>
+          <a:bodyPr wrap="square" anchor="t"/>
+          <a:lstStyle/>
+          <a:p>
+            <a:pPr algn="l"/>
+            <a:r>
+              <a:rPr sz="1700" b="0" i="0" a:ea="Calibri">
+                <a:solidFill>
+                  <a:srgbClr val="CCFBF1"/>
+                </a:solidFill>
+                <a:latin typeface="Calibri"/>
+              </a:rPr>
+              <a:t>Electrons move; protons do not</a:t>
+            </a:r>
+          </a:p>
+        </p:txBody>
+      </p:sp>
+      <p:sp>
+        <p:nvSpPr>
+          <p:cNvPr id="6" name="Rounded Rectangle 5"/>
+          <p:cNvSpPr/>
+          <p:nvPr/>
+        </p:nvSpPr>
+        <p:spPr>
+          <a:xfrm>
             <a:off x="640080" y="1965960"/>
-            <a:ext cx="10881360" cy="914400"/>
-          </a:xfrm>
-          <a:prstGeom prst="rect">
-            <a:avLst/>
-          </a:prstGeom>
-          <a:noFill/>
-        </p:spPr>
-        <p:txBody>
-          <a:bodyPr wrap="square" anchor="t"/>
-          <a:lstStyle/>
-          <a:p>
-            <a:pPr algn="l"/>
-            <a:r>
-              <a:rPr sz="3400" b="1" i="0" a:ea="Calibri">
-                <a:solidFill>
-                  <a:srgbClr val="FFFFFF"/>
-                </a:solidFill>
-                <a:latin typeface="Calibri"/>
-              </a:rPr>
-              <a:t>Ions from atoms</a:t>
-            </a:r>
-          </a:p>
-        </p:txBody>
-      </p:sp>
-      <p:sp>
-        <p:nvSpPr>
-          <p:cNvPr id="5" name="TextBox 4"/>
-          <p:cNvSpPr txBox="1"/>
-          <p:nvPr/>
-        </p:nvSpPr>
-        <p:spPr>
-          <a:xfrm>
-            <a:off x="640080" y="3154680"/>
-            <a:ext cx="10881360" cy="822960"/>
-          </a:xfrm>
-          <a:prstGeom prst="rect">
-            <a:avLst/>
-          </a:prstGeom>
-          <a:noFill/>
-        </p:spPr>
-        <p:txBody>
-          <a:bodyPr wrap="square" anchor="t"/>
-          <a:lstStyle/>
-          <a:p>
-            <a:pPr algn="l"/>
-            <a:r>
-              <a:rPr sz="1800" b="0" i="0" a:ea="Calibri">
-                <a:solidFill>
-                  <a:srgbClr val="CCFBF1"/>
-                </a:solidFill>
-                <a:latin typeface="Calibri"/>
-              </a:rPr>
-              <a:t>Electrons move; protons do not</a:t>
-            </a:r>
-          </a:p>
-        </p:txBody>
-      </p:sp>
-      <p:sp>
-        <p:nvSpPr>
-          <p:cNvPr id="6" name="Rectangle 5"/>
-          <p:cNvSpPr/>
-          <p:nvPr/>
-        </p:nvSpPr>
-        <p:spPr>
-          <a:xfrm>
-            <a:off x="0" y="6437376"/>
-            <a:ext cx="12191695" cy="420624"/>
-          </a:xfrm>
-          <a:prstGeom prst="rect">
-            <a:avLst/>
-          </a:prstGeom>
-          <a:solidFill>
-            <a:srgbClr val="004D40"/>
+            <a:ext cx="3520440" cy="3977639"/>
+          </a:xfrm>
+          <a:prstGeom prst="roundRect">
+            <a:avLst/>
+          </a:prstGeom>
+          <a:solidFill>
+            <a:srgbClr val="003D33"/>
           </a:solidFill>
           <a:ln>
             <a:noFill/>
@@ -17610,9 +19674,483 @@
           </a:p>
         </p:txBody>
       </p:sp>
+      <p:sp>
+        <p:nvSpPr>
+          <p:cNvPr id="7" name="Rectangle 6"/>
+          <p:cNvSpPr/>
+          <p:nvPr/>
+        </p:nvSpPr>
+        <p:spPr>
+          <a:xfrm>
+            <a:off x="640080" y="1965960"/>
+            <a:ext cx="3520440" cy="109728"/>
+          </a:xfrm>
+          <a:prstGeom prst="rect">
+            <a:avLst/>
+          </a:prstGeom>
+          <a:solidFill>
+            <a:srgbClr val="009688"/>
+          </a:solidFill>
+          <a:ln>
+            <a:noFill/>
+          </a:ln>
+        </p:spPr>
+        <p:style>
+          <a:lnRef idx="1">
+            <a:schemeClr val="accent1"/>
+          </a:lnRef>
+          <a:fillRef idx="3">
+            <a:schemeClr val="accent1"/>
+          </a:fillRef>
+          <a:effectRef idx="2">
+            <a:schemeClr val="accent1"/>
+          </a:effectRef>
+          <a:fontRef idx="minor">
+            <a:schemeClr val="lt1"/>
+          </a:fontRef>
+        </p:style>
+        <p:txBody>
+          <a:bodyPr rtlCol="0" anchor="ctr"/>
+          <a:lstStyle/>
+          <a:p>
+            <a:pPr algn="ctr"/>
+          </a:p>
+        </p:txBody>
+      </p:sp>
+      <p:sp>
+        <p:nvSpPr>
+          <p:cNvPr id="8" name="TextBox 7"/>
+          <p:cNvSpPr txBox="1"/>
+          <p:nvPr/>
+        </p:nvSpPr>
+        <p:spPr>
+          <a:xfrm>
+            <a:off x="841248" y="2212848"/>
+            <a:ext cx="3108960" cy="457200"/>
+          </a:xfrm>
+          <a:prstGeom prst="rect">
+            <a:avLst/>
+          </a:prstGeom>
+          <a:noFill/>
+        </p:spPr>
+        <p:txBody>
+          <a:bodyPr wrap="square" anchor="t"/>
+          <a:lstStyle/>
+          <a:p>
+            <a:pPr algn="l"/>
+            <a:r>
+              <a:rPr sz="1600" b="1" i="0" a:ea="Calibri">
+                <a:solidFill>
+                  <a:srgbClr val="CCFBF1"/>
+                </a:solidFill>
+                <a:latin typeface="Calibri"/>
+              </a:rPr>
+              <a:t>1   Look for</a:t>
+            </a:r>
+          </a:p>
+        </p:txBody>
+      </p:sp>
+      <p:sp>
+        <p:nvSpPr>
+          <p:cNvPr id="9" name="TextBox 8"/>
+          <p:cNvSpPr txBox="1"/>
+          <p:nvPr/>
+        </p:nvSpPr>
+        <p:spPr>
+          <a:xfrm>
+            <a:off x="841248" y="2788920"/>
+            <a:ext cx="3108960" cy="2880360"/>
+          </a:xfrm>
+          <a:prstGeom prst="rect">
+            <a:avLst/>
+          </a:prstGeom>
+          <a:noFill/>
+        </p:spPr>
+        <p:txBody>
+          <a:bodyPr wrap="square" anchor="t"/>
+          <a:lstStyle/>
+          <a:p>
+            <a:pPr algn="l"/>
+            <a:r>
+              <a:rPr sz="1600" b="0" i="0" a:ea="Calibri">
+                <a:solidFill>
+                  <a:srgbClr val="FFFFFF"/>
+                </a:solidFill>
+                <a:latin typeface="Calibri"/>
+              </a:rPr>
+              <a:t>Charge = protons − electrons. Na</a:t>
+            </a:r>
+            <a:r>
+              <a:rPr sz="1600" b="0" i="0" a:ea="Calibri" baseline="30000">
+                <a:solidFill>
+                  <a:srgbClr val="FFFFFF"/>
+                </a:solidFill>
+                <a:latin typeface="Calibri"/>
+              </a:rPr>
+              <a:t>+</a:t>
+            </a:r>
+            <a:r>
+              <a:rPr sz="1600" b="0" i="0" a:ea="Calibri">
+                <a:solidFill>
+                  <a:srgbClr val="FFFFFF"/>
+                </a:solidFill>
+                <a:latin typeface="Calibri"/>
+              </a:rPr>
+              <a:t> has 11 p and 10 e.</a:t>
+            </a:r>
+          </a:p>
+        </p:txBody>
+      </p:sp>
+      <p:sp>
+        <p:nvSpPr>
+          <p:cNvPr id="10" name="Rounded Rectangle 9"/>
+          <p:cNvSpPr/>
+          <p:nvPr/>
+        </p:nvSpPr>
+        <p:spPr>
+          <a:xfrm>
+            <a:off x="4343400" y="1965960"/>
+            <a:ext cx="3520440" cy="3977639"/>
+          </a:xfrm>
+          <a:prstGeom prst="roundRect">
+            <a:avLst/>
+          </a:prstGeom>
+          <a:solidFill>
+            <a:srgbClr val="003D33"/>
+          </a:solidFill>
+          <a:ln>
+            <a:noFill/>
+          </a:ln>
+        </p:spPr>
+        <p:style>
+          <a:lnRef idx="1">
+            <a:schemeClr val="accent1"/>
+          </a:lnRef>
+          <a:fillRef idx="3">
+            <a:schemeClr val="accent1"/>
+          </a:fillRef>
+          <a:effectRef idx="2">
+            <a:schemeClr val="accent1"/>
+          </a:effectRef>
+          <a:fontRef idx="minor">
+            <a:schemeClr val="lt1"/>
+          </a:fontRef>
+        </p:style>
+        <p:txBody>
+          <a:bodyPr rtlCol="0" anchor="ctr"/>
+          <a:lstStyle/>
+          <a:p>
+            <a:pPr algn="ctr"/>
+          </a:p>
+        </p:txBody>
+      </p:sp>
+      <p:sp>
+        <p:nvSpPr>
+          <p:cNvPr id="11" name="Rectangle 10"/>
+          <p:cNvSpPr/>
+          <p:nvPr/>
+        </p:nvSpPr>
+        <p:spPr>
+          <a:xfrm>
+            <a:off x="4343400" y="1965960"/>
+            <a:ext cx="3520440" cy="109728"/>
+          </a:xfrm>
+          <a:prstGeom prst="rect">
+            <a:avLst/>
+          </a:prstGeom>
+          <a:solidFill>
+            <a:srgbClr val="99F6E4"/>
+          </a:solidFill>
+          <a:ln>
+            <a:noFill/>
+          </a:ln>
+        </p:spPr>
+        <p:style>
+          <a:lnRef idx="1">
+            <a:schemeClr val="accent1"/>
+          </a:lnRef>
+          <a:fillRef idx="3">
+            <a:schemeClr val="accent1"/>
+          </a:fillRef>
+          <a:effectRef idx="2">
+            <a:schemeClr val="accent1"/>
+          </a:effectRef>
+          <a:fontRef idx="minor">
+            <a:schemeClr val="lt1"/>
+          </a:fontRef>
+        </p:style>
+        <p:txBody>
+          <a:bodyPr rtlCol="0" anchor="ctr"/>
+          <a:lstStyle/>
+          <a:p>
+            <a:pPr algn="ctr"/>
+          </a:p>
+        </p:txBody>
+      </p:sp>
+      <p:sp>
+        <p:nvSpPr>
+          <p:cNvPr id="12" name="TextBox 11"/>
+          <p:cNvSpPr txBox="1"/>
+          <p:nvPr/>
+        </p:nvSpPr>
+        <p:spPr>
+          <a:xfrm>
+            <a:off x="4544568" y="2212848"/>
+            <a:ext cx="3108960" cy="457200"/>
+          </a:xfrm>
+          <a:prstGeom prst="rect">
+            <a:avLst/>
+          </a:prstGeom>
+          <a:noFill/>
+        </p:spPr>
+        <p:txBody>
+          <a:bodyPr wrap="square" anchor="t"/>
+          <a:lstStyle/>
+          <a:p>
+            <a:pPr algn="l"/>
+            <a:r>
+              <a:rPr sz="1600" b="1" i="0" a:ea="Calibri">
+                <a:solidFill>
+                  <a:srgbClr val="CCFBF1"/>
+                </a:solidFill>
+                <a:latin typeface="Calibri"/>
+              </a:rPr>
+              <a:t>2   Say in full</a:t>
+            </a:r>
+          </a:p>
+        </p:txBody>
+      </p:sp>
+      <p:sp>
+        <p:nvSpPr>
+          <p:cNvPr id="13" name="TextBox 12"/>
+          <p:cNvSpPr txBox="1"/>
+          <p:nvPr/>
+        </p:nvSpPr>
+        <p:spPr>
+          <a:xfrm>
+            <a:off x="4544568" y="2788920"/>
+            <a:ext cx="3108960" cy="2880360"/>
+          </a:xfrm>
+          <a:prstGeom prst="rect">
+            <a:avLst/>
+          </a:prstGeom>
+          <a:noFill/>
+        </p:spPr>
+        <p:txBody>
+          <a:bodyPr wrap="square" anchor="t"/>
+          <a:lstStyle/>
+          <a:p>
+            <a:pPr algn="l"/>
+            <a:r>
+              <a:rPr sz="1600" b="0" i="0" a:ea="Calibri">
+                <a:solidFill>
+                  <a:srgbClr val="FFFFFF"/>
+                </a:solidFill>
+                <a:latin typeface="Calibri"/>
+              </a:rPr>
+              <a:t>A cation has lost electrons. An anion has gained electrons.</a:t>
+            </a:r>
+          </a:p>
+        </p:txBody>
+      </p:sp>
+      <p:sp>
+        <p:nvSpPr>
+          <p:cNvPr id="14" name="Rounded Rectangle 13"/>
+          <p:cNvSpPr/>
+          <p:nvPr/>
+        </p:nvSpPr>
+        <p:spPr>
+          <a:xfrm>
+            <a:off x="8046720" y="1965960"/>
+            <a:ext cx="3520440" cy="3977639"/>
+          </a:xfrm>
+          <a:prstGeom prst="roundRect">
+            <a:avLst/>
+          </a:prstGeom>
+          <a:solidFill>
+            <a:srgbClr val="003D33"/>
+          </a:solidFill>
+          <a:ln>
+            <a:noFill/>
+          </a:ln>
+        </p:spPr>
+        <p:style>
+          <a:lnRef idx="1">
+            <a:schemeClr val="accent1"/>
+          </a:lnRef>
+          <a:fillRef idx="3">
+            <a:schemeClr val="accent1"/>
+          </a:fillRef>
+          <a:effectRef idx="2">
+            <a:schemeClr val="accent1"/>
+          </a:effectRef>
+          <a:fontRef idx="minor">
+            <a:schemeClr val="lt1"/>
+          </a:fontRef>
+        </p:style>
+        <p:txBody>
+          <a:bodyPr rtlCol="0" anchor="ctr"/>
+          <a:lstStyle/>
+          <a:p>
+            <a:pPr algn="ctr"/>
+          </a:p>
+        </p:txBody>
+      </p:sp>
+      <p:sp>
+        <p:nvSpPr>
+          <p:cNvPr id="15" name="Rectangle 14"/>
+          <p:cNvSpPr/>
+          <p:nvPr/>
+        </p:nvSpPr>
+        <p:spPr>
+          <a:xfrm>
+            <a:off x="8046720" y="1965960"/>
+            <a:ext cx="3520440" cy="109728"/>
+          </a:xfrm>
+          <a:prstGeom prst="rect">
+            <a:avLst/>
+          </a:prstGeom>
+          <a:solidFill>
+            <a:srgbClr val="5EEAD4"/>
+          </a:solidFill>
+          <a:ln>
+            <a:noFill/>
+          </a:ln>
+        </p:spPr>
+        <p:style>
+          <a:lnRef idx="1">
+            <a:schemeClr val="accent1"/>
+          </a:lnRef>
+          <a:fillRef idx="3">
+            <a:schemeClr val="accent1"/>
+          </a:fillRef>
+          <a:effectRef idx="2">
+            <a:schemeClr val="accent1"/>
+          </a:effectRef>
+          <a:fontRef idx="minor">
+            <a:schemeClr val="lt1"/>
+          </a:fontRef>
+        </p:style>
+        <p:txBody>
+          <a:bodyPr rtlCol="0" anchor="ctr"/>
+          <a:lstStyle/>
+          <a:p>
+            <a:pPr algn="ctr"/>
+          </a:p>
+        </p:txBody>
+      </p:sp>
+      <p:sp>
+        <p:nvSpPr>
+          <p:cNvPr id="16" name="TextBox 15"/>
+          <p:cNvSpPr txBox="1"/>
+          <p:nvPr/>
+        </p:nvSpPr>
+        <p:spPr>
+          <a:xfrm>
+            <a:off x="8247888" y="2212848"/>
+            <a:ext cx="3108960" cy="457200"/>
+          </a:xfrm>
+          <a:prstGeom prst="rect">
+            <a:avLst/>
+          </a:prstGeom>
+          <a:noFill/>
+        </p:spPr>
+        <p:txBody>
+          <a:bodyPr wrap="square" anchor="t"/>
+          <a:lstStyle/>
+          <a:p>
+            <a:pPr algn="l"/>
+            <a:r>
+              <a:rPr sz="1600" b="1" i="0" a:ea="Calibri">
+                <a:solidFill>
+                  <a:srgbClr val="CCFBF1"/>
+                </a:solidFill>
+                <a:latin typeface="Calibri"/>
+              </a:rPr>
+              <a:t>3   Level 3 move</a:t>
+            </a:r>
+          </a:p>
+        </p:txBody>
+      </p:sp>
+      <p:sp>
+        <p:nvSpPr>
+          <p:cNvPr id="17" name="TextBox 16"/>
+          <p:cNvSpPr txBox="1"/>
+          <p:nvPr/>
+        </p:nvSpPr>
+        <p:spPr>
+          <a:xfrm>
+            <a:off x="8247888" y="2788920"/>
+            <a:ext cx="3108960" cy="2880360"/>
+          </a:xfrm>
+          <a:prstGeom prst="rect">
+            <a:avLst/>
+          </a:prstGeom>
+          <a:noFill/>
+        </p:spPr>
+        <p:txBody>
+          <a:bodyPr wrap="square" anchor="t"/>
+          <a:lstStyle/>
+          <a:p>
+            <a:pPr algn="l"/>
+            <a:r>
+              <a:rPr sz="1600" b="0" i="0" a:ea="Calibri">
+                <a:solidFill>
+                  <a:srgbClr val="FFFFFF"/>
+                </a:solidFill>
+                <a:latin typeface="Calibri"/>
+              </a:rPr>
+              <a:t>Z is unchanged, so it is still the same element. Link this to later bonding.</a:t>
+            </a:r>
+          </a:p>
+        </p:txBody>
+      </p:sp>
+      <p:sp>
+        <p:nvSpPr>
+          <p:cNvPr id="18" name="Rectangle 17"/>
+          <p:cNvSpPr/>
+          <p:nvPr/>
+        </p:nvSpPr>
+        <p:spPr>
+          <a:xfrm>
+            <a:off x="0" y="6437376"/>
+            <a:ext cx="12191695" cy="420624"/>
+          </a:xfrm>
+          <a:prstGeom prst="rect">
+            <a:avLst/>
+          </a:prstGeom>
+          <a:solidFill>
+            <a:srgbClr val="004D40"/>
+          </a:solidFill>
+          <a:ln>
+            <a:noFill/>
+          </a:ln>
+        </p:spPr>
+        <p:style>
+          <a:lnRef idx="1">
+            <a:schemeClr val="accent1"/>
+          </a:lnRef>
+          <a:fillRef idx="3">
+            <a:schemeClr val="accent1"/>
+          </a:fillRef>
+          <a:effectRef idx="2">
+            <a:schemeClr val="accent1"/>
+          </a:effectRef>
+          <a:fontRef idx="minor">
+            <a:schemeClr val="lt1"/>
+          </a:fontRef>
+        </p:style>
+        <p:txBody>
+          <a:bodyPr rtlCol="0" anchor="ctr"/>
+          <a:lstStyle/>
+          <a:p>
+            <a:pPr algn="ctr"/>
+          </a:p>
+        </p:txBody>
+      </p:sp>
       <p:pic>
         <p:nvPicPr>
-          <p:cNvPr id="7" name="Picture 6" descr="jdscience-footer-logo.png"/>
+          <p:cNvPr id="19" name="Picture 18" descr="jdscience-footer-logo.png"/>
           <p:cNvPicPr>
             <a:picLocks noChangeAspect="1"/>
           </p:cNvPicPr>
@@ -17636,7 +20174,7 @@
       </p:pic>
       <p:sp>
         <p:nvSpPr>
-          <p:cNvPr id="8" name="TextBox 7"/>
+          <p:cNvPr id="20" name="TextBox 19"/>
           <p:cNvSpPr txBox="1"/>
           <p:nvPr/>
         </p:nvSpPr>
@@ -17669,7 +20207,7 @@
       </p:sp>
       <p:sp>
         <p:nvSpPr>
-          <p:cNvPr id="9" name="TextBox 8"/>
+          <p:cNvPr id="21" name="TextBox 20"/>
           <p:cNvSpPr txBox="1"/>
           <p:nvPr/>
         </p:nvSpPr>
@@ -17702,7 +20240,7 @@
       </p:sp>
       <p:sp>
         <p:nvSpPr>
-          <p:cNvPr id="10" name="TextBox 9"/>
+          <p:cNvPr id="22" name="TextBox 21"/>
           <p:cNvSpPr txBox="1"/>
           <p:nvPr/>
         </p:nvSpPr>
@@ -17945,8 +20483,8 @@
         </p:nvSpPr>
         <p:spPr>
           <a:xfrm>
-            <a:off x="6931152" y="1069848"/>
-            <a:ext cx="4617720" cy="685800"/>
+            <a:off x="6931152" y="1051560"/>
+            <a:ext cx="4617720" cy="722376"/>
           </a:xfrm>
           <a:prstGeom prst="rect">
             <a:avLst/>
@@ -18064,8 +20602,8 @@
         </p:nvSpPr>
         <p:spPr>
           <a:xfrm>
-            <a:off x="6931152" y="2029968"/>
-            <a:ext cx="4617720" cy="685800"/>
+            <a:off x="6931152" y="2011680"/>
+            <a:ext cx="4617720" cy="722376"/>
           </a:xfrm>
           <a:prstGeom prst="rect">
             <a:avLst/>
@@ -18183,8 +20721,8 @@
         </p:nvSpPr>
         <p:spPr>
           <a:xfrm>
-            <a:off x="6931152" y="2990088"/>
-            <a:ext cx="4617720" cy="685800"/>
+            <a:off x="6931152" y="2971800"/>
+            <a:ext cx="4617720" cy="722376"/>
           </a:xfrm>
           <a:prstGeom prst="rect">
             <a:avLst/>
@@ -18302,8 +20840,8 @@
         </p:nvSpPr>
         <p:spPr>
           <a:xfrm>
-            <a:off x="6931152" y="3950208"/>
-            <a:ext cx="4617720" cy="685800"/>
+            <a:off x="6931152" y="3931920"/>
+            <a:ext cx="4617720" cy="722376"/>
           </a:xfrm>
           <a:prstGeom prst="rect">
             <a:avLst/>
@@ -18421,8 +20959,8 @@
         </p:nvSpPr>
         <p:spPr>
           <a:xfrm>
-            <a:off x="6931152" y="4910328"/>
-            <a:ext cx="4617720" cy="685800"/>
+            <a:off x="6931152" y="4892040"/>
+            <a:ext cx="4617720" cy="722376"/>
           </a:xfrm>
           <a:prstGeom prst="rect">
             <a:avLst/>
@@ -25610,7 +28148,7 @@
         <p:spPr>
           <a:xfrm>
             <a:off x="658368" y="2011680"/>
-            <a:ext cx="3249168" cy="3383280"/>
+            <a:ext cx="3249168" cy="1417320"/>
           </a:xfrm>
           <a:prstGeom prst="rect">
             <a:avLst/>
@@ -25672,20 +28210,53 @@
       </p:sp>
       <p:sp>
         <p:nvSpPr>
-          <p:cNvPr id="11" name="Rounded Rectangle 10"/>
+          <p:cNvPr id="11" name="TextBox 10"/>
+          <p:cNvSpPr txBox="1"/>
+          <p:nvPr/>
+        </p:nvSpPr>
+        <p:spPr>
+          <a:xfrm>
+            <a:off x="658368" y="3520440"/>
+            <a:ext cx="3249168" cy="256032"/>
+          </a:xfrm>
+          <a:prstGeom prst="rect">
+            <a:avLst/>
+          </a:prstGeom>
+          <a:noFill/>
+        </p:spPr>
+        <p:txBody>
+          <a:bodyPr wrap="square" anchor="t"/>
+          <a:lstStyle/>
+          <a:p>
+            <a:pPr algn="l"/>
+            <a:r>
+              <a:rPr sz="1100" b="1" i="0" a:ea="Calibri">
+                <a:solidFill>
+                  <a:srgbClr val="475569"/>
+                </a:solidFill>
+                <a:latin typeface="Calibri"/>
+              </a:rPr>
+              <a:t>Write a full-sentence answer</a:t>
+            </a:r>
+          </a:p>
+        </p:txBody>
+      </p:sp>
+      <p:sp>
+        <p:nvSpPr>
+          <p:cNvPr id="12" name="Rectangle 11"/>
           <p:cNvSpPr/>
           <p:nvPr/>
         </p:nvSpPr>
         <p:spPr>
           <a:xfrm>
-            <a:off x="4255008" y="1188720"/>
-            <a:ext cx="3651504" cy="4434840"/>
-          </a:xfrm>
-          <a:prstGeom prst="roundRect">
-            <a:avLst/>
-          </a:prstGeom>
-          <a:solidFill>
-            <a:srgbClr val="FFFFFF"/>
+            <a:off x="658368" y="3858768"/>
+            <a:ext cx="3249168" cy="15875"/>
+          </a:xfrm>
+          <a:prstGeom prst="rect">
+            <a:avLst/>
+          </a:prstGeom>
+          <a:solidFill>
+            <a:srgbClr val="E2E8F0"/>
           </a:solidFill>
           <a:ln>
             <a:noFill/>
@@ -25715,20 +28286,20 @@
       </p:sp>
       <p:sp>
         <p:nvSpPr>
-          <p:cNvPr id="12" name="Rounded Rectangle 11"/>
+          <p:cNvPr id="13" name="Rectangle 12"/>
           <p:cNvSpPr/>
           <p:nvPr/>
         </p:nvSpPr>
         <p:spPr>
           <a:xfrm>
-            <a:off x="4437888" y="1371600"/>
-            <a:ext cx="457200" cy="457200"/>
-          </a:xfrm>
-          <a:prstGeom prst="roundRect">
-            <a:avLst/>
-          </a:prstGeom>
-          <a:solidFill>
-            <a:srgbClr val="9F1239"/>
+            <a:off x="658368" y="4151376"/>
+            <a:ext cx="3249168" cy="15875"/>
+          </a:xfrm>
+          <a:prstGeom prst="rect">
+            <a:avLst/>
+          </a:prstGeom>
+          <a:solidFill>
+            <a:srgbClr val="E2E8F0"/>
           </a:solidFill>
           <a:ln>
             <a:noFill/>
@@ -25758,173 +28329,20 @@
       </p:sp>
       <p:sp>
         <p:nvSpPr>
-          <p:cNvPr id="13" name="TextBox 12"/>
-          <p:cNvSpPr txBox="1"/>
-          <p:nvPr/>
-        </p:nvSpPr>
-        <p:spPr>
-          <a:xfrm>
-            <a:off x="4437888" y="1426464"/>
-            <a:ext cx="457200" cy="365760"/>
-          </a:xfrm>
-          <a:prstGeom prst="rect">
-            <a:avLst/>
-          </a:prstGeom>
-          <a:noFill/>
-        </p:spPr>
-        <p:txBody>
-          <a:bodyPr wrap="square" anchor="t"/>
-          <a:lstStyle/>
-          <a:p>
-            <a:pPr algn="ctr"/>
-            <a:r>
-              <a:rPr sz="1600" b="1" i="0" a:ea="Calibri">
-                <a:solidFill>
-                  <a:srgbClr val="FFFFFF"/>
-                </a:solidFill>
-                <a:latin typeface="Calibri"/>
-              </a:rPr>
-              <a:t>2</a:t>
-            </a:r>
-          </a:p>
-        </p:txBody>
-      </p:sp>
-      <p:sp>
-        <p:nvSpPr>
-          <p:cNvPr id="14" name="TextBox 13"/>
-          <p:cNvSpPr txBox="1"/>
-          <p:nvPr/>
-        </p:nvSpPr>
-        <p:spPr>
-          <a:xfrm>
-            <a:off x="4986528" y="1426464"/>
-            <a:ext cx="2645664" cy="365760"/>
-          </a:xfrm>
-          <a:prstGeom prst="rect">
-            <a:avLst/>
-          </a:prstGeom>
-          <a:noFill/>
-        </p:spPr>
-        <p:txBody>
-          <a:bodyPr wrap="square" anchor="t"/>
-          <a:lstStyle/>
-          <a:p>
-            <a:pPr algn="l"/>
-            <a:r>
-              <a:rPr sz="1300" b="1" i="0" a:ea="Calibri">
-                <a:solidFill>
-                  <a:srgbClr val="9F1239"/>
-                </a:solidFill>
-                <a:latin typeface="Calibri"/>
-              </a:rPr>
-              <a:t>2 marks</a:t>
-            </a:r>
-          </a:p>
-        </p:txBody>
-      </p:sp>
-      <p:sp>
-        <p:nvSpPr>
-          <p:cNvPr id="15" name="TextBox 14"/>
-          <p:cNvSpPr txBox="1"/>
-          <p:nvPr/>
-        </p:nvSpPr>
-        <p:spPr>
-          <a:xfrm>
-            <a:off x="4456176" y="2011680"/>
-            <a:ext cx="3249168" cy="3383280"/>
-          </a:xfrm>
-          <a:prstGeom prst="rect">
-            <a:avLst/>
-          </a:prstGeom>
-          <a:noFill/>
-        </p:spPr>
-        <p:txBody>
-          <a:bodyPr wrap="square" anchor="t"/>
-          <a:lstStyle/>
-          <a:p>
-            <a:pPr algn="l"/>
-            <a:r>
-              <a:rPr sz="1600" b="0" i="0" a:ea="Calibri">
-                <a:solidFill>
-                  <a:srgbClr val="0F172A"/>
-                </a:solidFill>
-                <a:latin typeface="Calibri"/>
-              </a:rPr>
-              <a:t>An element has two isotopes, </a:t>
-            </a:r>
-            <a:r>
-              <a:rPr sz="1600" b="0" i="0" a:ea="Calibri" baseline="30000">
-                <a:solidFill>
-                  <a:srgbClr val="0F172A"/>
-                </a:solidFill>
-                <a:latin typeface="Calibri"/>
-              </a:rPr>
-              <a:t>69</a:t>
-            </a:r>
-            <a:r>
-              <a:rPr sz="1600" b="0" i="0" a:ea="Calibri">
-                <a:solidFill>
-                  <a:srgbClr val="0F172A"/>
-                </a:solidFill>
-                <a:latin typeface="Calibri"/>
-              </a:rPr>
-              <a:t>X (60.0%) and </a:t>
-            </a:r>
-            <a:r>
-              <a:rPr sz="1600" b="0" i="0" a:ea="Calibri" baseline="30000">
-                <a:solidFill>
-                  <a:srgbClr val="0F172A"/>
-                </a:solidFill>
-                <a:latin typeface="Calibri"/>
-              </a:rPr>
-              <a:t>71</a:t>
-            </a:r>
-            <a:r>
-              <a:rPr sz="1600" b="0" i="0" a:ea="Calibri">
-                <a:solidFill>
-                  <a:srgbClr val="0F172A"/>
-                </a:solidFill>
-                <a:latin typeface="Calibri"/>
-              </a:rPr>
-              <a:t>X (40.0%). Calculate A</a:t>
-            </a:r>
-            <a:r>
-              <a:rPr sz="1600" b="0" i="0" a:ea="Calibri" baseline="-25000">
-                <a:solidFill>
-                  <a:srgbClr val="0F172A"/>
-                </a:solidFill>
-                <a:latin typeface="Calibri"/>
-              </a:rPr>
-              <a:t>r</a:t>
-            </a:r>
-            <a:r>
-              <a:rPr sz="1600" b="0" i="0" a:ea="Calibri">
-                <a:solidFill>
-                  <a:srgbClr val="0F172A"/>
-                </a:solidFill>
-                <a:latin typeface="Calibri"/>
-              </a:rPr>
-              <a:t>.</a:t>
-            </a:r>
-          </a:p>
-        </p:txBody>
-      </p:sp>
-      <p:sp>
-        <p:nvSpPr>
-          <p:cNvPr id="16" name="Rounded Rectangle 15"/>
+          <p:cNvPr id="14" name="Rectangle 13"/>
           <p:cNvSpPr/>
           <p:nvPr/>
         </p:nvSpPr>
         <p:spPr>
           <a:xfrm>
-            <a:off x="8052816" y="1188720"/>
-            <a:ext cx="3651504" cy="4434840"/>
-          </a:xfrm>
-          <a:prstGeom prst="roundRect">
-            <a:avLst/>
-          </a:prstGeom>
-          <a:solidFill>
-            <a:srgbClr val="FFFFFF"/>
+            <a:off x="658368" y="4443984"/>
+            <a:ext cx="3249168" cy="15875"/>
+          </a:xfrm>
+          <a:prstGeom prst="rect">
+            <a:avLst/>
+          </a:prstGeom>
+          <a:solidFill>
+            <a:srgbClr val="E2E8F0"/>
           </a:solidFill>
           <a:ln>
             <a:noFill/>
@@ -25954,20 +28372,20 @@
       </p:sp>
       <p:sp>
         <p:nvSpPr>
-          <p:cNvPr id="17" name="Rounded Rectangle 16"/>
+          <p:cNvPr id="15" name="Rectangle 14"/>
           <p:cNvSpPr/>
           <p:nvPr/>
         </p:nvSpPr>
         <p:spPr>
           <a:xfrm>
-            <a:off x="8235696" y="1371600"/>
-            <a:ext cx="457200" cy="457200"/>
-          </a:xfrm>
-          <a:prstGeom prst="roundRect">
-            <a:avLst/>
-          </a:prstGeom>
-          <a:solidFill>
-            <a:srgbClr val="9F1239"/>
+            <a:off x="658368" y="4736592"/>
+            <a:ext cx="3249168" cy="15875"/>
+          </a:xfrm>
+          <a:prstGeom prst="rect">
+            <a:avLst/>
+          </a:prstGeom>
+          <a:solidFill>
+            <a:srgbClr val="E2E8F0"/>
           </a:solidFill>
           <a:ln>
             <a:noFill/>
@@ -25997,152 +28415,20 @@
       </p:sp>
       <p:sp>
         <p:nvSpPr>
-          <p:cNvPr id="18" name="TextBox 17"/>
-          <p:cNvSpPr txBox="1"/>
-          <p:nvPr/>
-        </p:nvSpPr>
-        <p:spPr>
-          <a:xfrm>
-            <a:off x="8235696" y="1426464"/>
-            <a:ext cx="457200" cy="365760"/>
-          </a:xfrm>
-          <a:prstGeom prst="rect">
-            <a:avLst/>
-          </a:prstGeom>
-          <a:noFill/>
-        </p:spPr>
-        <p:txBody>
-          <a:bodyPr wrap="square" anchor="t"/>
-          <a:lstStyle/>
-          <a:p>
-            <a:pPr algn="ctr"/>
-            <a:r>
-              <a:rPr sz="1600" b="1" i="0" a:ea="Calibri">
-                <a:solidFill>
-                  <a:srgbClr val="FFFFFF"/>
-                </a:solidFill>
-                <a:latin typeface="Calibri"/>
-              </a:rPr>
-              <a:t>3</a:t>
-            </a:r>
-          </a:p>
-        </p:txBody>
-      </p:sp>
-      <p:sp>
-        <p:nvSpPr>
-          <p:cNvPr id="19" name="TextBox 18"/>
-          <p:cNvSpPr txBox="1"/>
-          <p:nvPr/>
-        </p:nvSpPr>
-        <p:spPr>
-          <a:xfrm>
-            <a:off x="8784336" y="1426464"/>
-            <a:ext cx="2645664" cy="365760"/>
-          </a:xfrm>
-          <a:prstGeom prst="rect">
-            <a:avLst/>
-          </a:prstGeom>
-          <a:noFill/>
-        </p:spPr>
-        <p:txBody>
-          <a:bodyPr wrap="square" anchor="t"/>
-          <a:lstStyle/>
-          <a:p>
-            <a:pPr algn="l"/>
-            <a:r>
-              <a:rPr sz="1300" b="1" i="0" a:ea="Calibri">
-                <a:solidFill>
-                  <a:srgbClr val="9F1239"/>
-                </a:solidFill>
-                <a:latin typeface="Calibri"/>
-              </a:rPr>
-              <a:t>2 marks</a:t>
-            </a:r>
-          </a:p>
-        </p:txBody>
-      </p:sp>
-      <p:sp>
-        <p:nvSpPr>
-          <p:cNvPr id="20" name="TextBox 19"/>
-          <p:cNvSpPr txBox="1"/>
-          <p:nvPr/>
-        </p:nvSpPr>
-        <p:spPr>
-          <a:xfrm>
-            <a:off x="8253984" y="2011680"/>
-            <a:ext cx="3249168" cy="3383280"/>
-          </a:xfrm>
-          <a:prstGeom prst="rect">
-            <a:avLst/>
-          </a:prstGeom>
-          <a:noFill/>
-        </p:spPr>
-        <p:txBody>
-          <a:bodyPr wrap="square" anchor="t"/>
-          <a:lstStyle/>
-          <a:p>
-            <a:pPr algn="l"/>
-            <a:r>
-              <a:rPr sz="1600" b="0" i="0" a:ea="Calibri">
-                <a:solidFill>
-                  <a:srgbClr val="0F172A"/>
-                </a:solidFill>
-                <a:latin typeface="Calibri"/>
-              </a:rPr>
-              <a:t>Explain why atoms are electrically neutral even though they contain charged particles.</a:t>
-            </a:r>
-          </a:p>
-        </p:txBody>
-      </p:sp>
-      <p:sp>
-        <p:nvSpPr>
-          <p:cNvPr id="21" name="TextBox 20"/>
-          <p:cNvSpPr txBox="1"/>
-          <p:nvPr/>
-        </p:nvSpPr>
-        <p:spPr>
-          <a:xfrm>
-            <a:off x="457200" y="5742432"/>
-            <a:ext cx="11247120" cy="274320"/>
-          </a:xfrm>
-          <a:prstGeom prst="rect">
-            <a:avLst/>
-          </a:prstGeom>
-          <a:noFill/>
-        </p:spPr>
-        <p:txBody>
-          <a:bodyPr wrap="square" anchor="t"/>
-          <a:lstStyle/>
-          <a:p>
-            <a:pPr algn="l"/>
-            <a:r>
-              <a:rPr sz="1300" b="1" i="0" a:ea="Calibri">
-                <a:solidFill>
-                  <a:srgbClr val="9F1239"/>
-                </a:solidFill>
-                <a:latin typeface="Calibri"/>
-              </a:rPr>
-              <a:t>Think first — answers are on the next slide.</a:t>
-            </a:r>
-          </a:p>
-        </p:txBody>
-      </p:sp>
-      <p:sp>
-        <p:nvSpPr>
-          <p:cNvPr id="22" name="Rectangle 21"/>
+          <p:cNvPr id="16" name="Rounded Rectangle 15"/>
           <p:cNvSpPr/>
           <p:nvPr/>
         </p:nvSpPr>
         <p:spPr>
           <a:xfrm>
-            <a:off x="0" y="6437376"/>
-            <a:ext cx="12191695" cy="420624"/>
-          </a:xfrm>
-          <a:prstGeom prst="rect">
-            <a:avLst/>
-          </a:prstGeom>
-          <a:solidFill>
-            <a:srgbClr val="004D40"/>
+            <a:off x="4255008" y="1188720"/>
+            <a:ext cx="3651504" cy="4434840"/>
+          </a:xfrm>
+          <a:prstGeom prst="roundRect">
+            <a:avLst/>
+          </a:prstGeom>
+          <a:solidFill>
+            <a:srgbClr val="FFFFFF"/>
           </a:solidFill>
           <a:ln>
             <a:noFill/>
@@ -26170,9 +28456,876 @@
           </a:p>
         </p:txBody>
       </p:sp>
+      <p:sp>
+        <p:nvSpPr>
+          <p:cNvPr id="17" name="Rounded Rectangle 16"/>
+          <p:cNvSpPr/>
+          <p:nvPr/>
+        </p:nvSpPr>
+        <p:spPr>
+          <a:xfrm>
+            <a:off x="4437888" y="1371600"/>
+            <a:ext cx="457200" cy="457200"/>
+          </a:xfrm>
+          <a:prstGeom prst="roundRect">
+            <a:avLst/>
+          </a:prstGeom>
+          <a:solidFill>
+            <a:srgbClr val="9F1239"/>
+          </a:solidFill>
+          <a:ln>
+            <a:noFill/>
+          </a:ln>
+        </p:spPr>
+        <p:style>
+          <a:lnRef idx="1">
+            <a:schemeClr val="accent1"/>
+          </a:lnRef>
+          <a:fillRef idx="3">
+            <a:schemeClr val="accent1"/>
+          </a:fillRef>
+          <a:effectRef idx="2">
+            <a:schemeClr val="accent1"/>
+          </a:effectRef>
+          <a:fontRef idx="minor">
+            <a:schemeClr val="lt1"/>
+          </a:fontRef>
+        </p:style>
+        <p:txBody>
+          <a:bodyPr rtlCol="0" anchor="ctr"/>
+          <a:lstStyle/>
+          <a:p>
+            <a:pPr algn="ctr"/>
+          </a:p>
+        </p:txBody>
+      </p:sp>
+      <p:sp>
+        <p:nvSpPr>
+          <p:cNvPr id="18" name="TextBox 17"/>
+          <p:cNvSpPr txBox="1"/>
+          <p:nvPr/>
+        </p:nvSpPr>
+        <p:spPr>
+          <a:xfrm>
+            <a:off x="4437888" y="1426464"/>
+            <a:ext cx="457200" cy="365760"/>
+          </a:xfrm>
+          <a:prstGeom prst="rect">
+            <a:avLst/>
+          </a:prstGeom>
+          <a:noFill/>
+        </p:spPr>
+        <p:txBody>
+          <a:bodyPr wrap="square" anchor="t"/>
+          <a:lstStyle/>
+          <a:p>
+            <a:pPr algn="ctr"/>
+            <a:r>
+              <a:rPr sz="1600" b="1" i="0" a:ea="Calibri">
+                <a:solidFill>
+                  <a:srgbClr val="FFFFFF"/>
+                </a:solidFill>
+                <a:latin typeface="Calibri"/>
+              </a:rPr>
+              <a:t>2</a:t>
+            </a:r>
+          </a:p>
+        </p:txBody>
+      </p:sp>
+      <p:sp>
+        <p:nvSpPr>
+          <p:cNvPr id="19" name="TextBox 18"/>
+          <p:cNvSpPr txBox="1"/>
+          <p:nvPr/>
+        </p:nvSpPr>
+        <p:spPr>
+          <a:xfrm>
+            <a:off x="4986528" y="1426464"/>
+            <a:ext cx="2645664" cy="365760"/>
+          </a:xfrm>
+          <a:prstGeom prst="rect">
+            <a:avLst/>
+          </a:prstGeom>
+          <a:noFill/>
+        </p:spPr>
+        <p:txBody>
+          <a:bodyPr wrap="square" anchor="t"/>
+          <a:lstStyle/>
+          <a:p>
+            <a:pPr algn="l"/>
+            <a:r>
+              <a:rPr sz="1300" b="1" i="0" a:ea="Calibri">
+                <a:solidFill>
+                  <a:srgbClr val="9F1239"/>
+                </a:solidFill>
+                <a:latin typeface="Calibri"/>
+              </a:rPr>
+              <a:t>2 marks</a:t>
+            </a:r>
+          </a:p>
+        </p:txBody>
+      </p:sp>
+      <p:sp>
+        <p:nvSpPr>
+          <p:cNvPr id="20" name="TextBox 19"/>
+          <p:cNvSpPr txBox="1"/>
+          <p:nvPr/>
+        </p:nvSpPr>
+        <p:spPr>
+          <a:xfrm>
+            <a:off x="4456176" y="2011680"/>
+            <a:ext cx="3249168" cy="1417320"/>
+          </a:xfrm>
+          <a:prstGeom prst="rect">
+            <a:avLst/>
+          </a:prstGeom>
+          <a:noFill/>
+        </p:spPr>
+        <p:txBody>
+          <a:bodyPr wrap="square" anchor="t"/>
+          <a:lstStyle/>
+          <a:p>
+            <a:pPr algn="l"/>
+            <a:r>
+              <a:rPr sz="1600" b="0" i="0" a:ea="Calibri">
+                <a:solidFill>
+                  <a:srgbClr val="0F172A"/>
+                </a:solidFill>
+                <a:latin typeface="Calibri"/>
+              </a:rPr>
+              <a:t>An element has two isotopes, </a:t>
+            </a:r>
+            <a:r>
+              <a:rPr sz="1600" b="0" i="0" a:ea="Calibri" baseline="30000">
+                <a:solidFill>
+                  <a:srgbClr val="0F172A"/>
+                </a:solidFill>
+                <a:latin typeface="Calibri"/>
+              </a:rPr>
+              <a:t>69</a:t>
+            </a:r>
+            <a:r>
+              <a:rPr sz="1600" b="0" i="0" a:ea="Calibri">
+                <a:solidFill>
+                  <a:srgbClr val="0F172A"/>
+                </a:solidFill>
+                <a:latin typeface="Calibri"/>
+              </a:rPr>
+              <a:t>X (60.0%) and </a:t>
+            </a:r>
+            <a:r>
+              <a:rPr sz="1600" b="0" i="0" a:ea="Calibri" baseline="30000">
+                <a:solidFill>
+                  <a:srgbClr val="0F172A"/>
+                </a:solidFill>
+                <a:latin typeface="Calibri"/>
+              </a:rPr>
+              <a:t>71</a:t>
+            </a:r>
+            <a:r>
+              <a:rPr sz="1600" b="0" i="0" a:ea="Calibri">
+                <a:solidFill>
+                  <a:srgbClr val="0F172A"/>
+                </a:solidFill>
+                <a:latin typeface="Calibri"/>
+              </a:rPr>
+              <a:t>X (40.0%). Calculate A</a:t>
+            </a:r>
+            <a:r>
+              <a:rPr sz="1600" b="0" i="0" a:ea="Calibri" baseline="-25000">
+                <a:solidFill>
+                  <a:srgbClr val="0F172A"/>
+                </a:solidFill>
+                <a:latin typeface="Calibri"/>
+              </a:rPr>
+              <a:t>r</a:t>
+            </a:r>
+            <a:r>
+              <a:rPr sz="1600" b="0" i="0" a:ea="Calibri">
+                <a:solidFill>
+                  <a:srgbClr val="0F172A"/>
+                </a:solidFill>
+                <a:latin typeface="Calibri"/>
+              </a:rPr>
+              <a:t>.</a:t>
+            </a:r>
+          </a:p>
+        </p:txBody>
+      </p:sp>
+      <p:sp>
+        <p:nvSpPr>
+          <p:cNvPr id="21" name="TextBox 20"/>
+          <p:cNvSpPr txBox="1"/>
+          <p:nvPr/>
+        </p:nvSpPr>
+        <p:spPr>
+          <a:xfrm>
+            <a:off x="4456176" y="3520440"/>
+            <a:ext cx="3249168" cy="256032"/>
+          </a:xfrm>
+          <a:prstGeom prst="rect">
+            <a:avLst/>
+          </a:prstGeom>
+          <a:noFill/>
+        </p:spPr>
+        <p:txBody>
+          <a:bodyPr wrap="square" anchor="t"/>
+          <a:lstStyle/>
+          <a:p>
+            <a:pPr algn="l"/>
+            <a:r>
+              <a:rPr sz="1100" b="1" i="0" a:ea="Calibri">
+                <a:solidFill>
+                  <a:srgbClr val="475569"/>
+                </a:solidFill>
+                <a:latin typeface="Calibri"/>
+              </a:rPr>
+              <a:t>Write a full-sentence answer</a:t>
+            </a:r>
+          </a:p>
+        </p:txBody>
+      </p:sp>
+      <p:sp>
+        <p:nvSpPr>
+          <p:cNvPr id="22" name="Rectangle 21"/>
+          <p:cNvSpPr/>
+          <p:nvPr/>
+        </p:nvSpPr>
+        <p:spPr>
+          <a:xfrm>
+            <a:off x="4456176" y="3858768"/>
+            <a:ext cx="3249168" cy="15875"/>
+          </a:xfrm>
+          <a:prstGeom prst="rect">
+            <a:avLst/>
+          </a:prstGeom>
+          <a:solidFill>
+            <a:srgbClr val="E2E8F0"/>
+          </a:solidFill>
+          <a:ln>
+            <a:noFill/>
+          </a:ln>
+        </p:spPr>
+        <p:style>
+          <a:lnRef idx="1">
+            <a:schemeClr val="accent1"/>
+          </a:lnRef>
+          <a:fillRef idx="3">
+            <a:schemeClr val="accent1"/>
+          </a:fillRef>
+          <a:effectRef idx="2">
+            <a:schemeClr val="accent1"/>
+          </a:effectRef>
+          <a:fontRef idx="minor">
+            <a:schemeClr val="lt1"/>
+          </a:fontRef>
+        </p:style>
+        <p:txBody>
+          <a:bodyPr rtlCol="0" anchor="ctr"/>
+          <a:lstStyle/>
+          <a:p>
+            <a:pPr algn="ctr"/>
+          </a:p>
+        </p:txBody>
+      </p:sp>
+      <p:sp>
+        <p:nvSpPr>
+          <p:cNvPr id="23" name="Rectangle 22"/>
+          <p:cNvSpPr/>
+          <p:nvPr/>
+        </p:nvSpPr>
+        <p:spPr>
+          <a:xfrm>
+            <a:off x="4456176" y="4151376"/>
+            <a:ext cx="3249168" cy="15875"/>
+          </a:xfrm>
+          <a:prstGeom prst="rect">
+            <a:avLst/>
+          </a:prstGeom>
+          <a:solidFill>
+            <a:srgbClr val="E2E8F0"/>
+          </a:solidFill>
+          <a:ln>
+            <a:noFill/>
+          </a:ln>
+        </p:spPr>
+        <p:style>
+          <a:lnRef idx="1">
+            <a:schemeClr val="accent1"/>
+          </a:lnRef>
+          <a:fillRef idx="3">
+            <a:schemeClr val="accent1"/>
+          </a:fillRef>
+          <a:effectRef idx="2">
+            <a:schemeClr val="accent1"/>
+          </a:effectRef>
+          <a:fontRef idx="minor">
+            <a:schemeClr val="lt1"/>
+          </a:fontRef>
+        </p:style>
+        <p:txBody>
+          <a:bodyPr rtlCol="0" anchor="ctr"/>
+          <a:lstStyle/>
+          <a:p>
+            <a:pPr algn="ctr"/>
+          </a:p>
+        </p:txBody>
+      </p:sp>
+      <p:sp>
+        <p:nvSpPr>
+          <p:cNvPr id="24" name="Rectangle 23"/>
+          <p:cNvSpPr/>
+          <p:nvPr/>
+        </p:nvSpPr>
+        <p:spPr>
+          <a:xfrm>
+            <a:off x="4456176" y="4443984"/>
+            <a:ext cx="3249168" cy="15875"/>
+          </a:xfrm>
+          <a:prstGeom prst="rect">
+            <a:avLst/>
+          </a:prstGeom>
+          <a:solidFill>
+            <a:srgbClr val="E2E8F0"/>
+          </a:solidFill>
+          <a:ln>
+            <a:noFill/>
+          </a:ln>
+        </p:spPr>
+        <p:style>
+          <a:lnRef idx="1">
+            <a:schemeClr val="accent1"/>
+          </a:lnRef>
+          <a:fillRef idx="3">
+            <a:schemeClr val="accent1"/>
+          </a:fillRef>
+          <a:effectRef idx="2">
+            <a:schemeClr val="accent1"/>
+          </a:effectRef>
+          <a:fontRef idx="minor">
+            <a:schemeClr val="lt1"/>
+          </a:fontRef>
+        </p:style>
+        <p:txBody>
+          <a:bodyPr rtlCol="0" anchor="ctr"/>
+          <a:lstStyle/>
+          <a:p>
+            <a:pPr algn="ctr"/>
+          </a:p>
+        </p:txBody>
+      </p:sp>
+      <p:sp>
+        <p:nvSpPr>
+          <p:cNvPr id="25" name="Rectangle 24"/>
+          <p:cNvSpPr/>
+          <p:nvPr/>
+        </p:nvSpPr>
+        <p:spPr>
+          <a:xfrm>
+            <a:off x="4456176" y="4736592"/>
+            <a:ext cx="3249168" cy="15875"/>
+          </a:xfrm>
+          <a:prstGeom prst="rect">
+            <a:avLst/>
+          </a:prstGeom>
+          <a:solidFill>
+            <a:srgbClr val="E2E8F0"/>
+          </a:solidFill>
+          <a:ln>
+            <a:noFill/>
+          </a:ln>
+        </p:spPr>
+        <p:style>
+          <a:lnRef idx="1">
+            <a:schemeClr val="accent1"/>
+          </a:lnRef>
+          <a:fillRef idx="3">
+            <a:schemeClr val="accent1"/>
+          </a:fillRef>
+          <a:effectRef idx="2">
+            <a:schemeClr val="accent1"/>
+          </a:effectRef>
+          <a:fontRef idx="minor">
+            <a:schemeClr val="lt1"/>
+          </a:fontRef>
+        </p:style>
+        <p:txBody>
+          <a:bodyPr rtlCol="0" anchor="ctr"/>
+          <a:lstStyle/>
+          <a:p>
+            <a:pPr algn="ctr"/>
+          </a:p>
+        </p:txBody>
+      </p:sp>
+      <p:sp>
+        <p:nvSpPr>
+          <p:cNvPr id="26" name="Rounded Rectangle 25"/>
+          <p:cNvSpPr/>
+          <p:nvPr/>
+        </p:nvSpPr>
+        <p:spPr>
+          <a:xfrm>
+            <a:off x="8052816" y="1188720"/>
+            <a:ext cx="3651504" cy="4434840"/>
+          </a:xfrm>
+          <a:prstGeom prst="roundRect">
+            <a:avLst/>
+          </a:prstGeom>
+          <a:solidFill>
+            <a:srgbClr val="FFFFFF"/>
+          </a:solidFill>
+          <a:ln>
+            <a:noFill/>
+          </a:ln>
+        </p:spPr>
+        <p:style>
+          <a:lnRef idx="1">
+            <a:schemeClr val="accent1"/>
+          </a:lnRef>
+          <a:fillRef idx="3">
+            <a:schemeClr val="accent1"/>
+          </a:fillRef>
+          <a:effectRef idx="2">
+            <a:schemeClr val="accent1"/>
+          </a:effectRef>
+          <a:fontRef idx="minor">
+            <a:schemeClr val="lt1"/>
+          </a:fontRef>
+        </p:style>
+        <p:txBody>
+          <a:bodyPr rtlCol="0" anchor="ctr"/>
+          <a:lstStyle/>
+          <a:p>
+            <a:pPr algn="ctr"/>
+          </a:p>
+        </p:txBody>
+      </p:sp>
+      <p:sp>
+        <p:nvSpPr>
+          <p:cNvPr id="27" name="Rounded Rectangle 26"/>
+          <p:cNvSpPr/>
+          <p:nvPr/>
+        </p:nvSpPr>
+        <p:spPr>
+          <a:xfrm>
+            <a:off x="8235696" y="1371600"/>
+            <a:ext cx="457200" cy="457200"/>
+          </a:xfrm>
+          <a:prstGeom prst="roundRect">
+            <a:avLst/>
+          </a:prstGeom>
+          <a:solidFill>
+            <a:srgbClr val="9F1239"/>
+          </a:solidFill>
+          <a:ln>
+            <a:noFill/>
+          </a:ln>
+        </p:spPr>
+        <p:style>
+          <a:lnRef idx="1">
+            <a:schemeClr val="accent1"/>
+          </a:lnRef>
+          <a:fillRef idx="3">
+            <a:schemeClr val="accent1"/>
+          </a:fillRef>
+          <a:effectRef idx="2">
+            <a:schemeClr val="accent1"/>
+          </a:effectRef>
+          <a:fontRef idx="minor">
+            <a:schemeClr val="lt1"/>
+          </a:fontRef>
+        </p:style>
+        <p:txBody>
+          <a:bodyPr rtlCol="0" anchor="ctr"/>
+          <a:lstStyle/>
+          <a:p>
+            <a:pPr algn="ctr"/>
+          </a:p>
+        </p:txBody>
+      </p:sp>
+      <p:sp>
+        <p:nvSpPr>
+          <p:cNvPr id="28" name="TextBox 27"/>
+          <p:cNvSpPr txBox="1"/>
+          <p:nvPr/>
+        </p:nvSpPr>
+        <p:spPr>
+          <a:xfrm>
+            <a:off x="8235696" y="1426464"/>
+            <a:ext cx="457200" cy="365760"/>
+          </a:xfrm>
+          <a:prstGeom prst="rect">
+            <a:avLst/>
+          </a:prstGeom>
+          <a:noFill/>
+        </p:spPr>
+        <p:txBody>
+          <a:bodyPr wrap="square" anchor="t"/>
+          <a:lstStyle/>
+          <a:p>
+            <a:pPr algn="ctr"/>
+            <a:r>
+              <a:rPr sz="1600" b="1" i="0" a:ea="Calibri">
+                <a:solidFill>
+                  <a:srgbClr val="FFFFFF"/>
+                </a:solidFill>
+                <a:latin typeface="Calibri"/>
+              </a:rPr>
+              <a:t>3</a:t>
+            </a:r>
+          </a:p>
+        </p:txBody>
+      </p:sp>
+      <p:sp>
+        <p:nvSpPr>
+          <p:cNvPr id="29" name="TextBox 28"/>
+          <p:cNvSpPr txBox="1"/>
+          <p:nvPr/>
+        </p:nvSpPr>
+        <p:spPr>
+          <a:xfrm>
+            <a:off x="8784336" y="1426464"/>
+            <a:ext cx="2645664" cy="365760"/>
+          </a:xfrm>
+          <a:prstGeom prst="rect">
+            <a:avLst/>
+          </a:prstGeom>
+          <a:noFill/>
+        </p:spPr>
+        <p:txBody>
+          <a:bodyPr wrap="square" anchor="t"/>
+          <a:lstStyle/>
+          <a:p>
+            <a:pPr algn="l"/>
+            <a:r>
+              <a:rPr sz="1300" b="1" i="0" a:ea="Calibri">
+                <a:solidFill>
+                  <a:srgbClr val="9F1239"/>
+                </a:solidFill>
+                <a:latin typeface="Calibri"/>
+              </a:rPr>
+              <a:t>2 marks</a:t>
+            </a:r>
+          </a:p>
+        </p:txBody>
+      </p:sp>
+      <p:sp>
+        <p:nvSpPr>
+          <p:cNvPr id="30" name="TextBox 29"/>
+          <p:cNvSpPr txBox="1"/>
+          <p:nvPr/>
+        </p:nvSpPr>
+        <p:spPr>
+          <a:xfrm>
+            <a:off x="8253984" y="2011680"/>
+            <a:ext cx="3249168" cy="1417320"/>
+          </a:xfrm>
+          <a:prstGeom prst="rect">
+            <a:avLst/>
+          </a:prstGeom>
+          <a:noFill/>
+        </p:spPr>
+        <p:txBody>
+          <a:bodyPr wrap="square" anchor="t"/>
+          <a:lstStyle/>
+          <a:p>
+            <a:pPr algn="l"/>
+            <a:r>
+              <a:rPr sz="1600" b="0" i="0" a:ea="Calibri">
+                <a:solidFill>
+                  <a:srgbClr val="0F172A"/>
+                </a:solidFill>
+                <a:latin typeface="Calibri"/>
+              </a:rPr>
+              <a:t>Explain why atoms are electrically neutral even though they contain charged particles.</a:t>
+            </a:r>
+          </a:p>
+        </p:txBody>
+      </p:sp>
+      <p:sp>
+        <p:nvSpPr>
+          <p:cNvPr id="31" name="TextBox 30"/>
+          <p:cNvSpPr txBox="1"/>
+          <p:nvPr/>
+        </p:nvSpPr>
+        <p:spPr>
+          <a:xfrm>
+            <a:off x="8253984" y="3520440"/>
+            <a:ext cx="3249168" cy="256032"/>
+          </a:xfrm>
+          <a:prstGeom prst="rect">
+            <a:avLst/>
+          </a:prstGeom>
+          <a:noFill/>
+        </p:spPr>
+        <p:txBody>
+          <a:bodyPr wrap="square" anchor="t"/>
+          <a:lstStyle/>
+          <a:p>
+            <a:pPr algn="l"/>
+            <a:r>
+              <a:rPr sz="1100" b="1" i="0" a:ea="Calibri">
+                <a:solidFill>
+                  <a:srgbClr val="475569"/>
+                </a:solidFill>
+                <a:latin typeface="Calibri"/>
+              </a:rPr>
+              <a:t>Write a full-sentence answer</a:t>
+            </a:r>
+          </a:p>
+        </p:txBody>
+      </p:sp>
+      <p:sp>
+        <p:nvSpPr>
+          <p:cNvPr id="32" name="Rectangle 31"/>
+          <p:cNvSpPr/>
+          <p:nvPr/>
+        </p:nvSpPr>
+        <p:spPr>
+          <a:xfrm>
+            <a:off x="8253984" y="3858768"/>
+            <a:ext cx="3249168" cy="15875"/>
+          </a:xfrm>
+          <a:prstGeom prst="rect">
+            <a:avLst/>
+          </a:prstGeom>
+          <a:solidFill>
+            <a:srgbClr val="E2E8F0"/>
+          </a:solidFill>
+          <a:ln>
+            <a:noFill/>
+          </a:ln>
+        </p:spPr>
+        <p:style>
+          <a:lnRef idx="1">
+            <a:schemeClr val="accent1"/>
+          </a:lnRef>
+          <a:fillRef idx="3">
+            <a:schemeClr val="accent1"/>
+          </a:fillRef>
+          <a:effectRef idx="2">
+            <a:schemeClr val="accent1"/>
+          </a:effectRef>
+          <a:fontRef idx="minor">
+            <a:schemeClr val="lt1"/>
+          </a:fontRef>
+        </p:style>
+        <p:txBody>
+          <a:bodyPr rtlCol="0" anchor="ctr"/>
+          <a:lstStyle/>
+          <a:p>
+            <a:pPr algn="ctr"/>
+          </a:p>
+        </p:txBody>
+      </p:sp>
+      <p:sp>
+        <p:nvSpPr>
+          <p:cNvPr id="33" name="Rectangle 32"/>
+          <p:cNvSpPr/>
+          <p:nvPr/>
+        </p:nvSpPr>
+        <p:spPr>
+          <a:xfrm>
+            <a:off x="8253984" y="4151376"/>
+            <a:ext cx="3249168" cy="15875"/>
+          </a:xfrm>
+          <a:prstGeom prst="rect">
+            <a:avLst/>
+          </a:prstGeom>
+          <a:solidFill>
+            <a:srgbClr val="E2E8F0"/>
+          </a:solidFill>
+          <a:ln>
+            <a:noFill/>
+          </a:ln>
+        </p:spPr>
+        <p:style>
+          <a:lnRef idx="1">
+            <a:schemeClr val="accent1"/>
+          </a:lnRef>
+          <a:fillRef idx="3">
+            <a:schemeClr val="accent1"/>
+          </a:fillRef>
+          <a:effectRef idx="2">
+            <a:schemeClr val="accent1"/>
+          </a:effectRef>
+          <a:fontRef idx="minor">
+            <a:schemeClr val="lt1"/>
+          </a:fontRef>
+        </p:style>
+        <p:txBody>
+          <a:bodyPr rtlCol="0" anchor="ctr"/>
+          <a:lstStyle/>
+          <a:p>
+            <a:pPr algn="ctr"/>
+          </a:p>
+        </p:txBody>
+      </p:sp>
+      <p:sp>
+        <p:nvSpPr>
+          <p:cNvPr id="34" name="Rectangle 33"/>
+          <p:cNvSpPr/>
+          <p:nvPr/>
+        </p:nvSpPr>
+        <p:spPr>
+          <a:xfrm>
+            <a:off x="8253984" y="4443984"/>
+            <a:ext cx="3249168" cy="15875"/>
+          </a:xfrm>
+          <a:prstGeom prst="rect">
+            <a:avLst/>
+          </a:prstGeom>
+          <a:solidFill>
+            <a:srgbClr val="E2E8F0"/>
+          </a:solidFill>
+          <a:ln>
+            <a:noFill/>
+          </a:ln>
+        </p:spPr>
+        <p:style>
+          <a:lnRef idx="1">
+            <a:schemeClr val="accent1"/>
+          </a:lnRef>
+          <a:fillRef idx="3">
+            <a:schemeClr val="accent1"/>
+          </a:fillRef>
+          <a:effectRef idx="2">
+            <a:schemeClr val="accent1"/>
+          </a:effectRef>
+          <a:fontRef idx="minor">
+            <a:schemeClr val="lt1"/>
+          </a:fontRef>
+        </p:style>
+        <p:txBody>
+          <a:bodyPr rtlCol="0" anchor="ctr"/>
+          <a:lstStyle/>
+          <a:p>
+            <a:pPr algn="ctr"/>
+          </a:p>
+        </p:txBody>
+      </p:sp>
+      <p:sp>
+        <p:nvSpPr>
+          <p:cNvPr id="35" name="Rectangle 34"/>
+          <p:cNvSpPr/>
+          <p:nvPr/>
+        </p:nvSpPr>
+        <p:spPr>
+          <a:xfrm>
+            <a:off x="8253984" y="4736592"/>
+            <a:ext cx="3249168" cy="15875"/>
+          </a:xfrm>
+          <a:prstGeom prst="rect">
+            <a:avLst/>
+          </a:prstGeom>
+          <a:solidFill>
+            <a:srgbClr val="E2E8F0"/>
+          </a:solidFill>
+          <a:ln>
+            <a:noFill/>
+          </a:ln>
+        </p:spPr>
+        <p:style>
+          <a:lnRef idx="1">
+            <a:schemeClr val="accent1"/>
+          </a:lnRef>
+          <a:fillRef idx="3">
+            <a:schemeClr val="accent1"/>
+          </a:fillRef>
+          <a:effectRef idx="2">
+            <a:schemeClr val="accent1"/>
+          </a:effectRef>
+          <a:fontRef idx="minor">
+            <a:schemeClr val="lt1"/>
+          </a:fontRef>
+        </p:style>
+        <p:txBody>
+          <a:bodyPr rtlCol="0" anchor="ctr"/>
+          <a:lstStyle/>
+          <a:p>
+            <a:pPr algn="ctr"/>
+          </a:p>
+        </p:txBody>
+      </p:sp>
+      <p:sp>
+        <p:nvSpPr>
+          <p:cNvPr id="36" name="TextBox 35"/>
+          <p:cNvSpPr txBox="1"/>
+          <p:nvPr/>
+        </p:nvSpPr>
+        <p:spPr>
+          <a:xfrm>
+            <a:off x="457200" y="5742432"/>
+            <a:ext cx="11247120" cy="274320"/>
+          </a:xfrm>
+          <a:prstGeom prst="rect">
+            <a:avLst/>
+          </a:prstGeom>
+          <a:noFill/>
+        </p:spPr>
+        <p:txBody>
+          <a:bodyPr wrap="square" anchor="t"/>
+          <a:lstStyle/>
+          <a:p>
+            <a:pPr algn="l"/>
+            <a:r>
+              <a:rPr sz="1300" b="1" i="0" a:ea="Calibri">
+                <a:solidFill>
+                  <a:srgbClr val="9F1239"/>
+                </a:solidFill>
+                <a:latin typeface="Calibri"/>
+              </a:rPr>
+              <a:t>Think first — answers are on the next slide.</a:t>
+            </a:r>
+          </a:p>
+        </p:txBody>
+      </p:sp>
+      <p:sp>
+        <p:nvSpPr>
+          <p:cNvPr id="37" name="Rectangle 36"/>
+          <p:cNvSpPr/>
+          <p:nvPr/>
+        </p:nvSpPr>
+        <p:spPr>
+          <a:xfrm>
+            <a:off x="0" y="6437376"/>
+            <a:ext cx="12191695" cy="420624"/>
+          </a:xfrm>
+          <a:prstGeom prst="rect">
+            <a:avLst/>
+          </a:prstGeom>
+          <a:solidFill>
+            <a:srgbClr val="004D40"/>
+          </a:solidFill>
+          <a:ln>
+            <a:noFill/>
+          </a:ln>
+        </p:spPr>
+        <p:style>
+          <a:lnRef idx="1">
+            <a:schemeClr val="accent1"/>
+          </a:lnRef>
+          <a:fillRef idx="3">
+            <a:schemeClr val="accent1"/>
+          </a:fillRef>
+          <a:effectRef idx="2">
+            <a:schemeClr val="accent1"/>
+          </a:effectRef>
+          <a:fontRef idx="minor">
+            <a:schemeClr val="lt1"/>
+          </a:fontRef>
+        </p:style>
+        <p:txBody>
+          <a:bodyPr rtlCol="0" anchor="ctr"/>
+          <a:lstStyle/>
+          <a:p>
+            <a:pPr algn="ctr"/>
+          </a:p>
+        </p:txBody>
+      </p:sp>
       <p:pic>
         <p:nvPicPr>
-          <p:cNvPr id="23" name="Picture 22" descr="jdscience-footer-logo.png"/>
+          <p:cNvPr id="38" name="Picture 37" descr="jdscience-footer-logo.png"/>
           <p:cNvPicPr>
             <a:picLocks noChangeAspect="1"/>
           </p:cNvPicPr>
@@ -26196,7 +29349,7 @@
       </p:pic>
       <p:sp>
         <p:nvSpPr>
-          <p:cNvPr id="24" name="TextBox 23"/>
+          <p:cNvPr id="39" name="TextBox 38"/>
           <p:cNvSpPr txBox="1"/>
           <p:nvPr/>
         </p:nvSpPr>
@@ -26229,7 +29382,7 @@
       </p:sp>
       <p:sp>
         <p:nvSpPr>
-          <p:cNvPr id="25" name="TextBox 24"/>
+          <p:cNvPr id="40" name="TextBox 39"/>
           <p:cNvSpPr txBox="1"/>
           <p:nvPr/>
         </p:nvSpPr>
@@ -26262,7 +29415,7 @@
       </p:sp>
       <p:sp>
         <p:nvSpPr>
-          <p:cNvPr id="26" name="TextBox 25"/>
+          <p:cNvPr id="41" name="TextBox 40"/>
           <p:cNvSpPr txBox="1"/>
           <p:nvPr/>
         </p:nvSpPr>
@@ -30625,8 +33778,8 @@
         </p:nvSpPr>
         <p:spPr>
           <a:xfrm>
-            <a:off x="0" y="2880360"/>
-            <a:ext cx="12191695" cy="73152"/>
+            <a:off x="0" y="0"/>
+            <a:ext cx="146304" cy="6858000"/>
           </a:xfrm>
           <a:prstGeom prst="rect">
             <a:avLst/>
@@ -30668,80 +33821,80 @@
         </p:nvSpPr>
         <p:spPr>
           <a:xfrm>
+            <a:off x="640080" y="384048"/>
+            <a:ext cx="10972800" cy="868680"/>
+          </a:xfrm>
+          <a:prstGeom prst="rect">
+            <a:avLst/>
+          </a:prstGeom>
+          <a:noFill/>
+        </p:spPr>
+        <p:txBody>
+          <a:bodyPr wrap="square" anchor="t"/>
+          <a:lstStyle/>
+          <a:p>
+            <a:pPr algn="l"/>
+            <a:r>
+              <a:rPr sz="3000" b="1" i="0" a:ea="Calibri">
+                <a:solidFill>
+                  <a:srgbClr val="FFFFFF"/>
+                </a:solidFill>
+                <a:latin typeface="Calibri"/>
+              </a:rPr>
+              <a:t>The nuclear model</a:t>
+            </a:r>
+          </a:p>
+        </p:txBody>
+      </p:sp>
+      <p:sp>
+        <p:nvSpPr>
+          <p:cNvPr id="5" name="TextBox 4"/>
+          <p:cNvSpPr txBox="1"/>
+          <p:nvPr/>
+        </p:nvSpPr>
+        <p:spPr>
+          <a:xfrm>
+            <a:off x="640080" y="1261872"/>
+            <a:ext cx="10972800" cy="502920"/>
+          </a:xfrm>
+          <a:prstGeom prst="rect">
+            <a:avLst/>
+          </a:prstGeom>
+          <a:noFill/>
+        </p:spPr>
+        <p:txBody>
+          <a:bodyPr wrap="square" anchor="t"/>
+          <a:lstStyle/>
+          <a:p>
+            <a:pPr algn="l"/>
+            <a:r>
+              <a:rPr sz="1700" b="0" i="0" a:ea="Calibri">
+                <a:solidFill>
+                  <a:srgbClr val="CCFBF1"/>
+                </a:solidFill>
+                <a:latin typeface="Calibri"/>
+              </a:rPr>
+              <a:t>A tiny dense nucleus; electrons in shells</a:t>
+            </a:r>
+          </a:p>
+        </p:txBody>
+      </p:sp>
+      <p:sp>
+        <p:nvSpPr>
+          <p:cNvPr id="6" name="Rounded Rectangle 5"/>
+          <p:cNvSpPr/>
+          <p:nvPr/>
+        </p:nvSpPr>
+        <p:spPr>
+          <a:xfrm>
             <a:off x="640080" y="1965960"/>
-            <a:ext cx="10881360" cy="914400"/>
-          </a:xfrm>
-          <a:prstGeom prst="rect">
-            <a:avLst/>
-          </a:prstGeom>
-          <a:noFill/>
-        </p:spPr>
-        <p:txBody>
-          <a:bodyPr wrap="square" anchor="t"/>
-          <a:lstStyle/>
-          <a:p>
-            <a:pPr algn="l"/>
-            <a:r>
-              <a:rPr sz="3400" b="1" i="0" a:ea="Calibri">
-                <a:solidFill>
-                  <a:srgbClr val="FFFFFF"/>
-                </a:solidFill>
-                <a:latin typeface="Calibri"/>
-              </a:rPr>
-              <a:t>The nuclear model</a:t>
-            </a:r>
-          </a:p>
-        </p:txBody>
-      </p:sp>
-      <p:sp>
-        <p:nvSpPr>
-          <p:cNvPr id="5" name="TextBox 4"/>
-          <p:cNvSpPr txBox="1"/>
-          <p:nvPr/>
-        </p:nvSpPr>
-        <p:spPr>
-          <a:xfrm>
-            <a:off x="640080" y="3154680"/>
-            <a:ext cx="10881360" cy="822960"/>
-          </a:xfrm>
-          <a:prstGeom prst="rect">
-            <a:avLst/>
-          </a:prstGeom>
-          <a:noFill/>
-        </p:spPr>
-        <p:txBody>
-          <a:bodyPr wrap="square" anchor="t"/>
-          <a:lstStyle/>
-          <a:p>
-            <a:pPr algn="l"/>
-            <a:r>
-              <a:rPr sz="1800" b="0" i="0" a:ea="Calibri">
-                <a:solidFill>
-                  <a:srgbClr val="CCFBF1"/>
-                </a:solidFill>
-                <a:latin typeface="Calibri"/>
-              </a:rPr>
-              <a:t>A tiny dense nucleus; electrons in shells</a:t>
-            </a:r>
-          </a:p>
-        </p:txBody>
-      </p:sp>
-      <p:sp>
-        <p:nvSpPr>
-          <p:cNvPr id="6" name="Rectangle 5"/>
-          <p:cNvSpPr/>
-          <p:nvPr/>
-        </p:nvSpPr>
-        <p:spPr>
-          <a:xfrm>
-            <a:off x="0" y="6437376"/>
-            <a:ext cx="12191695" cy="420624"/>
-          </a:xfrm>
-          <a:prstGeom prst="rect">
-            <a:avLst/>
-          </a:prstGeom>
-          <a:solidFill>
-            <a:srgbClr val="004D40"/>
+            <a:ext cx="3520440" cy="3977639"/>
+          </a:xfrm>
+          <a:prstGeom prst="roundRect">
+            <a:avLst/>
+          </a:prstGeom>
+          <a:solidFill>
+            <a:srgbClr val="003D33"/>
           </a:solidFill>
           <a:ln>
             <a:noFill/>
@@ -30769,9 +33922,465 @@
           </a:p>
         </p:txBody>
       </p:sp>
+      <p:sp>
+        <p:nvSpPr>
+          <p:cNvPr id="7" name="Rectangle 6"/>
+          <p:cNvSpPr/>
+          <p:nvPr/>
+        </p:nvSpPr>
+        <p:spPr>
+          <a:xfrm>
+            <a:off x="640080" y="1965960"/>
+            <a:ext cx="3520440" cy="109728"/>
+          </a:xfrm>
+          <a:prstGeom prst="rect">
+            <a:avLst/>
+          </a:prstGeom>
+          <a:solidFill>
+            <a:srgbClr val="009688"/>
+          </a:solidFill>
+          <a:ln>
+            <a:noFill/>
+          </a:ln>
+        </p:spPr>
+        <p:style>
+          <a:lnRef idx="1">
+            <a:schemeClr val="accent1"/>
+          </a:lnRef>
+          <a:fillRef idx="3">
+            <a:schemeClr val="accent1"/>
+          </a:fillRef>
+          <a:effectRef idx="2">
+            <a:schemeClr val="accent1"/>
+          </a:effectRef>
+          <a:fontRef idx="minor">
+            <a:schemeClr val="lt1"/>
+          </a:fontRef>
+        </p:style>
+        <p:txBody>
+          <a:bodyPr rtlCol="0" anchor="ctr"/>
+          <a:lstStyle/>
+          <a:p>
+            <a:pPr algn="ctr"/>
+          </a:p>
+        </p:txBody>
+      </p:sp>
+      <p:sp>
+        <p:nvSpPr>
+          <p:cNvPr id="8" name="TextBox 7"/>
+          <p:cNvSpPr txBox="1"/>
+          <p:nvPr/>
+        </p:nvSpPr>
+        <p:spPr>
+          <a:xfrm>
+            <a:off x="841248" y="2212848"/>
+            <a:ext cx="3108960" cy="457200"/>
+          </a:xfrm>
+          <a:prstGeom prst="rect">
+            <a:avLst/>
+          </a:prstGeom>
+          <a:noFill/>
+        </p:spPr>
+        <p:txBody>
+          <a:bodyPr wrap="square" anchor="t"/>
+          <a:lstStyle/>
+          <a:p>
+            <a:pPr algn="l"/>
+            <a:r>
+              <a:rPr sz="1600" b="1" i="0" a:ea="Calibri">
+                <a:solidFill>
+                  <a:srgbClr val="CCFBF1"/>
+                </a:solidFill>
+                <a:latin typeface="Calibri"/>
+              </a:rPr>
+              <a:t>1   Look for</a:t>
+            </a:r>
+          </a:p>
+        </p:txBody>
+      </p:sp>
+      <p:sp>
+        <p:nvSpPr>
+          <p:cNvPr id="9" name="TextBox 8"/>
+          <p:cNvSpPr txBox="1"/>
+          <p:nvPr/>
+        </p:nvSpPr>
+        <p:spPr>
+          <a:xfrm>
+            <a:off x="841248" y="2788920"/>
+            <a:ext cx="3108960" cy="2880360"/>
+          </a:xfrm>
+          <a:prstGeom prst="rect">
+            <a:avLst/>
+          </a:prstGeom>
+          <a:noFill/>
+        </p:spPr>
+        <p:txBody>
+          <a:bodyPr wrap="square" anchor="t"/>
+          <a:lstStyle/>
+          <a:p>
+            <a:pPr algn="l"/>
+            <a:r>
+              <a:rPr sz="1600" b="0" i="0" a:ea="Calibri">
+                <a:solidFill>
+                  <a:srgbClr val="FFFFFF"/>
+                </a:solidFill>
+                <a:latin typeface="Calibri"/>
+              </a:rPr>
+              <a:t>A labelled atom with a nucleus, shells, protons, neutrons and electrons.</a:t>
+            </a:r>
+          </a:p>
+        </p:txBody>
+      </p:sp>
+      <p:sp>
+        <p:nvSpPr>
+          <p:cNvPr id="10" name="Rounded Rectangle 9"/>
+          <p:cNvSpPr/>
+          <p:nvPr/>
+        </p:nvSpPr>
+        <p:spPr>
+          <a:xfrm>
+            <a:off x="4343400" y="1965960"/>
+            <a:ext cx="3520440" cy="3977639"/>
+          </a:xfrm>
+          <a:prstGeom prst="roundRect">
+            <a:avLst/>
+          </a:prstGeom>
+          <a:solidFill>
+            <a:srgbClr val="003D33"/>
+          </a:solidFill>
+          <a:ln>
+            <a:noFill/>
+          </a:ln>
+        </p:spPr>
+        <p:style>
+          <a:lnRef idx="1">
+            <a:schemeClr val="accent1"/>
+          </a:lnRef>
+          <a:fillRef idx="3">
+            <a:schemeClr val="accent1"/>
+          </a:fillRef>
+          <a:effectRef idx="2">
+            <a:schemeClr val="accent1"/>
+          </a:effectRef>
+          <a:fontRef idx="minor">
+            <a:schemeClr val="lt1"/>
+          </a:fontRef>
+        </p:style>
+        <p:txBody>
+          <a:bodyPr rtlCol="0" anchor="ctr"/>
+          <a:lstStyle/>
+          <a:p>
+            <a:pPr algn="ctr"/>
+          </a:p>
+        </p:txBody>
+      </p:sp>
+      <p:sp>
+        <p:nvSpPr>
+          <p:cNvPr id="11" name="Rectangle 10"/>
+          <p:cNvSpPr/>
+          <p:nvPr/>
+        </p:nvSpPr>
+        <p:spPr>
+          <a:xfrm>
+            <a:off x="4343400" y="1965960"/>
+            <a:ext cx="3520440" cy="109728"/>
+          </a:xfrm>
+          <a:prstGeom prst="rect">
+            <a:avLst/>
+          </a:prstGeom>
+          <a:solidFill>
+            <a:srgbClr val="99F6E4"/>
+          </a:solidFill>
+          <a:ln>
+            <a:noFill/>
+          </a:ln>
+        </p:spPr>
+        <p:style>
+          <a:lnRef idx="1">
+            <a:schemeClr val="accent1"/>
+          </a:lnRef>
+          <a:fillRef idx="3">
+            <a:schemeClr val="accent1"/>
+          </a:fillRef>
+          <a:effectRef idx="2">
+            <a:schemeClr val="accent1"/>
+          </a:effectRef>
+          <a:fontRef idx="minor">
+            <a:schemeClr val="lt1"/>
+          </a:fontRef>
+        </p:style>
+        <p:txBody>
+          <a:bodyPr rtlCol="0" anchor="ctr"/>
+          <a:lstStyle/>
+          <a:p>
+            <a:pPr algn="ctr"/>
+          </a:p>
+        </p:txBody>
+      </p:sp>
+      <p:sp>
+        <p:nvSpPr>
+          <p:cNvPr id="12" name="TextBox 11"/>
+          <p:cNvSpPr txBox="1"/>
+          <p:nvPr/>
+        </p:nvSpPr>
+        <p:spPr>
+          <a:xfrm>
+            <a:off x="4544568" y="2212848"/>
+            <a:ext cx="3108960" cy="457200"/>
+          </a:xfrm>
+          <a:prstGeom prst="rect">
+            <a:avLst/>
+          </a:prstGeom>
+          <a:noFill/>
+        </p:spPr>
+        <p:txBody>
+          <a:bodyPr wrap="square" anchor="t"/>
+          <a:lstStyle/>
+          <a:p>
+            <a:pPr algn="l"/>
+            <a:r>
+              <a:rPr sz="1600" b="1" i="0" a:ea="Calibri">
+                <a:solidFill>
+                  <a:srgbClr val="CCFBF1"/>
+                </a:solidFill>
+                <a:latin typeface="Calibri"/>
+              </a:rPr>
+              <a:t>2   Say in full</a:t>
+            </a:r>
+          </a:p>
+        </p:txBody>
+      </p:sp>
+      <p:sp>
+        <p:nvSpPr>
+          <p:cNvPr id="13" name="TextBox 12"/>
+          <p:cNvSpPr txBox="1"/>
+          <p:nvPr/>
+        </p:nvSpPr>
+        <p:spPr>
+          <a:xfrm>
+            <a:off x="4544568" y="2788920"/>
+            <a:ext cx="3108960" cy="2880360"/>
+          </a:xfrm>
+          <a:prstGeom prst="rect">
+            <a:avLst/>
+          </a:prstGeom>
+          <a:noFill/>
+        </p:spPr>
+        <p:txBody>
+          <a:bodyPr wrap="square" anchor="t"/>
+          <a:lstStyle/>
+          <a:p>
+            <a:pPr algn="l"/>
+            <a:r>
+              <a:rPr sz="1600" b="0" i="0" a:ea="Calibri">
+                <a:solidFill>
+                  <a:srgbClr val="FFFFFF"/>
+                </a:solidFill>
+                <a:latin typeface="Calibri"/>
+              </a:rPr>
+              <a:t>Almost all the mass is in a tiny nucleus. Electrons occupy shells around it.</a:t>
+            </a:r>
+          </a:p>
+        </p:txBody>
+      </p:sp>
+      <p:sp>
+        <p:nvSpPr>
+          <p:cNvPr id="14" name="Rounded Rectangle 13"/>
+          <p:cNvSpPr/>
+          <p:nvPr/>
+        </p:nvSpPr>
+        <p:spPr>
+          <a:xfrm>
+            <a:off x="8046720" y="1965960"/>
+            <a:ext cx="3520440" cy="3977639"/>
+          </a:xfrm>
+          <a:prstGeom prst="roundRect">
+            <a:avLst/>
+          </a:prstGeom>
+          <a:solidFill>
+            <a:srgbClr val="003D33"/>
+          </a:solidFill>
+          <a:ln>
+            <a:noFill/>
+          </a:ln>
+        </p:spPr>
+        <p:style>
+          <a:lnRef idx="1">
+            <a:schemeClr val="accent1"/>
+          </a:lnRef>
+          <a:fillRef idx="3">
+            <a:schemeClr val="accent1"/>
+          </a:fillRef>
+          <a:effectRef idx="2">
+            <a:schemeClr val="accent1"/>
+          </a:effectRef>
+          <a:fontRef idx="minor">
+            <a:schemeClr val="lt1"/>
+          </a:fontRef>
+        </p:style>
+        <p:txBody>
+          <a:bodyPr rtlCol="0" anchor="ctr"/>
+          <a:lstStyle/>
+          <a:p>
+            <a:pPr algn="ctr"/>
+          </a:p>
+        </p:txBody>
+      </p:sp>
+      <p:sp>
+        <p:nvSpPr>
+          <p:cNvPr id="15" name="Rectangle 14"/>
+          <p:cNvSpPr/>
+          <p:nvPr/>
+        </p:nvSpPr>
+        <p:spPr>
+          <a:xfrm>
+            <a:off x="8046720" y="1965960"/>
+            <a:ext cx="3520440" cy="109728"/>
+          </a:xfrm>
+          <a:prstGeom prst="rect">
+            <a:avLst/>
+          </a:prstGeom>
+          <a:solidFill>
+            <a:srgbClr val="5EEAD4"/>
+          </a:solidFill>
+          <a:ln>
+            <a:noFill/>
+          </a:ln>
+        </p:spPr>
+        <p:style>
+          <a:lnRef idx="1">
+            <a:schemeClr val="accent1"/>
+          </a:lnRef>
+          <a:fillRef idx="3">
+            <a:schemeClr val="accent1"/>
+          </a:fillRef>
+          <a:effectRef idx="2">
+            <a:schemeClr val="accent1"/>
+          </a:effectRef>
+          <a:fontRef idx="minor">
+            <a:schemeClr val="lt1"/>
+          </a:fontRef>
+        </p:style>
+        <p:txBody>
+          <a:bodyPr rtlCol="0" anchor="ctr"/>
+          <a:lstStyle/>
+          <a:p>
+            <a:pPr algn="ctr"/>
+          </a:p>
+        </p:txBody>
+      </p:sp>
+      <p:sp>
+        <p:nvSpPr>
+          <p:cNvPr id="16" name="TextBox 15"/>
+          <p:cNvSpPr txBox="1"/>
+          <p:nvPr/>
+        </p:nvSpPr>
+        <p:spPr>
+          <a:xfrm>
+            <a:off x="8247888" y="2212848"/>
+            <a:ext cx="3108960" cy="457200"/>
+          </a:xfrm>
+          <a:prstGeom prst="rect">
+            <a:avLst/>
+          </a:prstGeom>
+          <a:noFill/>
+        </p:spPr>
+        <p:txBody>
+          <a:bodyPr wrap="square" anchor="t"/>
+          <a:lstStyle/>
+          <a:p>
+            <a:pPr algn="l"/>
+            <a:r>
+              <a:rPr sz="1600" b="1" i="0" a:ea="Calibri">
+                <a:solidFill>
+                  <a:srgbClr val="CCFBF1"/>
+                </a:solidFill>
+                <a:latin typeface="Calibri"/>
+              </a:rPr>
+              <a:t>3   Level 3 move</a:t>
+            </a:r>
+          </a:p>
+        </p:txBody>
+      </p:sp>
+      <p:sp>
+        <p:nvSpPr>
+          <p:cNvPr id="17" name="TextBox 16"/>
+          <p:cNvSpPr txBox="1"/>
+          <p:nvPr/>
+        </p:nvSpPr>
+        <p:spPr>
+          <a:xfrm>
+            <a:off x="8247888" y="2788920"/>
+            <a:ext cx="3108960" cy="2880360"/>
+          </a:xfrm>
+          <a:prstGeom prst="rect">
+            <a:avLst/>
+          </a:prstGeom>
+          <a:noFill/>
+        </p:spPr>
+        <p:txBody>
+          <a:bodyPr wrap="square" anchor="t"/>
+          <a:lstStyle/>
+          <a:p>
+            <a:pPr algn="l"/>
+            <a:r>
+              <a:rPr sz="1600" b="0" i="0" a:ea="Calibri">
+                <a:solidFill>
+                  <a:srgbClr val="FFFFFF"/>
+                </a:solidFill>
+                <a:latin typeface="Calibri"/>
+              </a:rPr>
+              <a:t>Chemical behaviour depends on the outer electrons, not on the neutrons.</a:t>
+            </a:r>
+          </a:p>
+        </p:txBody>
+      </p:sp>
+      <p:sp>
+        <p:nvSpPr>
+          <p:cNvPr id="18" name="Rectangle 17"/>
+          <p:cNvSpPr/>
+          <p:nvPr/>
+        </p:nvSpPr>
+        <p:spPr>
+          <a:xfrm>
+            <a:off x="0" y="6437376"/>
+            <a:ext cx="12191695" cy="420624"/>
+          </a:xfrm>
+          <a:prstGeom prst="rect">
+            <a:avLst/>
+          </a:prstGeom>
+          <a:solidFill>
+            <a:srgbClr val="004D40"/>
+          </a:solidFill>
+          <a:ln>
+            <a:noFill/>
+          </a:ln>
+        </p:spPr>
+        <p:style>
+          <a:lnRef idx="1">
+            <a:schemeClr val="accent1"/>
+          </a:lnRef>
+          <a:fillRef idx="3">
+            <a:schemeClr val="accent1"/>
+          </a:fillRef>
+          <a:effectRef idx="2">
+            <a:schemeClr val="accent1"/>
+          </a:effectRef>
+          <a:fontRef idx="minor">
+            <a:schemeClr val="lt1"/>
+          </a:fontRef>
+        </p:style>
+        <p:txBody>
+          <a:bodyPr rtlCol="0" anchor="ctr"/>
+          <a:lstStyle/>
+          <a:p>
+            <a:pPr algn="ctr"/>
+          </a:p>
+        </p:txBody>
+      </p:sp>
       <p:pic>
         <p:nvPicPr>
-          <p:cNvPr id="7" name="Picture 6" descr="jdscience-footer-logo.png"/>
+          <p:cNvPr id="19" name="Picture 18" descr="jdscience-footer-logo.png"/>
           <p:cNvPicPr>
             <a:picLocks noChangeAspect="1"/>
           </p:cNvPicPr>
@@ -30795,7 +34404,7 @@
       </p:pic>
       <p:sp>
         <p:nvSpPr>
-          <p:cNvPr id="8" name="TextBox 7"/>
+          <p:cNvPr id="20" name="TextBox 19"/>
           <p:cNvSpPr txBox="1"/>
           <p:nvPr/>
         </p:nvSpPr>
@@ -30828,7 +34437,7 @@
       </p:sp>
       <p:sp>
         <p:nvSpPr>
-          <p:cNvPr id="9" name="TextBox 8"/>
+          <p:cNvPr id="21" name="TextBox 20"/>
           <p:cNvSpPr txBox="1"/>
           <p:nvPr/>
         </p:nvSpPr>
@@ -30861,7 +34470,7 @@
       </p:sp>
       <p:sp>
         <p:nvSpPr>
-          <p:cNvPr id="10" name="TextBox 9"/>
+          <p:cNvPr id="22" name="TextBox 21"/>
           <p:cNvSpPr txBox="1"/>
           <p:nvPr/>
         </p:nvSpPr>
@@ -31104,8 +34713,8 @@
         </p:nvSpPr>
         <p:spPr>
           <a:xfrm>
-            <a:off x="6931152" y="1069848"/>
-            <a:ext cx="4617720" cy="685800"/>
+            <a:off x="6931152" y="1051560"/>
+            <a:ext cx="4617720" cy="722376"/>
           </a:xfrm>
           <a:prstGeom prst="rect">
             <a:avLst/>
@@ -31223,8 +34832,8 @@
         </p:nvSpPr>
         <p:spPr>
           <a:xfrm>
-            <a:off x="6931152" y="2029968"/>
-            <a:ext cx="4617720" cy="685800"/>
+            <a:off x="6931152" y="2011680"/>
+            <a:ext cx="4617720" cy="722376"/>
           </a:xfrm>
           <a:prstGeom prst="rect">
             <a:avLst/>
@@ -31342,8 +34951,8 @@
         </p:nvSpPr>
         <p:spPr>
           <a:xfrm>
-            <a:off x="6931152" y="2990088"/>
-            <a:ext cx="4617720" cy="685800"/>
+            <a:off x="6931152" y="2971800"/>
+            <a:ext cx="4617720" cy="722376"/>
           </a:xfrm>
           <a:prstGeom prst="rect">
             <a:avLst/>
@@ -31461,8 +35070,8 @@
         </p:nvSpPr>
         <p:spPr>
           <a:xfrm>
-            <a:off x="6931152" y="3950208"/>
-            <a:ext cx="4617720" cy="685800"/>
+            <a:off x="6931152" y="3931920"/>
+            <a:ext cx="4617720" cy="722376"/>
           </a:xfrm>
           <a:prstGeom prst="rect">
             <a:avLst/>
@@ -31580,8 +35189,8 @@
         </p:nvSpPr>
         <p:spPr>
           <a:xfrm>
-            <a:off x="6931152" y="4910328"/>
-            <a:ext cx="4617720" cy="685800"/>
+            <a:off x="6931152" y="4892040"/>
+            <a:ext cx="4617720" cy="722376"/>
           </a:xfrm>
           <a:prstGeom prst="rect">
             <a:avLst/>
@@ -31949,7 +35558,7 @@
         <p:spPr>
           <a:xfrm>
             <a:off x="6675120" y="960120"/>
-            <a:ext cx="5029200" cy="1051560"/>
+            <a:ext cx="5029200" cy="1108710"/>
           </a:xfrm>
           <a:prstGeom prst="roundRect">
             <a:avLst/>
@@ -31992,7 +35601,7 @@
         <p:spPr>
           <a:xfrm>
             <a:off x="6675120" y="960120"/>
-            <a:ext cx="91440" cy="1051560"/>
+            <a:ext cx="91440" cy="1108710"/>
           </a:xfrm>
           <a:prstGeom prst="rect">
             <a:avLst/>
@@ -32034,8 +35643,8 @@
         </p:nvSpPr>
         <p:spPr>
           <a:xfrm>
-            <a:off x="6931152" y="1069848"/>
-            <a:ext cx="4617720" cy="868680"/>
+            <a:off x="6931152" y="1051560"/>
+            <a:ext cx="4617720" cy="962406"/>
           </a:xfrm>
           <a:prstGeom prst="rect">
             <a:avLst/>
@@ -32067,8 +35676,8 @@
         </p:nvSpPr>
         <p:spPr>
           <a:xfrm>
-            <a:off x="6675120" y="2103120"/>
-            <a:ext cx="5029200" cy="1051560"/>
+            <a:off x="6675120" y="2160270"/>
+            <a:ext cx="5029200" cy="1108710"/>
           </a:xfrm>
           <a:prstGeom prst="roundRect">
             <a:avLst/>
@@ -32110,8 +35719,8 @@
         </p:nvSpPr>
         <p:spPr>
           <a:xfrm>
-            <a:off x="6675120" y="2103120"/>
-            <a:ext cx="91440" cy="1051560"/>
+            <a:off x="6675120" y="2160270"/>
+            <a:ext cx="91440" cy="1108710"/>
           </a:xfrm>
           <a:prstGeom prst="rect">
             <a:avLst/>
@@ -32153,8 +35762,8 @@
         </p:nvSpPr>
         <p:spPr>
           <a:xfrm>
-            <a:off x="6931152" y="2212848"/>
-            <a:ext cx="4617720" cy="868680"/>
+            <a:off x="6931152" y="2251710"/>
+            <a:ext cx="4617720" cy="962406"/>
           </a:xfrm>
           <a:prstGeom prst="rect">
             <a:avLst/>
@@ -32186,8 +35795,8 @@
         </p:nvSpPr>
         <p:spPr>
           <a:xfrm>
-            <a:off x="6675120" y="3246120"/>
-            <a:ext cx="5029200" cy="1051560"/>
+            <a:off x="6675120" y="3360420"/>
+            <a:ext cx="5029200" cy="1108710"/>
           </a:xfrm>
           <a:prstGeom prst="roundRect">
             <a:avLst/>
@@ -32229,8 +35838,8 @@
         </p:nvSpPr>
         <p:spPr>
           <a:xfrm>
-            <a:off x="6675120" y="3246120"/>
-            <a:ext cx="91440" cy="1051560"/>
+            <a:off x="6675120" y="3360420"/>
+            <a:ext cx="91440" cy="1108710"/>
           </a:xfrm>
           <a:prstGeom prst="rect">
             <a:avLst/>
@@ -32272,8 +35881,8 @@
         </p:nvSpPr>
         <p:spPr>
           <a:xfrm>
-            <a:off x="6931152" y="3355848"/>
-            <a:ext cx="4617720" cy="868680"/>
+            <a:off x="6931152" y="3451860"/>
+            <a:ext cx="4617720" cy="962406"/>
           </a:xfrm>
           <a:prstGeom prst="rect">
             <a:avLst/>
@@ -32305,8 +35914,8 @@
         </p:nvSpPr>
         <p:spPr>
           <a:xfrm>
-            <a:off x="6675120" y="4389120"/>
-            <a:ext cx="5029200" cy="1051560"/>
+            <a:off x="6675120" y="4560570"/>
+            <a:ext cx="5029200" cy="1108710"/>
           </a:xfrm>
           <a:prstGeom prst="roundRect">
             <a:avLst/>
@@ -32348,8 +35957,8 @@
         </p:nvSpPr>
         <p:spPr>
           <a:xfrm>
-            <a:off x="6675120" y="4389120"/>
-            <a:ext cx="91440" cy="1051560"/>
+            <a:off x="6675120" y="4560570"/>
+            <a:ext cx="91440" cy="1108710"/>
           </a:xfrm>
           <a:prstGeom prst="rect">
             <a:avLst/>
@@ -32391,8 +36000,8 @@
         </p:nvSpPr>
         <p:spPr>
           <a:xfrm>
-            <a:off x="6931152" y="4498848"/>
-            <a:ext cx="4617720" cy="868680"/>
+            <a:off x="6931152" y="4652010"/>
+            <a:ext cx="4617720" cy="962406"/>
           </a:xfrm>
           <a:prstGeom prst="rect">
             <a:avLst/>
